--- a/slides/01-hello-spring-ai.pptx
+++ b/slides/01-hello-spring-ai.pptx
@@ -14,9 +14,10 @@
     <p:sldId id="262" r:id="rId8"/>
     <p:sldId id="263" r:id="rId9"/>
     <p:sldId id="264" r:id="rId10"/>
+    <p:sldId id="265" r:id="rId11"/>
   </p:sldIdLst>
   <p:notesMasterIdLst>
-    <p:notesMasterId r:id="rId11"/>
+    <p:notesMasterId r:id="rId12"/>
   </p:notesMasterIdLst>
   <p:sldSz cx="12192000" cy="6858000"/>
   <p:notesSz cx="6858000" cy="12192000"/>
@@ -552,6 +553,94 @@
 </p:notes>
 </file>
 
+<file path=ppt/notesSlides/notesSlide10.xml><?xml version="1.0" encoding="utf-8"?>
+<p:notes xmlns:a="http://schemas.openxmlformats.org/drawingml/2006/main" xmlns:r="http://schemas.openxmlformats.org/officeDocument/2006/relationships" xmlns:p="http://schemas.openxmlformats.org/presentationml/2006/main">
+  <p:cSld>
+    <p:spTree>
+      <p:nvGrpSpPr>
+        <p:cNvPr id="1" name=""/>
+        <p:cNvGrpSpPr/>
+        <p:nvPr/>
+      </p:nvGrpSpPr>
+      <p:grpSpPr>
+        <a:xfrm>
+          <a:off x="0" y="0"/>
+          <a:ext cx="0" cy="0"/>
+          <a:chOff x="0" y="0"/>
+          <a:chExt cx="0" cy="0"/>
+        </a:xfrm>
+      </p:grpSpPr>
+      <p:sp>
+        <p:nvSpPr>
+          <p:cNvPr id="2" name="Slide Image Placeholder 1"/>
+          <p:cNvSpPr>
+            <a:spLocks noGrp="1" noRot="1" noChangeAspect="1"/>
+          </p:cNvSpPr>
+          <p:nvPr>
+            <p:ph type="sldImg"/>
+          </p:nvPr>
+        </p:nvSpPr>
+        <p:spPr/>
+      </p:sp>
+      <p:sp>
+        <p:nvSpPr>
+          <p:cNvPr id="3" name="Notes Placeholder 2"/>
+          <p:cNvSpPr>
+            <a:spLocks noGrp="1"/>
+          </p:cNvSpPr>
+          <p:nvPr>
+            <p:ph type="body" idx="1"/>
+          </p:nvPr>
+        </p:nvSpPr>
+        <p:spPr/>
+        <p:txBody>
+          <a:bodyPr/>
+          <a:lstStyle/>
+          <a:p>
+            <a:r>
+              <a:rPr lang="en-US" dirty="0"/>
+              <a:t/>
+            </a:r>
+            <a:endParaRPr lang="en-US" dirty="0"/>
+          </a:p>
+        </p:txBody>
+      </p:sp>
+      <p:sp>
+        <p:nvSpPr>
+          <p:cNvPr id="4" name="Slide Number Placeholder 3"/>
+          <p:cNvSpPr>
+            <a:spLocks noGrp="1"/>
+          </p:cNvSpPr>
+          <p:nvPr>
+            <p:ph type="sldNum" sz="quarter" idx="10"/>
+          </p:nvPr>
+        </p:nvSpPr>
+        <p:spPr/>
+        <p:txBody>
+          <a:bodyPr/>
+          <a:lstStyle/>
+          <a:p>
+            <a:fld id="{F7021451-1387-4CA6-816F-3879F97B5CBC}" type="slidenum">
+              <a:rPr lang="en-US"/>
+              <a:t>10</a:t>
+            </a:fld>
+            <a:endParaRPr lang="en-US"/>
+          </a:p>
+        </p:txBody>
+      </p:sp>
+    </p:spTree>
+    <p:extLst>
+      <p:ext uri="{BB962C8B-B14F-4D97-AF65-F5344CB8AC3E}">
+        <p14:creationId xmlns:p14="http://schemas.microsoft.com/office/powerpoint/2010/main" val="1024086991"/>
+      </p:ext>
+    </p:extLst>
+  </p:cSld>
+  <p:clrMapOvr>
+    <a:masterClrMapping/>
+  </p:clrMapOvr>
+</p:notes>
+</file>
+
 <file path=ppt/notesSlides/notesSlide2.xml><?xml version="1.0" encoding="utf-8"?>
 <p:notes xmlns:a="http://schemas.openxmlformats.org/drawingml/2006/main" xmlns:r="http://schemas.openxmlformats.org/officeDocument/2006/relationships" xmlns:p="http://schemas.openxmlformats.org/presentationml/2006/main">
   <p:cSld>
@@ -1985,7 +2074,7 @@
                 <a:ea typeface="Courier New" pitchFamily="34" charset="-122"/>
                 <a:cs typeface="Courier New" pitchFamily="34" charset="-120"/>
               </a:rPr>
-              <a:t>1 / 9</a:t>
+              <a:t>1 / 10</a:t>
             </a:r>
             <a:endParaRPr lang="en-US" sz="1080" dirty="0"/>
           </a:p>
@@ -2299,6 +2388,1042 @@
               <a:t>Spring AI with Llama  ·  PromptToApps</a:t>
             </a:r>
             <a:endParaRPr lang="en-US" sz="1560" dirty="0"/>
+          </a:p>
+        </p:txBody>
+      </p:sp>
+    </p:spTree>
+  </p:cSld>
+  <p:clrMapOvr>
+    <a:masterClrMapping/>
+  </p:clrMapOvr>
+</p:sld>
+</file>
+
+<file path=ppt/slides/slide10.xml><?xml version="1.0" encoding="utf-8"?>
+<p:sld xmlns:a="http://schemas.openxmlformats.org/drawingml/2006/main" xmlns:r="http://schemas.openxmlformats.org/officeDocument/2006/relationships" xmlns:p="http://schemas.openxmlformats.org/presentationml/2006/main">
+  <p:cSld name="Slide 10">
+    <p:bg>
+      <p:bgPr>
+        <a:solidFill>
+          <a:srgbClr val="0A0F1C"/>
+        </a:solidFill>
+      </p:bgPr>
+    </p:bg>
+    <p:spTree>
+      <p:nvGrpSpPr>
+        <p:cNvPr id="1" name=""/>
+        <p:cNvGrpSpPr/>
+        <p:nvPr/>
+      </p:nvGrpSpPr>
+      <p:grpSpPr>
+        <a:xfrm>
+          <a:off x="0" y="0"/>
+          <a:ext cx="0" cy="0"/>
+          <a:chOff x="0" y="0"/>
+          <a:chExt cx="0" cy="0"/>
+        </a:xfrm>
+      </p:grpSpPr>
+      <p:sp>
+        <p:nvSpPr>
+          <p:cNvPr id="2" name="Shape 0"/>
+          <p:cNvSpPr/>
+          <p:nvPr/>
+        </p:nvSpPr>
+        <p:spPr>
+          <a:xfrm>
+            <a:off x="457200" y="365760"/>
+            <a:ext cx="731520" cy="457200"/>
+          </a:xfrm>
+          <a:prstGeom prst="line">
+            <a:avLst/>
+          </a:prstGeom>
+          <a:noFill/>
+          <a:ln w="9525">
+            <a:solidFill>
+              <a:srgbClr val="5B6478">
+                <a:alpha val="30000"/>
+              </a:srgbClr>
+            </a:solidFill>
+            <a:prstDash val="solid"/>
+          </a:ln>
+        </p:spPr>
+      </p:sp>
+      <p:sp>
+        <p:nvSpPr>
+          <p:cNvPr id="3" name="Shape 1"/>
+          <p:cNvSpPr/>
+          <p:nvPr/>
+        </p:nvSpPr>
+        <p:spPr>
+          <a:xfrm>
+            <a:off x="822960" y="822960"/>
+            <a:ext cx="365760" cy="731520"/>
+          </a:xfrm>
+          <a:prstGeom prst="line">
+            <a:avLst/>
+          </a:prstGeom>
+          <a:noFill/>
+          <a:ln w="9525">
+            <a:solidFill>
+              <a:srgbClr val="5B6478">
+                <a:alpha val="30000"/>
+              </a:srgbClr>
+            </a:solidFill>
+            <a:prstDash val="solid"/>
+          </a:ln>
+        </p:spPr>
+      </p:sp>
+      <p:sp>
+        <p:nvSpPr>
+          <p:cNvPr id="4" name="Shape 2"/>
+          <p:cNvSpPr/>
+          <p:nvPr/>
+        </p:nvSpPr>
+        <p:spPr>
+          <a:xfrm flipV="1">
+            <a:off x="822960" y="1280160"/>
+            <a:ext cx="914400" cy="274320"/>
+          </a:xfrm>
+          <a:prstGeom prst="line">
+            <a:avLst/>
+          </a:prstGeom>
+          <a:noFill/>
+          <a:ln w="9525">
+            <a:solidFill>
+              <a:srgbClr val="5B6478">
+                <a:alpha val="30000"/>
+              </a:srgbClr>
+            </a:solidFill>
+            <a:prstDash val="solid"/>
+          </a:ln>
+        </p:spPr>
+      </p:sp>
+      <p:sp>
+        <p:nvSpPr>
+          <p:cNvPr id="5" name="Shape 3"/>
+          <p:cNvSpPr/>
+          <p:nvPr/>
+        </p:nvSpPr>
+        <p:spPr>
+          <a:xfrm>
+            <a:off x="429768" y="338328"/>
+            <a:ext cx="54864" cy="54864"/>
+          </a:xfrm>
+          <a:prstGeom prst="ellipse">
+            <a:avLst/>
+          </a:prstGeom>
+          <a:solidFill>
+            <a:srgbClr val="8B98AC">
+              <a:alpha val="60000"/>
+            </a:srgbClr>
+          </a:solidFill>
+          <a:ln/>
+        </p:spPr>
+      </p:sp>
+      <p:sp>
+        <p:nvSpPr>
+          <p:cNvPr id="6" name="Shape 4"/>
+          <p:cNvSpPr/>
+          <p:nvPr/>
+        </p:nvSpPr>
+        <p:spPr>
+          <a:xfrm>
+            <a:off x="1161288" y="795528"/>
+            <a:ext cx="54864" cy="54864"/>
+          </a:xfrm>
+          <a:prstGeom prst="ellipse">
+            <a:avLst/>
+          </a:prstGeom>
+          <a:solidFill>
+            <a:srgbClr val="8B98AC">
+              <a:alpha val="60000"/>
+            </a:srgbClr>
+          </a:solidFill>
+          <a:ln/>
+        </p:spPr>
+      </p:sp>
+      <p:sp>
+        <p:nvSpPr>
+          <p:cNvPr id="7" name="Shape 5"/>
+          <p:cNvSpPr/>
+          <p:nvPr/>
+        </p:nvSpPr>
+        <p:spPr>
+          <a:xfrm>
+            <a:off x="795528" y="1527048"/>
+            <a:ext cx="54864" cy="54864"/>
+          </a:xfrm>
+          <a:prstGeom prst="ellipse">
+            <a:avLst/>
+          </a:prstGeom>
+          <a:solidFill>
+            <a:srgbClr val="8B98AC">
+              <a:alpha val="60000"/>
+            </a:srgbClr>
+          </a:solidFill>
+          <a:ln/>
+        </p:spPr>
+      </p:sp>
+      <p:sp>
+        <p:nvSpPr>
+          <p:cNvPr id="8" name="Shape 6"/>
+          <p:cNvSpPr/>
+          <p:nvPr/>
+        </p:nvSpPr>
+        <p:spPr>
+          <a:xfrm>
+            <a:off x="1709928" y="1252728"/>
+            <a:ext cx="54864" cy="54864"/>
+          </a:xfrm>
+          <a:prstGeom prst="ellipse">
+            <a:avLst/>
+          </a:prstGeom>
+          <a:solidFill>
+            <a:srgbClr val="8B98AC">
+              <a:alpha val="60000"/>
+            </a:srgbClr>
+          </a:solidFill>
+          <a:ln/>
+        </p:spPr>
+      </p:sp>
+      <p:sp>
+        <p:nvSpPr>
+          <p:cNvPr id="9" name="Shape 7"/>
+          <p:cNvSpPr/>
+          <p:nvPr/>
+        </p:nvSpPr>
+        <p:spPr>
+          <a:xfrm flipV="1">
+            <a:off x="10789920" y="5486400"/>
+            <a:ext cx="731520" cy="548640"/>
+          </a:xfrm>
+          <a:prstGeom prst="line">
+            <a:avLst/>
+          </a:prstGeom>
+          <a:noFill/>
+          <a:ln w="9525">
+            <a:solidFill>
+              <a:srgbClr val="5B6478">
+                <a:alpha val="30000"/>
+              </a:srgbClr>
+            </a:solidFill>
+            <a:prstDash val="solid"/>
+          </a:ln>
+        </p:spPr>
+      </p:sp>
+      <p:sp>
+        <p:nvSpPr>
+          <p:cNvPr id="10" name="Shape 8"/>
+          <p:cNvSpPr/>
+          <p:nvPr/>
+        </p:nvSpPr>
+        <p:spPr>
+          <a:xfrm flipV="1">
+            <a:off x="11155680" y="4754880"/>
+            <a:ext cx="365760" cy="731520"/>
+          </a:xfrm>
+          <a:prstGeom prst="line">
+            <a:avLst/>
+          </a:prstGeom>
+          <a:noFill/>
+          <a:ln w="9525">
+            <a:solidFill>
+              <a:srgbClr val="5B6478">
+                <a:alpha val="30000"/>
+              </a:srgbClr>
+            </a:solidFill>
+            <a:prstDash val="solid"/>
+          </a:ln>
+        </p:spPr>
+      </p:sp>
+      <p:sp>
+        <p:nvSpPr>
+          <p:cNvPr id="11" name="Shape 9"/>
+          <p:cNvSpPr/>
+          <p:nvPr/>
+        </p:nvSpPr>
+        <p:spPr>
+          <a:xfrm>
+            <a:off x="11155680" y="4754880"/>
+            <a:ext cx="731520" cy="365760"/>
+          </a:xfrm>
+          <a:prstGeom prst="line">
+            <a:avLst/>
+          </a:prstGeom>
+          <a:noFill/>
+          <a:ln w="9525">
+            <a:solidFill>
+              <a:srgbClr val="5B6478">
+                <a:alpha val="30000"/>
+              </a:srgbClr>
+            </a:solidFill>
+            <a:prstDash val="solid"/>
+          </a:ln>
+        </p:spPr>
+      </p:sp>
+      <p:sp>
+        <p:nvSpPr>
+          <p:cNvPr id="12" name="Shape 10"/>
+          <p:cNvSpPr/>
+          <p:nvPr/>
+        </p:nvSpPr>
+        <p:spPr>
+          <a:xfrm>
+            <a:off x="10762488" y="6007608"/>
+            <a:ext cx="54864" cy="54864"/>
+          </a:xfrm>
+          <a:prstGeom prst="ellipse">
+            <a:avLst/>
+          </a:prstGeom>
+          <a:solidFill>
+            <a:srgbClr val="8B98AC">
+              <a:alpha val="60000"/>
+            </a:srgbClr>
+          </a:solidFill>
+          <a:ln/>
+        </p:spPr>
+      </p:sp>
+      <p:sp>
+        <p:nvSpPr>
+          <p:cNvPr id="13" name="Shape 11"/>
+          <p:cNvSpPr/>
+          <p:nvPr/>
+        </p:nvSpPr>
+        <p:spPr>
+          <a:xfrm>
+            <a:off x="11494008" y="5458968"/>
+            <a:ext cx="54864" cy="54864"/>
+          </a:xfrm>
+          <a:prstGeom prst="ellipse">
+            <a:avLst/>
+          </a:prstGeom>
+          <a:solidFill>
+            <a:srgbClr val="8B98AC">
+              <a:alpha val="60000"/>
+            </a:srgbClr>
+          </a:solidFill>
+          <a:ln/>
+        </p:spPr>
+      </p:sp>
+      <p:sp>
+        <p:nvSpPr>
+          <p:cNvPr id="14" name="Shape 12"/>
+          <p:cNvSpPr/>
+          <p:nvPr/>
+        </p:nvSpPr>
+        <p:spPr>
+          <a:xfrm>
+            <a:off x="11128248" y="4727448"/>
+            <a:ext cx="54864" cy="54864"/>
+          </a:xfrm>
+          <a:prstGeom prst="ellipse">
+            <a:avLst/>
+          </a:prstGeom>
+          <a:solidFill>
+            <a:srgbClr val="8B98AC">
+              <a:alpha val="60000"/>
+            </a:srgbClr>
+          </a:solidFill>
+          <a:ln/>
+        </p:spPr>
+      </p:sp>
+      <p:sp>
+        <p:nvSpPr>
+          <p:cNvPr id="15" name="Shape 13"/>
+          <p:cNvSpPr/>
+          <p:nvPr/>
+        </p:nvSpPr>
+        <p:spPr>
+          <a:xfrm>
+            <a:off x="11859768" y="5093208"/>
+            <a:ext cx="54864" cy="54864"/>
+          </a:xfrm>
+          <a:prstGeom prst="ellipse">
+            <a:avLst/>
+          </a:prstGeom>
+          <a:solidFill>
+            <a:srgbClr val="8B98AC">
+              <a:alpha val="60000"/>
+            </a:srgbClr>
+          </a:solidFill>
+          <a:ln/>
+        </p:spPr>
+      </p:sp>
+      <p:sp>
+        <p:nvSpPr>
+          <p:cNvPr id="16" name="Text 14"/>
+          <p:cNvSpPr/>
+          <p:nvPr/>
+        </p:nvSpPr>
+        <p:spPr>
+          <a:xfrm>
+            <a:off x="457200" y="6355080"/>
+            <a:ext cx="2743200" cy="274320"/>
+          </a:xfrm>
+          <a:prstGeom prst="rect">
+            <a:avLst/>
+          </a:prstGeom>
+          <a:noFill/>
+          <a:ln/>
+        </p:spPr>
+        <p:txBody>
+          <a:bodyPr wrap="square" lIns="0" tIns="0" rIns="0" bIns="0" rtlCol="0" anchor="ctr"/>
+          <a:lstStyle/>
+          <a:p>
+            <a:pPr indent="0" marL="0">
+              <a:buNone/>
+            </a:pPr>
+            <a:r>
+              <a:rPr lang="en-US" sz="1080" dirty="0">
+                <a:solidFill>
+                  <a:srgbClr val="5B6478"/>
+                </a:solidFill>
+                <a:latin typeface="Courier New" pitchFamily="34" charset="0"/>
+                <a:ea typeface="Courier New" pitchFamily="34" charset="-122"/>
+                <a:cs typeface="Courier New" pitchFamily="34" charset="-120"/>
+              </a:rPr>
+              <a:t>PromptToApps</a:t>
+            </a:r>
+            <a:endParaRPr lang="en-US" sz="1080" dirty="0"/>
+          </a:p>
+        </p:txBody>
+      </p:sp>
+      <p:sp>
+        <p:nvSpPr>
+          <p:cNvPr id="17" name="Text 15"/>
+          <p:cNvSpPr/>
+          <p:nvPr/>
+        </p:nvSpPr>
+        <p:spPr>
+          <a:xfrm>
+            <a:off x="11247120" y="6355080"/>
+            <a:ext cx="731520" cy="274320"/>
+          </a:xfrm>
+          <a:prstGeom prst="rect">
+            <a:avLst/>
+          </a:prstGeom>
+          <a:noFill/>
+          <a:ln/>
+        </p:spPr>
+        <p:txBody>
+          <a:bodyPr wrap="square" lIns="0" tIns="0" rIns="0" bIns="0" rtlCol="0" anchor="ctr"/>
+          <a:lstStyle/>
+          <a:p>
+            <a:pPr algn="r" indent="0" marL="0">
+              <a:buNone/>
+            </a:pPr>
+            <a:r>
+              <a:rPr lang="en-US" sz="1080" dirty="0">
+                <a:solidFill>
+                  <a:srgbClr val="5B6478"/>
+                </a:solidFill>
+                <a:latin typeface="Courier New" pitchFamily="34" charset="0"/>
+                <a:ea typeface="Courier New" pitchFamily="34" charset="-122"/>
+                <a:cs typeface="Courier New" pitchFamily="34" charset="-120"/>
+              </a:rPr>
+              <a:t>10 / 10</a:t>
+            </a:r>
+            <a:endParaRPr lang="en-US" sz="1080" dirty="0"/>
+          </a:p>
+        </p:txBody>
+      </p:sp>
+      <p:sp>
+        <p:nvSpPr>
+          <p:cNvPr id="18" name="Text 16"/>
+          <p:cNvSpPr/>
+          <p:nvPr/>
+        </p:nvSpPr>
+        <p:spPr>
+          <a:xfrm>
+            <a:off x="640080" y="164592"/>
+            <a:ext cx="7315200" cy="274320"/>
+          </a:xfrm>
+          <a:prstGeom prst="rect">
+            <a:avLst/>
+          </a:prstGeom>
+          <a:noFill/>
+          <a:ln/>
+        </p:spPr>
+        <p:txBody>
+          <a:bodyPr wrap="square" lIns="0" tIns="0" rIns="0" bIns="0" rtlCol="0" anchor="ctr"/>
+          <a:lstStyle/>
+          <a:p>
+            <a:pPr indent="0" marL="0">
+              <a:buNone/>
+            </a:pPr>
+            <a:r>
+              <a:rPr lang="en-US" sz="1440" spc="200" kern="0" dirty="0">
+                <a:solidFill>
+                  <a:srgbClr val="5FE0C5"/>
+                </a:solidFill>
+                <a:latin typeface="Courier New" pitchFamily="34" charset="0"/>
+                <a:ea typeface="Courier New" pitchFamily="34" charset="-122"/>
+                <a:cs typeface="Courier New" pitchFamily="34" charset="-120"/>
+              </a:rPr>
+              <a:t>CREDITS &amp; THANKS</a:t>
+            </a:r>
+            <a:endParaRPr lang="en-US" sz="1440" dirty="0"/>
+          </a:p>
+        </p:txBody>
+      </p:sp>
+      <p:sp>
+        <p:nvSpPr>
+          <p:cNvPr id="19" name="Text 17"/>
+          <p:cNvSpPr/>
+          <p:nvPr/>
+        </p:nvSpPr>
+        <p:spPr>
+          <a:xfrm>
+            <a:off x="640080" y="457200"/>
+            <a:ext cx="10881360" cy="640080"/>
+          </a:xfrm>
+          <a:prstGeom prst="rect">
+            <a:avLst/>
+          </a:prstGeom>
+          <a:noFill/>
+          <a:ln/>
+        </p:spPr>
+        <p:txBody>
+          <a:bodyPr wrap="square" lIns="0" tIns="0" rIns="0" bIns="0" rtlCol="0" anchor="ctr"/>
+          <a:lstStyle/>
+          <a:p>
+            <a:pPr algn="l" indent="0" marL="0">
+              <a:buNone/>
+            </a:pPr>
+            <a:r>
+              <a:rPr lang="en-US" sz="3360" b="1" dirty="0">
+                <a:solidFill>
+                  <a:srgbClr val="F2A93B"/>
+                </a:solidFill>
+                <a:latin typeface="Courier New" pitchFamily="34" charset="0"/>
+                <a:ea typeface="Courier New" pitchFamily="34" charset="-122"/>
+                <a:cs typeface="Courier New" pitchFamily="34" charset="-120"/>
+              </a:rPr>
+              <a:t>This isn't my merit</a:t>
+            </a:r>
+            <a:endParaRPr lang="en-US" sz="3360" dirty="0"/>
+          </a:p>
+        </p:txBody>
+      </p:sp>
+      <p:sp>
+        <p:nvSpPr>
+          <p:cNvPr id="20" name="Text 18"/>
+          <p:cNvSpPr/>
+          <p:nvPr/>
+        </p:nvSpPr>
+        <p:spPr>
+          <a:xfrm>
+            <a:off x="640080" y="1371600"/>
+            <a:ext cx="10881360" cy="731520"/>
+          </a:xfrm>
+          <a:prstGeom prst="rect">
+            <a:avLst/>
+          </a:prstGeom>
+          <a:noFill/>
+          <a:ln/>
+        </p:spPr>
+        <p:txBody>
+          <a:bodyPr wrap="square" lIns="0" tIns="0" rIns="0" bIns="0" rtlCol="0" anchor="ctr"/>
+          <a:lstStyle/>
+          <a:p>
+            <a:pPr algn="ctr" indent="0" marL="0">
+              <a:lnSpc>
+                <a:spcPct val="120000"/>
+              </a:lnSpc>
+              <a:buNone/>
+            </a:pPr>
+            <a:r>
+              <a:rPr lang="en-US" sz="1920" dirty="0">
+                <a:solidFill>
+                  <a:srgbClr val="B8C0D0"/>
+                </a:solidFill>
+                <a:latin typeface="Calibri" pitchFamily="34" charset="0"/>
+                <a:ea typeface="Calibri" pitchFamily="34" charset="-122"/>
+                <a:cs typeface="Calibri" pitchFamily="34" charset="-120"/>
+              </a:rPr>
+              <a:t>Everything in this series is built on the work of open-source projects and their communities. I only learned from them and shared what I built.</a:t>
+            </a:r>
+            <a:endParaRPr lang="en-US" sz="1920" dirty="0"/>
+          </a:p>
+        </p:txBody>
+      </p:sp>
+      <p:sp>
+        <p:nvSpPr>
+          <p:cNvPr id="21" name="Shape 19"/>
+          <p:cNvSpPr/>
+          <p:nvPr/>
+        </p:nvSpPr>
+        <p:spPr>
+          <a:xfrm>
+            <a:off x="822960" y="2423160"/>
+            <a:ext cx="5029200" cy="2011680"/>
+          </a:xfrm>
+          <a:prstGeom prst="roundRect">
+            <a:avLst>
+              <a:gd name="adj" fmla="val 5455"/>
+            </a:avLst>
+          </a:prstGeom>
+          <a:solidFill>
+            <a:srgbClr val="121A2E"/>
+          </a:solidFill>
+          <a:ln w="19050">
+            <a:solidFill>
+              <a:srgbClr val="5FE0C5"/>
+            </a:solidFill>
+            <a:prstDash val="solid"/>
+          </a:ln>
+          <a:effectLst>
+            <a:outerShdw sx="100000" sy="100000" kx="0" ky="0" algn="bl" rotWithShape="0" blurRad="101600" dist="38100" dir="2700000">
+              <a:srgbClr val="000000">
+                <a:alpha val="25000"/>
+              </a:srgbClr>
+            </a:outerShdw>
+          </a:effectLst>
+        </p:spPr>
+      </p:sp>
+      <p:sp>
+        <p:nvSpPr>
+          <p:cNvPr id="22" name="Text 20"/>
+          <p:cNvSpPr/>
+          <p:nvPr/>
+        </p:nvSpPr>
+        <p:spPr>
+          <a:xfrm>
+            <a:off x="1143000" y="2697480"/>
+            <a:ext cx="4389120" cy="548640"/>
+          </a:xfrm>
+          <a:prstGeom prst="rect">
+            <a:avLst/>
+          </a:prstGeom>
+          <a:noFill/>
+          <a:ln/>
+        </p:spPr>
+        <p:txBody>
+          <a:bodyPr wrap="square" lIns="0" tIns="0" rIns="0" bIns="0" rtlCol="0" anchor="ctr"/>
+          <a:lstStyle/>
+          <a:p>
+            <a:pPr indent="0" marL="0">
+              <a:buNone/>
+            </a:pPr>
+            <a:r>
+              <a:rPr lang="en-US" sz="2640" b="1" dirty="0">
+                <a:solidFill>
+                  <a:srgbClr val="5FE0C5"/>
+                </a:solidFill>
+                <a:latin typeface="Courier New" pitchFamily="34" charset="0"/>
+                <a:ea typeface="Courier New" pitchFamily="34" charset="-122"/>
+                <a:cs typeface="Courier New" pitchFamily="34" charset="-120"/>
+              </a:rPr>
+              <a:t>Spring AI</a:t>
+            </a:r>
+            <a:endParaRPr lang="en-US" sz="2640" dirty="0"/>
+          </a:p>
+        </p:txBody>
+      </p:sp>
+      <p:sp>
+        <p:nvSpPr>
+          <p:cNvPr id="23" name="Text 21"/>
+          <p:cNvSpPr/>
+          <p:nvPr/>
+        </p:nvSpPr>
+        <p:spPr>
+          <a:xfrm>
+            <a:off x="1143000" y="3337560"/>
+            <a:ext cx="4389120" cy="457200"/>
+          </a:xfrm>
+          <a:prstGeom prst="rect">
+            <a:avLst/>
+          </a:prstGeom>
+          <a:noFill/>
+          <a:ln/>
+        </p:spPr>
+        <p:txBody>
+          <a:bodyPr wrap="square" lIns="0" tIns="0" rIns="0" bIns="0" rtlCol="0" anchor="ctr"/>
+          <a:lstStyle/>
+          <a:p>
+            <a:pPr indent="0" marL="0">
+              <a:buNone/>
+            </a:pPr>
+            <a:r>
+              <a:rPr lang="en-US" sz="1560" dirty="0">
+                <a:solidFill>
+                  <a:srgbClr val="E5E9F0"/>
+                </a:solidFill>
+                <a:latin typeface="Calibri" pitchFamily="34" charset="0"/>
+                <a:ea typeface="Calibri" pitchFamily="34" charset="-122"/>
+                <a:cs typeface="Calibri" pitchFamily="34" charset="-120"/>
+              </a:rPr>
+              <a:t>The AI integration layer for Spring</a:t>
+            </a:r>
+            <a:endParaRPr lang="en-US" sz="1560" dirty="0"/>
+          </a:p>
+        </p:txBody>
+      </p:sp>
+      <p:sp>
+        <p:nvSpPr>
+          <p:cNvPr id="24" name="Text 22"/>
+          <p:cNvSpPr/>
+          <p:nvPr/>
+        </p:nvSpPr>
+        <p:spPr>
+          <a:xfrm>
+            <a:off x="1143000" y="3840480"/>
+            <a:ext cx="4389120" cy="365760"/>
+          </a:xfrm>
+          <a:prstGeom prst="rect">
+            <a:avLst/>
+          </a:prstGeom>
+          <a:noFill/>
+          <a:ln/>
+        </p:spPr>
+        <p:txBody>
+          <a:bodyPr wrap="square" lIns="0" tIns="0" rIns="0" bIns="0" rtlCol="0" anchor="ctr"/>
+          <a:lstStyle/>
+          <a:p>
+            <a:pPr indent="0" marL="0">
+              <a:buNone/>
+            </a:pPr>
+            <a:r>
+              <a:rPr lang="en-US" sz="1440" dirty="0">
+                <a:solidFill>
+                  <a:srgbClr val="8B98AC"/>
+                </a:solidFill>
+                <a:latin typeface="Courier New" pitchFamily="34" charset="0"/>
+                <a:ea typeface="Courier New" pitchFamily="34" charset="-122"/>
+                <a:cs typeface="Courier New" pitchFamily="34" charset="-120"/>
+              </a:rPr>
+              <a:t>spring.io/projects/spring-ai</a:t>
+            </a:r>
+            <a:endParaRPr lang="en-US" sz="1440" dirty="0"/>
+          </a:p>
+        </p:txBody>
+      </p:sp>
+      <p:sp>
+        <p:nvSpPr>
+          <p:cNvPr id="25" name="Shape 23"/>
+          <p:cNvSpPr/>
+          <p:nvPr/>
+        </p:nvSpPr>
+        <p:spPr>
+          <a:xfrm>
+            <a:off x="6309360" y="2423160"/>
+            <a:ext cx="5029200" cy="2011680"/>
+          </a:xfrm>
+          <a:prstGeom prst="roundRect">
+            <a:avLst>
+              <a:gd name="adj" fmla="val 5455"/>
+            </a:avLst>
+          </a:prstGeom>
+          <a:solidFill>
+            <a:srgbClr val="121A2E"/>
+          </a:solidFill>
+          <a:ln w="19050">
+            <a:solidFill>
+              <a:srgbClr val="F2A93B"/>
+            </a:solidFill>
+            <a:prstDash val="solid"/>
+          </a:ln>
+          <a:effectLst>
+            <a:outerShdw sx="100000" sy="100000" kx="0" ky="0" algn="bl" rotWithShape="0" blurRad="101600" dist="38100" dir="2700000">
+              <a:srgbClr val="000000">
+                <a:alpha val="25000"/>
+              </a:srgbClr>
+            </a:outerShdw>
+          </a:effectLst>
+        </p:spPr>
+      </p:sp>
+      <p:sp>
+        <p:nvSpPr>
+          <p:cNvPr id="26" name="Text 24"/>
+          <p:cNvSpPr/>
+          <p:nvPr/>
+        </p:nvSpPr>
+        <p:spPr>
+          <a:xfrm>
+            <a:off x="6629400" y="2697480"/>
+            <a:ext cx="4389120" cy="548640"/>
+          </a:xfrm>
+          <a:prstGeom prst="rect">
+            <a:avLst/>
+          </a:prstGeom>
+          <a:noFill/>
+          <a:ln/>
+        </p:spPr>
+        <p:txBody>
+          <a:bodyPr wrap="square" lIns="0" tIns="0" rIns="0" bIns="0" rtlCol="0" anchor="ctr"/>
+          <a:lstStyle/>
+          <a:p>
+            <a:pPr indent="0" marL="0">
+              <a:buNone/>
+            </a:pPr>
+            <a:r>
+              <a:rPr lang="en-US" sz="2640" b="1" dirty="0">
+                <a:solidFill>
+                  <a:srgbClr val="F2A93B"/>
+                </a:solidFill>
+                <a:latin typeface="Courier New" pitchFamily="34" charset="0"/>
+                <a:ea typeface="Courier New" pitchFamily="34" charset="-122"/>
+                <a:cs typeface="Courier New" pitchFamily="34" charset="-120"/>
+              </a:rPr>
+              <a:t>Ollama</a:t>
+            </a:r>
+            <a:endParaRPr lang="en-US" sz="2640" dirty="0"/>
+          </a:p>
+        </p:txBody>
+      </p:sp>
+      <p:sp>
+        <p:nvSpPr>
+          <p:cNvPr id="27" name="Text 25"/>
+          <p:cNvSpPr/>
+          <p:nvPr/>
+        </p:nvSpPr>
+        <p:spPr>
+          <a:xfrm>
+            <a:off x="6629400" y="3337560"/>
+            <a:ext cx="4389120" cy="457200"/>
+          </a:xfrm>
+          <a:prstGeom prst="rect">
+            <a:avLst/>
+          </a:prstGeom>
+          <a:noFill/>
+          <a:ln/>
+        </p:spPr>
+        <p:txBody>
+          <a:bodyPr wrap="square" lIns="0" tIns="0" rIns="0" bIns="0" rtlCol="0" anchor="ctr"/>
+          <a:lstStyle/>
+          <a:p>
+            <a:pPr indent="0" marL="0">
+              <a:buNone/>
+            </a:pPr>
+            <a:r>
+              <a:rPr lang="en-US" sz="1560" dirty="0">
+                <a:solidFill>
+                  <a:srgbClr val="E5E9F0"/>
+                </a:solidFill>
+                <a:latin typeface="Calibri" pitchFamily="34" charset="0"/>
+                <a:ea typeface="Calibri" pitchFamily="34" charset="-122"/>
+                <a:cs typeface="Calibri" pitchFamily="34" charset="-120"/>
+              </a:rPr>
+              <a:t>Run open LLMs locally</a:t>
+            </a:r>
+            <a:endParaRPr lang="en-US" sz="1560" dirty="0"/>
+          </a:p>
+        </p:txBody>
+      </p:sp>
+      <p:sp>
+        <p:nvSpPr>
+          <p:cNvPr id="28" name="Text 26"/>
+          <p:cNvSpPr/>
+          <p:nvPr/>
+        </p:nvSpPr>
+        <p:spPr>
+          <a:xfrm>
+            <a:off x="6629400" y="3840480"/>
+            <a:ext cx="4389120" cy="365760"/>
+          </a:xfrm>
+          <a:prstGeom prst="rect">
+            <a:avLst/>
+          </a:prstGeom>
+          <a:noFill/>
+          <a:ln/>
+        </p:spPr>
+        <p:txBody>
+          <a:bodyPr wrap="square" lIns="0" tIns="0" rIns="0" bIns="0" rtlCol="0" anchor="ctr"/>
+          <a:lstStyle/>
+          <a:p>
+            <a:pPr indent="0" marL="0">
+              <a:buNone/>
+            </a:pPr>
+            <a:r>
+              <a:rPr lang="en-US" sz="1440" dirty="0">
+                <a:solidFill>
+                  <a:srgbClr val="8B98AC"/>
+                </a:solidFill>
+                <a:latin typeface="Courier New" pitchFamily="34" charset="0"/>
+                <a:ea typeface="Courier New" pitchFamily="34" charset="-122"/>
+                <a:cs typeface="Courier New" pitchFamily="34" charset="-120"/>
+              </a:rPr>
+              <a:t>ollama.com</a:t>
+            </a:r>
+            <a:endParaRPr lang="en-US" sz="1440" dirty="0"/>
+          </a:p>
+        </p:txBody>
+      </p:sp>
+      <p:sp>
+        <p:nvSpPr>
+          <p:cNvPr id="29" name="Shape 27"/>
+          <p:cNvSpPr/>
+          <p:nvPr/>
+        </p:nvSpPr>
+        <p:spPr>
+          <a:xfrm>
+            <a:off x="4251960" y="4892040"/>
+            <a:ext cx="3657600" cy="0"/>
+          </a:xfrm>
+          <a:prstGeom prst="line">
+            <a:avLst/>
+          </a:prstGeom>
+          <a:noFill/>
+          <a:ln w="12700">
+            <a:solidFill>
+              <a:srgbClr val="5B6478">
+                <a:alpha val="70000"/>
+              </a:srgbClr>
+            </a:solidFill>
+            <a:prstDash val="solid"/>
+          </a:ln>
+        </p:spPr>
+      </p:sp>
+      <p:sp>
+        <p:nvSpPr>
+          <p:cNvPr id="30" name="Shape 28"/>
+          <p:cNvSpPr/>
+          <p:nvPr/>
+        </p:nvSpPr>
+        <p:spPr>
+          <a:xfrm>
+            <a:off x="4210812" y="4850892"/>
+            <a:ext cx="82296" cy="82296"/>
+          </a:xfrm>
+          <a:prstGeom prst="ellipse">
+            <a:avLst/>
+          </a:prstGeom>
+          <a:solidFill>
+            <a:srgbClr val="0A0F1C"/>
+          </a:solidFill>
+          <a:ln w="19050">
+            <a:solidFill>
+              <a:srgbClr val="F2A93B"/>
+            </a:solidFill>
+            <a:prstDash val="solid"/>
+          </a:ln>
+        </p:spPr>
+      </p:sp>
+      <p:sp>
+        <p:nvSpPr>
+          <p:cNvPr id="31" name="Shape 29"/>
+          <p:cNvSpPr/>
+          <p:nvPr/>
+        </p:nvSpPr>
+        <p:spPr>
+          <a:xfrm>
+            <a:off x="6039612" y="4850892"/>
+            <a:ext cx="82296" cy="82296"/>
+          </a:xfrm>
+          <a:prstGeom prst="ellipse">
+            <a:avLst/>
+          </a:prstGeom>
+          <a:solidFill>
+            <a:srgbClr val="0A0F1C"/>
+          </a:solidFill>
+          <a:ln w="19050">
+            <a:solidFill>
+              <a:srgbClr val="8B98AC"/>
+            </a:solidFill>
+            <a:prstDash val="solid"/>
+          </a:ln>
+        </p:spPr>
+      </p:sp>
+      <p:sp>
+        <p:nvSpPr>
+          <p:cNvPr id="32" name="Shape 30"/>
+          <p:cNvSpPr/>
+          <p:nvPr/>
+        </p:nvSpPr>
+        <p:spPr>
+          <a:xfrm>
+            <a:off x="7868412" y="4850892"/>
+            <a:ext cx="82296" cy="82296"/>
+          </a:xfrm>
+          <a:prstGeom prst="ellipse">
+            <a:avLst/>
+          </a:prstGeom>
+          <a:solidFill>
+            <a:srgbClr val="0A0F1C"/>
+          </a:solidFill>
+          <a:ln w="19050">
+            <a:solidFill>
+              <a:srgbClr val="5FE0C5"/>
+            </a:solidFill>
+            <a:prstDash val="solid"/>
+          </a:ln>
+        </p:spPr>
+      </p:sp>
+      <p:sp>
+        <p:nvSpPr>
+          <p:cNvPr id="33" name="Text 31"/>
+          <p:cNvSpPr/>
+          <p:nvPr/>
+        </p:nvSpPr>
+        <p:spPr>
+          <a:xfrm>
+            <a:off x="0" y="5120640"/>
+            <a:ext cx="12161520" cy="457200"/>
+          </a:xfrm>
+          <a:prstGeom prst="rect">
+            <a:avLst/>
+          </a:prstGeom>
+          <a:noFill/>
+          <a:ln/>
+        </p:spPr>
+        <p:txBody>
+          <a:bodyPr wrap="square" lIns="0" tIns="0" rIns="0" bIns="0" rtlCol="0" anchor="ctr"/>
+          <a:lstStyle/>
+          <a:p>
+            <a:pPr algn="ctr" indent="0" marL="0">
+              <a:buNone/>
+            </a:pPr>
+            <a:r>
+              <a:rPr lang="en-US" sz="1680" dirty="0">
+                <a:solidFill>
+                  <a:srgbClr val="E5E9F0"/>
+                </a:solidFill>
+                <a:latin typeface="Calibri" pitchFamily="34" charset="0"/>
+                <a:ea typeface="Calibri" pitchFamily="34" charset="-122"/>
+                <a:cs typeface="Calibri" pitchFamily="34" charset="-120"/>
+              </a:rPr>
+              <a:t>Shared with gratitude — all credit to their maintainers &amp; contributors.</a:t>
+            </a:r>
+            <a:endParaRPr lang="en-US" sz="1680" dirty="0"/>
+          </a:p>
+        </p:txBody>
+      </p:sp>
+      <p:sp>
+        <p:nvSpPr>
+          <p:cNvPr id="34" name="Text 32"/>
+          <p:cNvSpPr/>
+          <p:nvPr/>
+        </p:nvSpPr>
+        <p:spPr>
+          <a:xfrm>
+            <a:off x="0" y="5623560"/>
+            <a:ext cx="12161520" cy="365760"/>
+          </a:xfrm>
+          <a:prstGeom prst="rect">
+            <a:avLst/>
+          </a:prstGeom>
+          <a:noFill/>
+          <a:ln/>
+        </p:spPr>
+        <p:txBody>
+          <a:bodyPr wrap="square" lIns="0" tIns="0" rIns="0" bIns="0" rtlCol="0" anchor="ctr"/>
+          <a:lstStyle/>
+          <a:p>
+            <a:pPr algn="ctr" indent="0" marL="0">
+              <a:buNone/>
+            </a:pPr>
+            <a:r>
+              <a:rPr lang="en-US" sz="1440" dirty="0">
+                <a:solidFill>
+                  <a:srgbClr val="8B98AC"/>
+                </a:solidFill>
+                <a:latin typeface="Courier New" pitchFamily="34" charset="0"/>
+                <a:ea typeface="Courier New" pitchFamily="34" charset="-122"/>
+                <a:cs typeface="Courier New" pitchFamily="34" charset="-120"/>
+              </a:rPr>
+              <a:t>github.com/balajich/spring-ai-with-llama</a:t>
+            </a:r>
+            <a:endParaRPr lang="en-US" sz="1440" dirty="0"/>
           </a:p>
         </p:txBody>
       </p:sp>
@@ -2732,7 +3857,7 @@
                 <a:ea typeface="Courier New" pitchFamily="34" charset="-122"/>
                 <a:cs typeface="Courier New" pitchFamily="34" charset="-120"/>
               </a:rPr>
-              <a:t>2 / 9</a:t>
+              <a:t>2 / 10</a:t>
             </a:r>
             <a:endParaRPr lang="en-US" sz="1080" dirty="0"/>
           </a:p>
@@ -3705,7 +4830,7 @@
                 <a:ea typeface="Courier New" pitchFamily="34" charset="-122"/>
                 <a:cs typeface="Courier New" pitchFamily="34" charset="-120"/>
               </a:rPr>
-              <a:t>3 / 9</a:t>
+              <a:t>3 / 10</a:t>
             </a:r>
             <a:endParaRPr lang="en-US" sz="1080" dirty="0"/>
           </a:p>
@@ -3744,7 +4869,7 @@
                 <a:ea typeface="Courier New" pitchFamily="34" charset="-122"/>
                 <a:cs typeface="Courier New" pitchFamily="34" charset="-120"/>
               </a:rPr>
-              <a:t>CORE CONCEPT</a:t>
+              <a:t>WHY THIS STACK</a:t>
             </a:r>
             <a:endParaRPr lang="en-US" sz="1440" dirty="0"/>
           </a:p>
@@ -3783,7 +4908,7 @@
                 <a:ea typeface="Courier New" pitchFamily="34" charset="-122"/>
                 <a:cs typeface="Courier New" pitchFamily="34" charset="-120"/>
               </a:rPr>
-              <a:t>ChatClient — one API for any model</a:t>
+              <a:t>Why Spring AI?</a:t>
             </a:r>
             <a:endParaRPr lang="en-US" sz="3360" dirty="0"/>
           </a:p>
@@ -3797,8 +4922,8 @@
         </p:nvSpPr>
         <p:spPr>
           <a:xfrm>
-            <a:off x="640080" y="1463040"/>
-            <a:ext cx="10881360" cy="1188720"/>
+            <a:off x="640080" y="1371600"/>
+            <a:ext cx="10881360" cy="457200"/>
           </a:xfrm>
           <a:prstGeom prst="rect">
             <a:avLst/>
@@ -3811,74 +4936,20 @@
           <a:lstStyle/>
           <a:p>
             <a:pPr indent="0" marL="0">
-              <a:lnSpc>
-                <a:spcPct val="130000"/>
-              </a:lnSpc>
-              <a:buNone/>
-            </a:pPr>
-            <a:r>
-              <a:rPr lang="en-US" sz="2160" b="1" dirty="0">
-                <a:solidFill>
-                  <a:srgbClr val="5FE0C5"/>
-                </a:solidFill>
-                <a:latin typeface="Courier New" pitchFamily="34" charset="0"/>
-                <a:ea typeface="Courier New" pitchFamily="34" charset="-122"/>
-                <a:cs typeface="Courier New" pitchFamily="34" charset="-120"/>
-              </a:rPr>
-              <a:t>ChatClient</a:t>
-            </a:r>
-            <a:pPr indent="0" marL="0">
-              <a:lnSpc>
-                <a:spcPct val="130000"/>
-              </a:lnSpc>
-              <a:buNone/>
-            </a:pPr>
-            <a:r>
-              <a:rPr lang="en-US" sz="2160" dirty="0">
-                <a:solidFill>
-                  <a:srgbClr val="E5E9F0"/>
+              <a:buNone/>
+            </a:pPr>
+            <a:r>
+              <a:rPr lang="en-US" sz="1920" dirty="0">
+                <a:solidFill>
+                  <a:srgbClr val="B8C0D0"/>
                 </a:solidFill>
                 <a:latin typeface="Calibri" pitchFamily="34" charset="0"/>
                 <a:ea typeface="Calibri" pitchFamily="34" charset="-122"/>
                 <a:cs typeface="Calibri" pitchFamily="34" charset="-120"/>
               </a:rPr>
-              <a:t> is Spring AI's single fluent API for talking to an LLM — build it once with </a:t>
-            </a:r>
-            <a:pPr indent="0" marL="0">
-              <a:lnSpc>
-                <a:spcPct val="130000"/>
-              </a:lnSpc>
-              <a:buNone/>
-            </a:pPr>
-            <a:r>
-              <a:rPr lang="en-US" sz="2160" dirty="0">
-                <a:solidFill>
-                  <a:srgbClr val="F2A93B"/>
-                </a:solidFill>
-                <a:latin typeface="Courier New" pitchFamily="34" charset="0"/>
-                <a:ea typeface="Courier New" pitchFamily="34" charset="-122"/>
-                <a:cs typeface="Courier New" pitchFamily="34" charset="-120"/>
-              </a:rPr>
-              <a:t>.prompt().user(...).call()</a:t>
-            </a:r>
-            <a:pPr indent="0" marL="0">
-              <a:lnSpc>
-                <a:spcPct val="130000"/>
-              </a:lnSpc>
-              <a:buNone/>
-            </a:pPr>
-            <a:r>
-              <a:rPr lang="en-US" sz="2160" dirty="0">
-                <a:solidFill>
-                  <a:srgbClr val="E5E9F0"/>
-                </a:solidFill>
-                <a:latin typeface="Calibri" pitchFamily="34" charset="0"/>
-                <a:ea typeface="Calibri" pitchFamily="34" charset="-122"/>
-                <a:cs typeface="Calibri" pitchFamily="34" charset="-120"/>
-              </a:rPr>
-              <a:t>, and the model behind it can change without touching your code.</a:t>
-            </a:r>
-            <a:endParaRPr lang="en-US" sz="2160" dirty="0"/>
+              <a:t>You could call the model's HTTP API by hand. Spring AI gives you a lot more for free.</a:t>
+            </a:r>
+            <a:endParaRPr lang="en-US" sz="1920" dirty="0"/>
           </a:p>
         </p:txBody>
       </p:sp>
@@ -3890,21 +4961,30 @@
         </p:nvSpPr>
         <p:spPr>
           <a:xfrm>
-            <a:off x="640080" y="2926080"/>
-            <a:ext cx="320040" cy="320040"/>
-          </a:xfrm>
-          <a:prstGeom prst="ellipse">
-            <a:avLst/>
-          </a:prstGeom>
-          <a:solidFill>
-            <a:srgbClr val="0A0F1C"/>
-          </a:solidFill>
-          <a:ln w="22225">
+            <a:off x="640080" y="2011680"/>
+            <a:ext cx="5257800" cy="1737360"/>
+          </a:xfrm>
+          <a:prstGeom prst="roundRect">
+            <a:avLst>
+              <a:gd name="adj" fmla="val 6316"/>
+            </a:avLst>
+          </a:prstGeom>
+          <a:solidFill>
+            <a:srgbClr val="121A2E"/>
+          </a:solidFill>
+          <a:ln w="15875">
             <a:solidFill>
               <a:srgbClr val="F2A93B"/>
             </a:solidFill>
             <a:prstDash val="solid"/>
           </a:ln>
+          <a:effectLst>
+            <a:outerShdw sx="100000" sy="100000" kx="0" ky="0" algn="bl" rotWithShape="0" blurRad="101600" dist="38100" dir="2700000">
+              <a:srgbClr val="000000">
+                <a:alpha val="25000"/>
+              </a:srgbClr>
+            </a:outerShdw>
+          </a:effectLst>
         </p:spPr>
       </p:sp>
       <p:sp>
@@ -3915,8 +4995,8 @@
         </p:nvSpPr>
         <p:spPr>
           <a:xfrm>
-            <a:off x="640080" y="2926080"/>
-            <a:ext cx="320040" cy="320040"/>
+            <a:off x="914400" y="2212848"/>
+            <a:ext cx="4709160" cy="411480"/>
           </a:xfrm>
           <a:prstGeom prst="rect">
             <a:avLst/>
@@ -3928,11 +5008,11 @@
           <a:bodyPr wrap="square" lIns="0" tIns="0" rIns="0" bIns="0" rtlCol="0" anchor="ctr"/>
           <a:lstStyle/>
           <a:p>
-            <a:pPr algn="ctr" indent="0" marL="0">
-              <a:buNone/>
-            </a:pPr>
-            <a:r>
-              <a:rPr lang="en-US" sz="1560" b="1" dirty="0">
+            <a:pPr indent="0" marL="0">
+              <a:buNone/>
+            </a:pPr>
+            <a:r>
+              <a:rPr lang="en-US" sz="2040" b="1" dirty="0">
                 <a:solidFill>
                   <a:srgbClr val="F2A93B"/>
                 </a:solidFill>
@@ -3940,9 +5020,9 @@
                 <a:ea typeface="Courier New" pitchFamily="34" charset="-122"/>
                 <a:cs typeface="Courier New" pitchFamily="34" charset="-120"/>
               </a:rPr>
-              <a:t>1</a:t>
-            </a:r>
-            <a:endParaRPr lang="en-US" sz="1560" dirty="0"/>
+              <a:t>Provider-agnostic</a:t>
+            </a:r>
+            <a:endParaRPr lang="en-US" sz="2040" dirty="0"/>
           </a:p>
         </p:txBody>
       </p:sp>
@@ -3954,8 +5034,8 @@
         </p:nvSpPr>
         <p:spPr>
           <a:xfrm>
-            <a:off x="1143000" y="2880360"/>
-            <a:ext cx="10058400" cy="868680"/>
+            <a:off x="914400" y="2670048"/>
+            <a:ext cx="4709160" cy="914400"/>
           </a:xfrm>
           <a:prstGeom prst="rect">
             <a:avLst/>
@@ -3968,10 +5048,13 @@
           <a:lstStyle/>
           <a:p>
             <a:pPr indent="0" marL="0">
-              <a:buNone/>
-            </a:pPr>
-            <a:r>
-              <a:rPr lang="en-US" sz="1920" b="1" dirty="0">
+              <a:lnSpc>
+                <a:spcPct val="110000"/>
+              </a:lnSpc>
+              <a:buNone/>
+            </a:pPr>
+            <a:r>
+              <a:rPr lang="en-US" sz="1560" dirty="0">
                 <a:solidFill>
                   <a:srgbClr val="E5E9F0"/>
                 </a:solidFill>
@@ -3979,26 +5062,29 @@
                 <a:ea typeface="Calibri" pitchFamily="34" charset="-122"/>
                 <a:cs typeface="Calibri" pitchFamily="34" charset="-120"/>
               </a:rPr>
-              <a:t>Builder pattern</a:t>
-            </a:r>
-            <a:endParaRPr lang="en-US" sz="1920" dirty="0"/>
+              <a:t>One ChatClient API — swap Ollama, OpenAI, Anthropic</a:t>
+            </a:r>
+            <a:endParaRPr lang="en-US" sz="1560" dirty="0"/>
           </a:p>
           <a:p>
             <a:pPr indent="0" marL="0">
-              <a:buNone/>
-            </a:pPr>
-            <a:r>
-              <a:rPr lang="en-US" sz="1620" dirty="0">
-                <a:solidFill>
-                  <a:srgbClr val="B8C0D0"/>
+              <a:lnSpc>
+                <a:spcPct val="110000"/>
+              </a:lnSpc>
+              <a:buNone/>
+            </a:pPr>
+            <a:r>
+              <a:rPr lang="en-US" sz="1560" dirty="0">
+                <a:solidFill>
+                  <a:srgbClr val="E5E9F0"/>
                 </a:solidFill>
                 <a:latin typeface="Calibri" pitchFamily="34" charset="0"/>
                 <a:ea typeface="Calibri" pitchFamily="34" charset="-122"/>
                 <a:cs typeface="Calibri" pitchFamily="34" charset="-120"/>
               </a:rPr>
-              <a:t>ChatClient.builder(chatModel).build() — configure once, reuse everywhere</a:t>
-            </a:r>
-            <a:endParaRPr lang="en-US" sz="1920" dirty="0"/>
+              <a:t>with a config change, not a rewrite.</a:t>
+            </a:r>
+            <a:endParaRPr lang="en-US" sz="1560" dirty="0"/>
           </a:p>
         </p:txBody>
       </p:sp>
@@ -4010,33 +5096,177 @@
         </p:nvSpPr>
         <p:spPr>
           <a:xfrm>
-            <a:off x="640080" y="3886200"/>
-            <a:ext cx="320040" cy="320040"/>
-          </a:xfrm>
-          <a:prstGeom prst="ellipse">
-            <a:avLst/>
-          </a:prstGeom>
-          <a:solidFill>
-            <a:srgbClr val="0A0F1C"/>
-          </a:solidFill>
-          <a:ln w="22225">
+            <a:off x="6263640" y="2011680"/>
+            <a:ext cx="5257800" cy="1737360"/>
+          </a:xfrm>
+          <a:prstGeom prst="roundRect">
+            <a:avLst>
+              <a:gd name="adj" fmla="val 6316"/>
+            </a:avLst>
+          </a:prstGeom>
+          <a:solidFill>
+            <a:srgbClr val="121A2E"/>
+          </a:solidFill>
+          <a:ln w="15875">
+            <a:solidFill>
+              <a:srgbClr val="5FE0C5"/>
+            </a:solidFill>
+            <a:prstDash val="solid"/>
+          </a:ln>
+          <a:effectLst>
+            <a:outerShdw sx="100000" sy="100000" kx="0" ky="0" algn="bl" rotWithShape="0" blurRad="101600" dist="38100" dir="2700000">
+              <a:srgbClr val="000000">
+                <a:alpha val="25000"/>
+              </a:srgbClr>
+            </a:outerShdw>
+          </a:effectLst>
+        </p:spPr>
+      </p:sp>
+      <p:sp>
+        <p:nvSpPr>
+          <p:cNvPr id="25" name="Text 23"/>
+          <p:cNvSpPr/>
+          <p:nvPr/>
+        </p:nvSpPr>
+        <p:spPr>
+          <a:xfrm>
+            <a:off x="6537960" y="2212848"/>
+            <a:ext cx="4709160" cy="411480"/>
+          </a:xfrm>
+          <a:prstGeom prst="rect">
+            <a:avLst/>
+          </a:prstGeom>
+          <a:noFill/>
+          <a:ln/>
+        </p:spPr>
+        <p:txBody>
+          <a:bodyPr wrap="square" lIns="0" tIns="0" rIns="0" bIns="0" rtlCol="0" anchor="ctr"/>
+          <a:lstStyle/>
+          <a:p>
+            <a:pPr indent="0" marL="0">
+              <a:buNone/>
+            </a:pPr>
+            <a:r>
+              <a:rPr lang="en-US" sz="2040" b="1" dirty="0">
+                <a:solidFill>
+                  <a:srgbClr val="5FE0C5"/>
+                </a:solidFill>
+                <a:latin typeface="Courier New" pitchFamily="34" charset="0"/>
+                <a:ea typeface="Courier New" pitchFamily="34" charset="-122"/>
+                <a:cs typeface="Courier New" pitchFamily="34" charset="-120"/>
+              </a:rPr>
+              <a:t>Spring-native</a:t>
+            </a:r>
+            <a:endParaRPr lang="en-US" sz="2040" dirty="0"/>
+          </a:p>
+        </p:txBody>
+      </p:sp>
+      <p:sp>
+        <p:nvSpPr>
+          <p:cNvPr id="26" name="Text 24"/>
+          <p:cNvSpPr/>
+          <p:nvPr/>
+        </p:nvSpPr>
+        <p:spPr>
+          <a:xfrm>
+            <a:off x="6537960" y="2670048"/>
+            <a:ext cx="4709160" cy="914400"/>
+          </a:xfrm>
+          <a:prstGeom prst="rect">
+            <a:avLst/>
+          </a:prstGeom>
+          <a:noFill/>
+          <a:ln/>
+        </p:spPr>
+        <p:txBody>
+          <a:bodyPr wrap="square" lIns="0" tIns="0" rIns="0" bIns="0" rtlCol="0" anchor="t"/>
+          <a:lstStyle/>
+          <a:p>
+            <a:pPr indent="0" marL="0">
+              <a:lnSpc>
+                <a:spcPct val="110000"/>
+              </a:lnSpc>
+              <a:buNone/>
+            </a:pPr>
+            <a:r>
+              <a:rPr lang="en-US" sz="1560" dirty="0">
+                <a:solidFill>
+                  <a:srgbClr val="E5E9F0"/>
+                </a:solidFill>
+                <a:latin typeface="Calibri" pitchFamily="34" charset="0"/>
+                <a:ea typeface="Calibri" pitchFamily="34" charset="-122"/>
+                <a:cs typeface="Calibri" pitchFamily="34" charset="-120"/>
+              </a:rPr>
+              <a:t>Auto-configuration, dependency injection, and</a:t>
+            </a:r>
+            <a:endParaRPr lang="en-US" sz="1560" dirty="0"/>
+          </a:p>
+          <a:p>
+            <a:pPr indent="0" marL="0">
+              <a:lnSpc>
+                <a:spcPct val="110000"/>
+              </a:lnSpc>
+              <a:buNone/>
+            </a:pPr>
+            <a:r>
+              <a:rPr lang="en-US" sz="1560" dirty="0">
+                <a:solidFill>
+                  <a:srgbClr val="E5E9F0"/>
+                </a:solidFill>
+                <a:latin typeface="Calibri" pitchFamily="34" charset="0"/>
+                <a:ea typeface="Calibri" pitchFamily="34" charset="-122"/>
+                <a:cs typeface="Calibri" pitchFamily="34" charset="-120"/>
+              </a:rPr>
+              <a:t>WebMVC just like the rest of your app.</a:t>
+            </a:r>
+            <a:endParaRPr lang="en-US" sz="1560" dirty="0"/>
+          </a:p>
+        </p:txBody>
+      </p:sp>
+      <p:sp>
+        <p:nvSpPr>
+          <p:cNvPr id="27" name="Shape 25"/>
+          <p:cNvSpPr/>
+          <p:nvPr/>
+        </p:nvSpPr>
+        <p:spPr>
+          <a:xfrm>
+            <a:off x="640080" y="4069080"/>
+            <a:ext cx="5257800" cy="1737360"/>
+          </a:xfrm>
+          <a:prstGeom prst="roundRect">
+            <a:avLst>
+              <a:gd name="adj" fmla="val 6316"/>
+            </a:avLst>
+          </a:prstGeom>
+          <a:solidFill>
+            <a:srgbClr val="121A2E"/>
+          </a:solidFill>
+          <a:ln w="15875">
             <a:solidFill>
               <a:srgbClr val="8B98AC"/>
             </a:solidFill>
             <a:prstDash val="solid"/>
           </a:ln>
-        </p:spPr>
-      </p:sp>
-      <p:sp>
-        <p:nvSpPr>
-          <p:cNvPr id="25" name="Text 23"/>
-          <p:cNvSpPr/>
-          <p:nvPr/>
-        </p:nvSpPr>
-        <p:spPr>
-          <a:xfrm>
-            <a:off x="640080" y="3886200"/>
-            <a:ext cx="320040" cy="320040"/>
+          <a:effectLst>
+            <a:outerShdw sx="100000" sy="100000" kx="0" ky="0" algn="bl" rotWithShape="0" blurRad="101600" dist="38100" dir="2700000">
+              <a:srgbClr val="000000">
+                <a:alpha val="25000"/>
+              </a:srgbClr>
+            </a:outerShdw>
+          </a:effectLst>
+        </p:spPr>
+      </p:sp>
+      <p:sp>
+        <p:nvSpPr>
+          <p:cNvPr id="28" name="Text 26"/>
+          <p:cNvSpPr/>
+          <p:nvPr/>
+        </p:nvSpPr>
+        <p:spPr>
+          <a:xfrm>
+            <a:off x="914400" y="4270248"/>
+            <a:ext cx="4709160" cy="411480"/>
           </a:xfrm>
           <a:prstGeom prst="rect">
             <a:avLst/>
@@ -4048,11 +5278,11 @@
           <a:bodyPr wrap="square" lIns="0" tIns="0" rIns="0" bIns="0" rtlCol="0" anchor="ctr"/>
           <a:lstStyle/>
           <a:p>
-            <a:pPr algn="ctr" indent="0" marL="0">
-              <a:buNone/>
-            </a:pPr>
-            <a:r>
-              <a:rPr lang="en-US" sz="1560" b="1" dirty="0">
+            <a:pPr indent="0" marL="0">
+              <a:buNone/>
+            </a:pPr>
+            <a:r>
+              <a:rPr lang="en-US" sz="2040" b="1" dirty="0">
                 <a:solidFill>
                   <a:srgbClr val="8B98AC"/>
                 </a:solidFill>
@@ -4060,22 +5290,22 @@
                 <a:ea typeface="Courier New" pitchFamily="34" charset="-122"/>
                 <a:cs typeface="Courier New" pitchFamily="34" charset="-120"/>
               </a:rPr>
-              <a:t>2</a:t>
-            </a:r>
-            <a:endParaRPr lang="en-US" sz="1560" dirty="0"/>
-          </a:p>
-        </p:txBody>
-      </p:sp>
-      <p:sp>
-        <p:nvSpPr>
-          <p:cNvPr id="26" name="Text 24"/>
-          <p:cNvSpPr/>
-          <p:nvPr/>
-        </p:nvSpPr>
-        <p:spPr>
-          <a:xfrm>
-            <a:off x="1143000" y="3840480"/>
-            <a:ext cx="10058400" cy="868680"/>
+              <a:t>Batteries included</a:t>
+            </a:r>
+            <a:endParaRPr lang="en-US" sz="2040" dirty="0"/>
+          </a:p>
+        </p:txBody>
+      </p:sp>
+      <p:sp>
+        <p:nvSpPr>
+          <p:cNvPr id="29" name="Text 27"/>
+          <p:cNvSpPr/>
+          <p:nvPr/>
+        </p:nvSpPr>
+        <p:spPr>
+          <a:xfrm>
+            <a:off x="914400" y="4727448"/>
+            <a:ext cx="4709160" cy="914400"/>
           </a:xfrm>
           <a:prstGeom prst="rect">
             <a:avLst/>
@@ -4088,10 +5318,13 @@
           <a:lstStyle/>
           <a:p>
             <a:pPr indent="0" marL="0">
-              <a:buNone/>
-            </a:pPr>
-            <a:r>
-              <a:rPr lang="en-US" sz="1920" b="1" dirty="0">
+              <a:lnSpc>
+                <a:spcPct val="110000"/>
+              </a:lnSpc>
+              <a:buNone/>
+            </a:pPr>
+            <a:r>
+              <a:rPr lang="en-US" sz="1560" dirty="0">
                 <a:solidFill>
                   <a:srgbClr val="E5E9F0"/>
                 </a:solidFill>
@@ -4099,64 +5332,76 @@
                 <a:ea typeface="Calibri" pitchFamily="34" charset="-122"/>
                 <a:cs typeface="Calibri" pitchFamily="34" charset="-120"/>
               </a:rPr>
-              <a:t>Provider-agnostic</a:t>
-            </a:r>
-            <a:endParaRPr lang="en-US" sz="1920" dirty="0"/>
+              <a:t>Prompt templates, structured output, chat memory,</a:t>
+            </a:r>
+            <a:endParaRPr lang="en-US" sz="1560" dirty="0"/>
           </a:p>
           <a:p>
             <a:pPr indent="0" marL="0">
-              <a:buNone/>
-            </a:pPr>
-            <a:r>
-              <a:rPr lang="en-US" sz="1620" dirty="0">
-                <a:solidFill>
-                  <a:srgbClr val="B8C0D0"/>
+              <a:lnSpc>
+                <a:spcPct val="110000"/>
+              </a:lnSpc>
+              <a:buNone/>
+            </a:pPr>
+            <a:r>
+              <a:rPr lang="en-US" sz="1560" dirty="0">
+                <a:solidFill>
+                  <a:srgbClr val="E5E9F0"/>
                 </a:solidFill>
                 <a:latin typeface="Calibri" pitchFamily="34" charset="0"/>
                 <a:ea typeface="Calibri" pitchFamily="34" charset="-122"/>
                 <a:cs typeface="Calibri" pitchFamily="34" charset="-120"/>
               </a:rPr>
-              <a:t>Today it's Ollama + llama3.2. Swap to another provider, same calling code</a:t>
-            </a:r>
-            <a:endParaRPr lang="en-US" sz="1920" dirty="0"/>
-          </a:p>
-        </p:txBody>
-      </p:sp>
-      <p:sp>
-        <p:nvSpPr>
-          <p:cNvPr id="27" name="Shape 25"/>
-          <p:cNvSpPr/>
-          <p:nvPr/>
-        </p:nvSpPr>
-        <p:spPr>
-          <a:xfrm>
-            <a:off x="640080" y="4846320"/>
-            <a:ext cx="320040" cy="320040"/>
-          </a:xfrm>
-          <a:prstGeom prst="ellipse">
-            <a:avLst/>
-          </a:prstGeom>
-          <a:solidFill>
-            <a:srgbClr val="0A0F1C"/>
-          </a:solidFill>
-          <a:ln w="22225">
+              <a:t>RAG, and tool calling — built in.</a:t>
+            </a:r>
+            <a:endParaRPr lang="en-US" sz="1560" dirty="0"/>
+          </a:p>
+        </p:txBody>
+      </p:sp>
+      <p:sp>
+        <p:nvSpPr>
+          <p:cNvPr id="30" name="Shape 28"/>
+          <p:cNvSpPr/>
+          <p:nvPr/>
+        </p:nvSpPr>
+        <p:spPr>
+          <a:xfrm>
+            <a:off x="6263640" y="4069080"/>
+            <a:ext cx="5257800" cy="1737360"/>
+          </a:xfrm>
+          <a:prstGeom prst="roundRect">
+            <a:avLst>
+              <a:gd name="adj" fmla="val 6316"/>
+            </a:avLst>
+          </a:prstGeom>
+          <a:solidFill>
+            <a:srgbClr val="121A2E"/>
+          </a:solidFill>
+          <a:ln w="15875">
             <a:solidFill>
-              <a:srgbClr val="5FE0C5"/>
+              <a:srgbClr val="F2A93B"/>
             </a:solidFill>
             <a:prstDash val="solid"/>
           </a:ln>
-        </p:spPr>
-      </p:sp>
-      <p:sp>
-        <p:nvSpPr>
-          <p:cNvPr id="28" name="Text 26"/>
-          <p:cNvSpPr/>
-          <p:nvPr/>
-        </p:nvSpPr>
-        <p:spPr>
-          <a:xfrm>
-            <a:off x="640080" y="4846320"/>
-            <a:ext cx="320040" cy="320040"/>
+          <a:effectLst>
+            <a:outerShdw sx="100000" sy="100000" kx="0" ky="0" algn="bl" rotWithShape="0" blurRad="101600" dist="38100" dir="2700000">
+              <a:srgbClr val="000000">
+                <a:alpha val="25000"/>
+              </a:srgbClr>
+            </a:outerShdw>
+          </a:effectLst>
+        </p:spPr>
+      </p:sp>
+      <p:sp>
+        <p:nvSpPr>
+          <p:cNvPr id="31" name="Text 29"/>
+          <p:cNvSpPr/>
+          <p:nvPr/>
+        </p:nvSpPr>
+        <p:spPr>
+          <a:xfrm>
+            <a:off x="6537960" y="4270248"/>
+            <a:ext cx="4709160" cy="411480"/>
           </a:xfrm>
           <a:prstGeom prst="rect">
             <a:avLst/>
@@ -4168,34 +5413,34 @@
           <a:bodyPr wrap="square" lIns="0" tIns="0" rIns="0" bIns="0" rtlCol="0" anchor="ctr"/>
           <a:lstStyle/>
           <a:p>
-            <a:pPr algn="ctr" indent="0" marL="0">
-              <a:buNone/>
-            </a:pPr>
-            <a:r>
-              <a:rPr lang="en-US" sz="1560" b="1" dirty="0">
-                <a:solidFill>
-                  <a:srgbClr val="5FE0C5"/>
-                </a:solidFill>
-                <a:latin typeface="Courier New" pitchFamily="34" charset="0"/>
-                <a:ea typeface="Courier New" pitchFamily="34" charset="-122"/>
-                <a:cs typeface="Courier New" pitchFamily="34" charset="-120"/>
-              </a:rPr>
-              <a:t>3</a:t>
-            </a:r>
-            <a:endParaRPr lang="en-US" sz="1560" dirty="0"/>
-          </a:p>
-        </p:txBody>
-      </p:sp>
-      <p:sp>
-        <p:nvSpPr>
-          <p:cNvPr id="29" name="Text 27"/>
-          <p:cNvSpPr/>
-          <p:nvPr/>
-        </p:nvSpPr>
-        <p:spPr>
-          <a:xfrm>
-            <a:off x="1143000" y="4800600"/>
-            <a:ext cx="10058400" cy="868680"/>
+            <a:pPr indent="0" marL="0">
+              <a:buNone/>
+            </a:pPr>
+            <a:r>
+              <a:rPr lang="en-US" sz="2040" b="1" dirty="0">
+                <a:solidFill>
+                  <a:srgbClr val="F2A93B"/>
+                </a:solidFill>
+                <a:latin typeface="Courier New" pitchFamily="34" charset="0"/>
+                <a:ea typeface="Courier New" pitchFamily="34" charset="-122"/>
+                <a:cs typeface="Courier New" pitchFamily="34" charset="-120"/>
+              </a:rPr>
+              <a:t>Portable &amp; local</a:t>
+            </a:r>
+            <a:endParaRPr lang="en-US" sz="2040" dirty="0"/>
+          </a:p>
+        </p:txBody>
+      </p:sp>
+      <p:sp>
+        <p:nvSpPr>
+          <p:cNvPr id="32" name="Text 30"/>
+          <p:cNvSpPr/>
+          <p:nvPr/>
+        </p:nvSpPr>
+        <p:spPr>
+          <a:xfrm>
+            <a:off x="6537960" y="4727448"/>
+            <a:ext cx="4709160" cy="914400"/>
           </a:xfrm>
           <a:prstGeom prst="rect">
             <a:avLst/>
@@ -4208,10 +5453,13 @@
           <a:lstStyle/>
           <a:p>
             <a:pPr indent="0" marL="0">
-              <a:buNone/>
-            </a:pPr>
-            <a:r>
-              <a:rPr lang="en-US" sz="1920" b="1" dirty="0">
+              <a:lnSpc>
+                <a:spcPct val="110000"/>
+              </a:lnSpc>
+              <a:buNone/>
+            </a:pPr>
+            <a:r>
+              <a:rPr lang="en-US" sz="1560" dirty="0">
                 <a:solidFill>
                   <a:srgbClr val="E5E9F0"/>
                 </a:solidFill>
@@ -4219,26 +5467,29 @@
                 <a:ea typeface="Calibri" pitchFamily="34" charset="-122"/>
                 <a:cs typeface="Calibri" pitchFamily="34" charset="-120"/>
               </a:rPr>
-              <a:t>Fluent calls</a:t>
-            </a:r>
-            <a:endParaRPr lang="en-US" sz="1920" dirty="0"/>
+              <a:t>Same code runs against a local Llama or a cloud</a:t>
+            </a:r>
+            <a:endParaRPr lang="en-US" sz="1560" dirty="0"/>
           </a:p>
           <a:p>
             <a:pPr indent="0" marL="0">
-              <a:buNone/>
-            </a:pPr>
-            <a:r>
-              <a:rPr lang="en-US" sz="1620" dirty="0">
-                <a:solidFill>
-                  <a:srgbClr val="B8C0D0"/>
+              <a:lnSpc>
+                <a:spcPct val="110000"/>
+              </a:lnSpc>
+              <a:buNone/>
+            </a:pPr>
+            <a:r>
+              <a:rPr lang="en-US" sz="1560" dirty="0">
+                <a:solidFill>
+                  <a:srgbClr val="E5E9F0"/>
                 </a:solidFill>
                 <a:latin typeface="Calibri" pitchFamily="34" charset="0"/>
                 <a:ea typeface="Calibri" pitchFamily="34" charset="-122"/>
                 <a:cs typeface="Calibri" pitchFamily="34" charset="-120"/>
               </a:rPr>
-              <a:t>prompt().user(question).call().content() reads like plain English</a:t>
-            </a:r>
-            <a:endParaRPr lang="en-US" sz="1920" dirty="0"/>
+              <a:t>model — no vendor lock-in, no API keys to start.</a:t>
+            </a:r>
+            <a:endParaRPr lang="en-US" sz="1560" dirty="0"/>
           </a:p>
         </p:txBody>
       </p:sp>
@@ -4672,7 +5923,7 @@
                 <a:ea typeface="Courier New" pitchFamily="34" charset="-122"/>
                 <a:cs typeface="Courier New" pitchFamily="34" charset="-120"/>
               </a:rPr>
-              <a:t>4 / 9</a:t>
+              <a:t>4 / 10</a:t>
             </a:r>
             <a:endParaRPr lang="en-US" sz="1080" dirty="0"/>
           </a:p>
@@ -4711,7 +5962,7 @@
                 <a:ea typeface="Courier New" pitchFamily="34" charset="-122"/>
                 <a:cs typeface="Courier New" pitchFamily="34" charset="-120"/>
               </a:rPr>
-              <a:t>ARCHITECTURE</a:t>
+              <a:t>CORE CONCEPT</a:t>
             </a:r>
             <a:endParaRPr lang="en-US" sz="1440" dirty="0"/>
           </a:p>
@@ -4750,7 +6001,7 @@
                 <a:ea typeface="Courier New" pitchFamily="34" charset="-122"/>
                 <a:cs typeface="Courier New" pitchFamily="34" charset="-120"/>
               </a:rPr>
-              <a:t>How a question becomes an answer</a:t>
+              <a:t>ChatClient — one API for any model</a:t>
             </a:r>
             <a:endParaRPr lang="en-US" sz="3360" dirty="0"/>
           </a:p>
@@ -4758,48 +6009,252 @@
       </p:sp>
       <p:sp>
         <p:nvSpPr>
-          <p:cNvPr id="20" name="Shape 18"/>
-          <p:cNvSpPr/>
-          <p:nvPr/>
-        </p:nvSpPr>
-        <p:spPr>
-          <a:xfrm>
-            <a:off x="640080" y="2468880"/>
-            <a:ext cx="2377440" cy="1371600"/>
-          </a:xfrm>
-          <a:prstGeom prst="roundRect">
-            <a:avLst>
-              <a:gd name="adj" fmla="val 8000"/>
-            </a:avLst>
-          </a:prstGeom>
-          <a:solidFill>
-            <a:srgbClr val="121A2E"/>
-          </a:solidFill>
-          <a:ln w="19050">
+          <p:cNvPr id="20" name="Text 18"/>
+          <p:cNvSpPr/>
+          <p:nvPr/>
+        </p:nvSpPr>
+        <p:spPr>
+          <a:xfrm>
+            <a:off x="640080" y="1463040"/>
+            <a:ext cx="10881360" cy="1188720"/>
+          </a:xfrm>
+          <a:prstGeom prst="rect">
+            <a:avLst/>
+          </a:prstGeom>
+          <a:noFill/>
+          <a:ln/>
+        </p:spPr>
+        <p:txBody>
+          <a:bodyPr wrap="square" lIns="0" tIns="0" rIns="0" bIns="0" rtlCol="0" anchor="ctr"/>
+          <a:lstStyle/>
+          <a:p>
+            <a:pPr indent="0" marL="0">
+              <a:lnSpc>
+                <a:spcPct val="130000"/>
+              </a:lnSpc>
+              <a:buNone/>
+            </a:pPr>
+            <a:r>
+              <a:rPr lang="en-US" sz="2160" b="1" dirty="0">
+                <a:solidFill>
+                  <a:srgbClr val="5FE0C5"/>
+                </a:solidFill>
+                <a:latin typeface="Courier New" pitchFamily="34" charset="0"/>
+                <a:ea typeface="Courier New" pitchFamily="34" charset="-122"/>
+                <a:cs typeface="Courier New" pitchFamily="34" charset="-120"/>
+              </a:rPr>
+              <a:t>ChatClient</a:t>
+            </a:r>
+            <a:pPr indent="0" marL="0">
+              <a:lnSpc>
+                <a:spcPct val="130000"/>
+              </a:lnSpc>
+              <a:buNone/>
+            </a:pPr>
+            <a:r>
+              <a:rPr lang="en-US" sz="2160" dirty="0">
+                <a:solidFill>
+                  <a:srgbClr val="E5E9F0"/>
+                </a:solidFill>
+                <a:latin typeface="Calibri" pitchFamily="34" charset="0"/>
+                <a:ea typeface="Calibri" pitchFamily="34" charset="-122"/>
+                <a:cs typeface="Calibri" pitchFamily="34" charset="-120"/>
+              </a:rPr>
+              <a:t> is Spring AI's single fluent API for talking to an LLM — build it once with </a:t>
+            </a:r>
+            <a:pPr indent="0" marL="0">
+              <a:lnSpc>
+                <a:spcPct val="130000"/>
+              </a:lnSpc>
+              <a:buNone/>
+            </a:pPr>
+            <a:r>
+              <a:rPr lang="en-US" sz="2160" dirty="0">
+                <a:solidFill>
+                  <a:srgbClr val="F2A93B"/>
+                </a:solidFill>
+                <a:latin typeface="Courier New" pitchFamily="34" charset="0"/>
+                <a:ea typeface="Courier New" pitchFamily="34" charset="-122"/>
+                <a:cs typeface="Courier New" pitchFamily="34" charset="-120"/>
+              </a:rPr>
+              <a:t>.prompt().user(...).call()</a:t>
+            </a:r>
+            <a:pPr indent="0" marL="0">
+              <a:lnSpc>
+                <a:spcPct val="130000"/>
+              </a:lnSpc>
+              <a:buNone/>
+            </a:pPr>
+            <a:r>
+              <a:rPr lang="en-US" sz="2160" dirty="0">
+                <a:solidFill>
+                  <a:srgbClr val="E5E9F0"/>
+                </a:solidFill>
+                <a:latin typeface="Calibri" pitchFamily="34" charset="0"/>
+                <a:ea typeface="Calibri" pitchFamily="34" charset="-122"/>
+                <a:cs typeface="Calibri" pitchFamily="34" charset="-120"/>
+              </a:rPr>
+              <a:t>, and the model behind it can change without touching your code.</a:t>
+            </a:r>
+            <a:endParaRPr lang="en-US" sz="2160" dirty="0"/>
+          </a:p>
+        </p:txBody>
+      </p:sp>
+      <p:sp>
+        <p:nvSpPr>
+          <p:cNvPr id="21" name="Shape 19"/>
+          <p:cNvSpPr/>
+          <p:nvPr/>
+        </p:nvSpPr>
+        <p:spPr>
+          <a:xfrm>
+            <a:off x="640080" y="2926080"/>
+            <a:ext cx="320040" cy="320040"/>
+          </a:xfrm>
+          <a:prstGeom prst="ellipse">
+            <a:avLst/>
+          </a:prstGeom>
+          <a:solidFill>
+            <a:srgbClr val="0A0F1C"/>
+          </a:solidFill>
+          <a:ln w="22225">
+            <a:solidFill>
+              <a:srgbClr val="F2A93B"/>
+            </a:solidFill>
+            <a:prstDash val="solid"/>
+          </a:ln>
+        </p:spPr>
+      </p:sp>
+      <p:sp>
+        <p:nvSpPr>
+          <p:cNvPr id="22" name="Text 20"/>
+          <p:cNvSpPr/>
+          <p:nvPr/>
+        </p:nvSpPr>
+        <p:spPr>
+          <a:xfrm>
+            <a:off x="640080" y="2926080"/>
+            <a:ext cx="320040" cy="320040"/>
+          </a:xfrm>
+          <a:prstGeom prst="rect">
+            <a:avLst/>
+          </a:prstGeom>
+          <a:noFill/>
+          <a:ln/>
+        </p:spPr>
+        <p:txBody>
+          <a:bodyPr wrap="square" lIns="0" tIns="0" rIns="0" bIns="0" rtlCol="0" anchor="ctr"/>
+          <a:lstStyle/>
+          <a:p>
+            <a:pPr algn="ctr" indent="0" marL="0">
+              <a:buNone/>
+            </a:pPr>
+            <a:r>
+              <a:rPr lang="en-US" sz="1560" b="1" dirty="0">
+                <a:solidFill>
+                  <a:srgbClr val="F2A93B"/>
+                </a:solidFill>
+                <a:latin typeface="Courier New" pitchFamily="34" charset="0"/>
+                <a:ea typeface="Courier New" pitchFamily="34" charset="-122"/>
+                <a:cs typeface="Courier New" pitchFamily="34" charset="-120"/>
+              </a:rPr>
+              <a:t>1</a:t>
+            </a:r>
+            <a:endParaRPr lang="en-US" sz="1560" dirty="0"/>
+          </a:p>
+        </p:txBody>
+      </p:sp>
+      <p:sp>
+        <p:nvSpPr>
+          <p:cNvPr id="23" name="Text 21"/>
+          <p:cNvSpPr/>
+          <p:nvPr/>
+        </p:nvSpPr>
+        <p:spPr>
+          <a:xfrm>
+            <a:off x="1143000" y="2880360"/>
+            <a:ext cx="10058400" cy="868680"/>
+          </a:xfrm>
+          <a:prstGeom prst="rect">
+            <a:avLst/>
+          </a:prstGeom>
+          <a:noFill/>
+          <a:ln/>
+        </p:spPr>
+        <p:txBody>
+          <a:bodyPr wrap="square" lIns="0" tIns="0" rIns="0" bIns="0" rtlCol="0" anchor="t"/>
+          <a:lstStyle/>
+          <a:p>
+            <a:pPr indent="0" marL="0">
+              <a:buNone/>
+            </a:pPr>
+            <a:r>
+              <a:rPr lang="en-US" sz="1920" b="1" dirty="0">
+                <a:solidFill>
+                  <a:srgbClr val="E5E9F0"/>
+                </a:solidFill>
+                <a:latin typeface="Calibri" pitchFamily="34" charset="0"/>
+                <a:ea typeface="Calibri" pitchFamily="34" charset="-122"/>
+                <a:cs typeface="Calibri" pitchFamily="34" charset="-120"/>
+              </a:rPr>
+              <a:t>Builder pattern</a:t>
+            </a:r>
+            <a:endParaRPr lang="en-US" sz="1920" dirty="0"/>
+          </a:p>
+          <a:p>
+            <a:pPr indent="0" marL="0">
+              <a:buNone/>
+            </a:pPr>
+            <a:r>
+              <a:rPr lang="en-US" sz="1620" dirty="0">
+                <a:solidFill>
+                  <a:srgbClr val="B8C0D0"/>
+                </a:solidFill>
+                <a:latin typeface="Calibri" pitchFamily="34" charset="0"/>
+                <a:ea typeface="Calibri" pitchFamily="34" charset="-122"/>
+                <a:cs typeface="Calibri" pitchFamily="34" charset="-120"/>
+              </a:rPr>
+              <a:t>ChatClient.builder(chatModel).build() — configure once, reuse everywhere</a:t>
+            </a:r>
+            <a:endParaRPr lang="en-US" sz="1920" dirty="0"/>
+          </a:p>
+        </p:txBody>
+      </p:sp>
+      <p:sp>
+        <p:nvSpPr>
+          <p:cNvPr id="24" name="Shape 22"/>
+          <p:cNvSpPr/>
+          <p:nvPr/>
+        </p:nvSpPr>
+        <p:spPr>
+          <a:xfrm>
+            <a:off x="640080" y="3886200"/>
+            <a:ext cx="320040" cy="320040"/>
+          </a:xfrm>
+          <a:prstGeom prst="ellipse">
+            <a:avLst/>
+          </a:prstGeom>
+          <a:solidFill>
+            <a:srgbClr val="0A0F1C"/>
+          </a:solidFill>
+          <a:ln w="22225">
             <a:solidFill>
               <a:srgbClr val="8B98AC"/>
             </a:solidFill>
             <a:prstDash val="solid"/>
           </a:ln>
-          <a:effectLst>
-            <a:outerShdw sx="100000" sy="100000" kx="0" ky="0" algn="bl" rotWithShape="0" blurRad="101600" dist="38100" dir="2700000">
-              <a:srgbClr val="000000">
-                <a:alpha val="25000"/>
-              </a:srgbClr>
-            </a:outerShdw>
-          </a:effectLst>
-        </p:spPr>
-      </p:sp>
-      <p:sp>
-        <p:nvSpPr>
-          <p:cNvPr id="21" name="Text 19"/>
-          <p:cNvSpPr/>
-          <p:nvPr/>
-        </p:nvSpPr>
-        <p:spPr>
-          <a:xfrm>
-            <a:off x="822960" y="2743200"/>
-            <a:ext cx="2011680" cy="457200"/>
+        </p:spPr>
+      </p:sp>
+      <p:sp>
+        <p:nvSpPr>
+          <p:cNvPr id="25" name="Text 23"/>
+          <p:cNvSpPr/>
+          <p:nvPr/>
+        </p:nvSpPr>
+        <p:spPr>
+          <a:xfrm>
+            <a:off x="640080" y="3886200"/>
+            <a:ext cx="320040" cy="320040"/>
           </a:xfrm>
           <a:prstGeom prst="rect">
             <a:avLst/>
@@ -4815,127 +6270,71 @@
               <a:buNone/>
             </a:pPr>
             <a:r>
+              <a:rPr lang="en-US" sz="1560" b="1" dirty="0">
+                <a:solidFill>
+                  <a:srgbClr val="8B98AC"/>
+                </a:solidFill>
+                <a:latin typeface="Courier New" pitchFamily="34" charset="0"/>
+                <a:ea typeface="Courier New" pitchFamily="34" charset="-122"/>
+                <a:cs typeface="Courier New" pitchFamily="34" charset="-120"/>
+              </a:rPr>
+              <a:t>2</a:t>
+            </a:r>
+            <a:endParaRPr lang="en-US" sz="1560" dirty="0"/>
+          </a:p>
+        </p:txBody>
+      </p:sp>
+      <p:sp>
+        <p:nvSpPr>
+          <p:cNvPr id="26" name="Text 24"/>
+          <p:cNvSpPr/>
+          <p:nvPr/>
+        </p:nvSpPr>
+        <p:spPr>
+          <a:xfrm>
+            <a:off x="1143000" y="3840480"/>
+            <a:ext cx="10058400" cy="868680"/>
+          </a:xfrm>
+          <a:prstGeom prst="rect">
+            <a:avLst/>
+          </a:prstGeom>
+          <a:noFill/>
+          <a:ln/>
+        </p:spPr>
+        <p:txBody>
+          <a:bodyPr wrap="square" lIns="0" tIns="0" rIns="0" bIns="0" rtlCol="0" anchor="t"/>
+          <a:lstStyle/>
+          <a:p>
+            <a:pPr indent="0" marL="0">
+              <a:buNone/>
+            </a:pPr>
+            <a:r>
               <a:rPr lang="en-US" sz="1920" b="1" dirty="0">
                 <a:solidFill>
                   <a:srgbClr val="E5E9F0"/>
                 </a:solidFill>
-                <a:latin typeface="Courier New" pitchFamily="34" charset="0"/>
-                <a:ea typeface="Courier New" pitchFamily="34" charset="-122"/>
-                <a:cs typeface="Courier New" pitchFamily="34" charset="-120"/>
-              </a:rPr>
-              <a:t>curl / Browser</a:t>
+                <a:latin typeface="Calibri" pitchFamily="34" charset="0"/>
+                <a:ea typeface="Calibri" pitchFamily="34" charset="-122"/>
+                <a:cs typeface="Calibri" pitchFamily="34" charset="-120"/>
+              </a:rPr>
+              <a:t>Provider-agnostic</a:t>
             </a:r>
             <a:endParaRPr lang="en-US" sz="1920" dirty="0"/>
           </a:p>
-        </p:txBody>
-      </p:sp>
-      <p:sp>
-        <p:nvSpPr>
-          <p:cNvPr id="22" name="Text 20"/>
-          <p:cNvSpPr/>
-          <p:nvPr/>
-        </p:nvSpPr>
-        <p:spPr>
-          <a:xfrm>
-            <a:off x="822960" y="3246120"/>
-            <a:ext cx="2011680" cy="365760"/>
-          </a:xfrm>
-          <a:prstGeom prst="rect">
-            <a:avLst/>
-          </a:prstGeom>
-          <a:noFill/>
-          <a:ln/>
-        </p:spPr>
-        <p:txBody>
-          <a:bodyPr wrap="square" lIns="0" tIns="0" rIns="0" bIns="0" rtlCol="0" anchor="ctr"/>
-          <a:lstStyle/>
-          <a:p>
-            <a:pPr algn="ctr" indent="0" marL="0">
-              <a:buNone/>
-            </a:pPr>
-            <a:r>
-              <a:rPr lang="en-US" sz="1560" dirty="0">
-                <a:solidFill>
-                  <a:srgbClr val="8B98AC"/>
-                </a:solidFill>
-                <a:latin typeface="Courier New" pitchFamily="34" charset="0"/>
-                <a:ea typeface="Courier New" pitchFamily="34" charset="-122"/>
-                <a:cs typeface="Courier New" pitchFamily="34" charset="-120"/>
-              </a:rPr>
-              <a:t>POST /hr/ask</a:t>
-            </a:r>
-            <a:endParaRPr lang="en-US" sz="1560" dirty="0"/>
-          </a:p>
-        </p:txBody>
-      </p:sp>
-      <p:sp>
-        <p:nvSpPr>
-          <p:cNvPr id="23" name="Shape 21"/>
-          <p:cNvSpPr/>
-          <p:nvPr/>
-        </p:nvSpPr>
-        <p:spPr>
-          <a:xfrm>
-            <a:off x="3977640" y="2468880"/>
-            <a:ext cx="2743200" cy="1371600"/>
-          </a:xfrm>
-          <a:prstGeom prst="roundRect">
-            <a:avLst>
-              <a:gd name="adj" fmla="val 8000"/>
-            </a:avLst>
-          </a:prstGeom>
-          <a:solidFill>
-            <a:srgbClr val="121A2E"/>
-          </a:solidFill>
-          <a:ln w="19050">
-            <a:solidFill>
-              <a:srgbClr val="F2A93B"/>
-            </a:solidFill>
-            <a:prstDash val="solid"/>
-          </a:ln>
-          <a:effectLst>
-            <a:outerShdw sx="100000" sy="100000" kx="0" ky="0" algn="bl" rotWithShape="0" blurRad="101600" dist="38100" dir="2700000">
-              <a:srgbClr val="000000">
-                <a:alpha val="25000"/>
-              </a:srgbClr>
-            </a:outerShdw>
-          </a:effectLst>
-        </p:spPr>
-      </p:sp>
-      <p:sp>
-        <p:nvSpPr>
-          <p:cNvPr id="24" name="Text 22"/>
-          <p:cNvSpPr/>
-          <p:nvPr/>
-        </p:nvSpPr>
-        <p:spPr>
-          <a:xfrm>
-            <a:off x="4160520" y="2743200"/>
-            <a:ext cx="2377440" cy="457200"/>
-          </a:xfrm>
-          <a:prstGeom prst="rect">
-            <a:avLst/>
-          </a:prstGeom>
-          <a:noFill/>
-          <a:ln/>
-        </p:spPr>
-        <p:txBody>
-          <a:bodyPr wrap="square" lIns="0" tIns="0" rIns="0" bIns="0" rtlCol="0" anchor="ctr"/>
-          <a:lstStyle/>
-          <a:p>
-            <a:pPr algn="ctr" indent="0" marL="0">
-              <a:buNone/>
-            </a:pPr>
-            <a:r>
-              <a:rPr lang="en-US" sz="1920" b="1" dirty="0">
-                <a:solidFill>
-                  <a:srgbClr val="E5E9F0"/>
-                </a:solidFill>
-                <a:latin typeface="Courier New" pitchFamily="34" charset="0"/>
-                <a:ea typeface="Courier New" pitchFamily="34" charset="-122"/>
-                <a:cs typeface="Courier New" pitchFamily="34" charset="-120"/>
-              </a:rPr>
-              <a:t>Spring Boot App</a:t>
+          <a:p>
+            <a:pPr indent="0" marL="0">
+              <a:buNone/>
+            </a:pPr>
+            <a:r>
+              <a:rPr lang="en-US" sz="1620" dirty="0">
+                <a:solidFill>
+                  <a:srgbClr val="B8C0D0"/>
+                </a:solidFill>
+                <a:latin typeface="Calibri" pitchFamily="34" charset="0"/>
+                <a:ea typeface="Calibri" pitchFamily="34" charset="-122"/>
+                <a:cs typeface="Calibri" pitchFamily="34" charset="-120"/>
+              </a:rPr>
+              <a:t>Today it's Ollama + llama3.2. Swap to another provider, same calling code</a:t>
             </a:r>
             <a:endParaRPr lang="en-US" sz="1920" dirty="0"/>
           </a:p>
@@ -4943,87 +6342,39 @@
       </p:sp>
       <p:sp>
         <p:nvSpPr>
-          <p:cNvPr id="25" name="Text 23"/>
-          <p:cNvSpPr/>
-          <p:nvPr/>
-        </p:nvSpPr>
-        <p:spPr>
-          <a:xfrm>
-            <a:off x="4160520" y="3246120"/>
-            <a:ext cx="2377440" cy="365760"/>
-          </a:xfrm>
-          <a:prstGeom prst="rect">
-            <a:avLst/>
-          </a:prstGeom>
-          <a:noFill/>
-          <a:ln/>
-        </p:spPr>
-        <p:txBody>
-          <a:bodyPr wrap="square" lIns="0" tIns="0" rIns="0" bIns="0" rtlCol="0" anchor="ctr"/>
-          <a:lstStyle/>
-          <a:p>
-            <a:pPr algn="ctr" indent="0" marL="0">
-              <a:buNone/>
-            </a:pPr>
-            <a:r>
-              <a:rPr lang="en-US" sz="1560" dirty="0">
-                <a:solidFill>
-                  <a:srgbClr val="F2A93B"/>
-                </a:solidFill>
-                <a:latin typeface="Courier New" pitchFamily="34" charset="0"/>
-                <a:ea typeface="Courier New" pitchFamily="34" charset="-122"/>
-                <a:cs typeface="Courier New" pitchFamily="34" charset="-120"/>
-              </a:rPr>
-              <a:t>ChatClient</a:t>
-            </a:r>
-            <a:endParaRPr lang="en-US" sz="1560" dirty="0"/>
-          </a:p>
-        </p:txBody>
-      </p:sp>
-      <p:sp>
-        <p:nvSpPr>
-          <p:cNvPr id="26" name="Shape 24"/>
-          <p:cNvSpPr/>
-          <p:nvPr/>
-        </p:nvSpPr>
-        <p:spPr>
-          <a:xfrm>
-            <a:off x="7726680" y="2468880"/>
-            <a:ext cx="2743200" cy="1371600"/>
-          </a:xfrm>
-          <a:prstGeom prst="roundRect">
-            <a:avLst>
-              <a:gd name="adj" fmla="val 8000"/>
-            </a:avLst>
-          </a:prstGeom>
-          <a:solidFill>
-            <a:srgbClr val="121A2E"/>
-          </a:solidFill>
-          <a:ln w="19050">
+          <p:cNvPr id="27" name="Shape 25"/>
+          <p:cNvSpPr/>
+          <p:nvPr/>
+        </p:nvSpPr>
+        <p:spPr>
+          <a:xfrm>
+            <a:off x="640080" y="4846320"/>
+            <a:ext cx="320040" cy="320040"/>
+          </a:xfrm>
+          <a:prstGeom prst="ellipse">
+            <a:avLst/>
+          </a:prstGeom>
+          <a:solidFill>
+            <a:srgbClr val="0A0F1C"/>
+          </a:solidFill>
+          <a:ln w="22225">
             <a:solidFill>
               <a:srgbClr val="5FE0C5"/>
             </a:solidFill>
             <a:prstDash val="solid"/>
           </a:ln>
-          <a:effectLst>
-            <a:outerShdw sx="100000" sy="100000" kx="0" ky="0" algn="bl" rotWithShape="0" blurRad="101600" dist="38100" dir="2700000">
-              <a:srgbClr val="000000">
-                <a:alpha val="25000"/>
-              </a:srgbClr>
-            </a:outerShdw>
-          </a:effectLst>
-        </p:spPr>
-      </p:sp>
-      <p:sp>
-        <p:nvSpPr>
-          <p:cNvPr id="27" name="Text 25"/>
-          <p:cNvSpPr/>
-          <p:nvPr/>
-        </p:nvSpPr>
-        <p:spPr>
-          <a:xfrm>
-            <a:off x="7909560" y="2743200"/>
-            <a:ext cx="2377440" cy="457200"/>
+        </p:spPr>
+      </p:sp>
+      <p:sp>
+        <p:nvSpPr>
+          <p:cNvPr id="28" name="Text 26"/>
+          <p:cNvSpPr/>
+          <p:nvPr/>
+        </p:nvSpPr>
+        <p:spPr>
+          <a:xfrm>
+            <a:off x="640080" y="4846320"/>
+            <a:ext cx="320040" cy="320040"/>
           </a:xfrm>
           <a:prstGeom prst="rect">
             <a:avLst/>
@@ -5039,386 +6390,73 @@
               <a:buNone/>
             </a:pPr>
             <a:r>
+              <a:rPr lang="en-US" sz="1560" b="1" dirty="0">
+                <a:solidFill>
+                  <a:srgbClr val="5FE0C5"/>
+                </a:solidFill>
+                <a:latin typeface="Courier New" pitchFamily="34" charset="0"/>
+                <a:ea typeface="Courier New" pitchFamily="34" charset="-122"/>
+                <a:cs typeface="Courier New" pitchFamily="34" charset="-120"/>
+              </a:rPr>
+              <a:t>3</a:t>
+            </a:r>
+            <a:endParaRPr lang="en-US" sz="1560" dirty="0"/>
+          </a:p>
+        </p:txBody>
+      </p:sp>
+      <p:sp>
+        <p:nvSpPr>
+          <p:cNvPr id="29" name="Text 27"/>
+          <p:cNvSpPr/>
+          <p:nvPr/>
+        </p:nvSpPr>
+        <p:spPr>
+          <a:xfrm>
+            <a:off x="1143000" y="4800600"/>
+            <a:ext cx="10058400" cy="868680"/>
+          </a:xfrm>
+          <a:prstGeom prst="rect">
+            <a:avLst/>
+          </a:prstGeom>
+          <a:noFill/>
+          <a:ln/>
+        </p:spPr>
+        <p:txBody>
+          <a:bodyPr wrap="square" lIns="0" tIns="0" rIns="0" bIns="0" rtlCol="0" anchor="t"/>
+          <a:lstStyle/>
+          <a:p>
+            <a:pPr indent="0" marL="0">
+              <a:buNone/>
+            </a:pPr>
+            <a:r>
               <a:rPr lang="en-US" sz="1920" b="1" dirty="0">
                 <a:solidFill>
                   <a:srgbClr val="E5E9F0"/>
                 </a:solidFill>
-                <a:latin typeface="Courier New" pitchFamily="34" charset="0"/>
-                <a:ea typeface="Courier New" pitchFamily="34" charset="-122"/>
-                <a:cs typeface="Courier New" pitchFamily="34" charset="-120"/>
-              </a:rPr>
-              <a:t>Ollama</a:t>
+                <a:latin typeface="Calibri" pitchFamily="34" charset="0"/>
+                <a:ea typeface="Calibri" pitchFamily="34" charset="-122"/>
+                <a:cs typeface="Calibri" pitchFamily="34" charset="-120"/>
+              </a:rPr>
+              <a:t>Fluent calls</a:t>
             </a:r>
             <a:endParaRPr lang="en-US" sz="1920" dirty="0"/>
           </a:p>
-        </p:txBody>
-      </p:sp>
-      <p:sp>
-        <p:nvSpPr>
-          <p:cNvPr id="28" name="Text 26"/>
-          <p:cNvSpPr/>
-          <p:nvPr/>
-        </p:nvSpPr>
-        <p:spPr>
-          <a:xfrm>
-            <a:off x="7909560" y="3246120"/>
-            <a:ext cx="2377440" cy="365760"/>
-          </a:xfrm>
-          <a:prstGeom prst="rect">
-            <a:avLst/>
-          </a:prstGeom>
-          <a:noFill/>
-          <a:ln/>
-        </p:spPr>
-        <p:txBody>
-          <a:bodyPr wrap="square" lIns="0" tIns="0" rIns="0" bIns="0" rtlCol="0" anchor="ctr"/>
-          <a:lstStyle/>
-          <a:p>
-            <a:pPr algn="ctr" indent="0" marL="0">
-              <a:buNone/>
-            </a:pPr>
-            <a:r>
-              <a:rPr lang="en-US" sz="1560" dirty="0">
-                <a:solidFill>
-                  <a:srgbClr val="5FE0C5"/>
-                </a:solidFill>
-                <a:latin typeface="Courier New" pitchFamily="34" charset="0"/>
-                <a:ea typeface="Courier New" pitchFamily="34" charset="-122"/>
-                <a:cs typeface="Courier New" pitchFamily="34" charset="-120"/>
-              </a:rPr>
-              <a:t>llama3.2 model</a:t>
-            </a:r>
-            <a:endParaRPr lang="en-US" sz="1560" dirty="0"/>
-          </a:p>
-        </p:txBody>
-      </p:sp>
-      <p:sp>
-        <p:nvSpPr>
-          <p:cNvPr id="29" name="Shape 27"/>
-          <p:cNvSpPr/>
-          <p:nvPr/>
-        </p:nvSpPr>
-        <p:spPr>
-          <a:xfrm>
-            <a:off x="3017520" y="2880360"/>
-            <a:ext cx="960120" cy="0"/>
-          </a:xfrm>
-          <a:prstGeom prst="line">
-            <a:avLst/>
-          </a:prstGeom>
-          <a:noFill/>
-          <a:ln w="25400">
-            <a:solidFill>
-              <a:srgbClr val="8B98AC"/>
-            </a:solidFill>
-            <a:prstDash val="solid"/>
-            <a:tailEnd type="triangle"/>
-          </a:ln>
-        </p:spPr>
-      </p:sp>
-      <p:sp>
-        <p:nvSpPr>
-          <p:cNvPr id="30" name="Text 28"/>
-          <p:cNvSpPr/>
-          <p:nvPr/>
-        </p:nvSpPr>
-        <p:spPr>
-          <a:xfrm>
-            <a:off x="2788920" y="2423160"/>
-            <a:ext cx="1463040" cy="274320"/>
-          </a:xfrm>
-          <a:prstGeom prst="rect">
-            <a:avLst/>
-          </a:prstGeom>
-          <a:noFill/>
-          <a:ln/>
-        </p:spPr>
-        <p:txBody>
-          <a:bodyPr wrap="square" lIns="0" tIns="0" rIns="0" bIns="0" rtlCol="0" anchor="ctr"/>
-          <a:lstStyle/>
-          <a:p>
-            <a:pPr algn="ctr" indent="0" marL="0">
-              <a:buNone/>
-            </a:pPr>
-            <a:r>
-              <a:rPr lang="en-US" sz="1260" dirty="0">
-                <a:solidFill>
-                  <a:srgbClr val="8B98AC"/>
-                </a:solidFill>
-                <a:latin typeface="Courier New" pitchFamily="34" charset="0"/>
-                <a:ea typeface="Courier New" pitchFamily="34" charset="-122"/>
-                <a:cs typeface="Courier New" pitchFamily="34" charset="-120"/>
-              </a:rPr>
-              <a:t>question</a:t>
-            </a:r>
-            <a:endParaRPr lang="en-US" sz="1260" dirty="0"/>
-          </a:p>
-        </p:txBody>
-      </p:sp>
-      <p:sp>
-        <p:nvSpPr>
-          <p:cNvPr id="31" name="Shape 29"/>
-          <p:cNvSpPr/>
-          <p:nvPr/>
-        </p:nvSpPr>
-        <p:spPr>
-          <a:xfrm>
-            <a:off x="3017520" y="3429000"/>
-            <a:ext cx="960120" cy="0"/>
-          </a:xfrm>
-          <a:prstGeom prst="line">
-            <a:avLst/>
-          </a:prstGeom>
-          <a:noFill/>
-          <a:ln w="25400">
-            <a:solidFill>
-              <a:srgbClr val="F2A93B"/>
-            </a:solidFill>
-            <a:prstDash val="solid"/>
-            <a:headEnd type="triangle"/>
-          </a:ln>
-        </p:spPr>
-      </p:sp>
-      <p:sp>
-        <p:nvSpPr>
-          <p:cNvPr id="32" name="Text 30"/>
-          <p:cNvSpPr/>
-          <p:nvPr/>
-        </p:nvSpPr>
-        <p:spPr>
-          <a:xfrm>
-            <a:off x="2788920" y="3520440"/>
-            <a:ext cx="1463040" cy="274320"/>
-          </a:xfrm>
-          <a:prstGeom prst="rect">
-            <a:avLst/>
-          </a:prstGeom>
-          <a:noFill/>
-          <a:ln/>
-        </p:spPr>
-        <p:txBody>
-          <a:bodyPr wrap="square" lIns="0" tIns="0" rIns="0" bIns="0" rtlCol="0" anchor="ctr"/>
-          <a:lstStyle/>
-          <a:p>
-            <a:pPr algn="ctr" indent="0" marL="0">
-              <a:buNone/>
-            </a:pPr>
-            <a:r>
-              <a:rPr lang="en-US" sz="1260" dirty="0">
-                <a:solidFill>
-                  <a:srgbClr val="F2A93B"/>
-                </a:solidFill>
-                <a:latin typeface="Courier New" pitchFamily="34" charset="0"/>
-                <a:ea typeface="Courier New" pitchFamily="34" charset="-122"/>
-                <a:cs typeface="Courier New" pitchFamily="34" charset="-120"/>
-              </a:rPr>
-              <a:t>answer</a:t>
-            </a:r>
-            <a:endParaRPr lang="en-US" sz="1260" dirty="0"/>
-          </a:p>
-        </p:txBody>
-      </p:sp>
-      <p:sp>
-        <p:nvSpPr>
-          <p:cNvPr id="33" name="Shape 31"/>
-          <p:cNvSpPr/>
-          <p:nvPr/>
-        </p:nvSpPr>
-        <p:spPr>
-          <a:xfrm>
-            <a:off x="6720840" y="2880360"/>
-            <a:ext cx="1005840" cy="0"/>
-          </a:xfrm>
-          <a:prstGeom prst="line">
-            <a:avLst/>
-          </a:prstGeom>
-          <a:noFill/>
-          <a:ln w="25400">
-            <a:solidFill>
-              <a:srgbClr val="F2A93B"/>
-            </a:solidFill>
-            <a:prstDash val="solid"/>
-            <a:tailEnd type="triangle"/>
-          </a:ln>
-        </p:spPr>
-      </p:sp>
-      <p:sp>
-        <p:nvSpPr>
-          <p:cNvPr id="34" name="Text 32"/>
-          <p:cNvSpPr/>
-          <p:nvPr/>
-        </p:nvSpPr>
-        <p:spPr>
-          <a:xfrm>
-            <a:off x="6492240" y="2423160"/>
-            <a:ext cx="1463040" cy="274320"/>
-          </a:xfrm>
-          <a:prstGeom prst="rect">
-            <a:avLst/>
-          </a:prstGeom>
-          <a:noFill/>
-          <a:ln/>
-        </p:spPr>
-        <p:txBody>
-          <a:bodyPr wrap="square" lIns="0" tIns="0" rIns="0" bIns="0" rtlCol="0" anchor="ctr"/>
-          <a:lstStyle/>
-          <a:p>
-            <a:pPr algn="ctr" indent="0" marL="0">
-              <a:buNone/>
-            </a:pPr>
-            <a:r>
-              <a:rPr lang="en-US" sz="1260" dirty="0">
-                <a:solidFill>
-                  <a:srgbClr val="F2A93B"/>
-                </a:solidFill>
-                <a:latin typeface="Courier New" pitchFamily="34" charset="0"/>
-                <a:ea typeface="Courier New" pitchFamily="34" charset="-122"/>
-                <a:cs typeface="Courier New" pitchFamily="34" charset="-120"/>
-              </a:rPr>
-              <a:t>prompt</a:t>
-            </a:r>
-            <a:endParaRPr lang="en-US" sz="1260" dirty="0"/>
-          </a:p>
-        </p:txBody>
-      </p:sp>
-      <p:sp>
-        <p:nvSpPr>
-          <p:cNvPr id="35" name="Shape 33"/>
-          <p:cNvSpPr/>
-          <p:nvPr/>
-        </p:nvSpPr>
-        <p:spPr>
-          <a:xfrm>
-            <a:off x="6720840" y="3429000"/>
-            <a:ext cx="1005840" cy="0"/>
-          </a:xfrm>
-          <a:prstGeom prst="line">
-            <a:avLst/>
-          </a:prstGeom>
-          <a:noFill/>
-          <a:ln w="25400">
-            <a:solidFill>
-              <a:srgbClr val="5FE0C5"/>
-            </a:solidFill>
-            <a:prstDash val="solid"/>
-            <a:headEnd type="triangle"/>
-          </a:ln>
-        </p:spPr>
-      </p:sp>
-      <p:sp>
-        <p:nvSpPr>
-          <p:cNvPr id="36" name="Text 34"/>
-          <p:cNvSpPr/>
-          <p:nvPr/>
-        </p:nvSpPr>
-        <p:spPr>
-          <a:xfrm>
-            <a:off x="6492240" y="3520440"/>
-            <a:ext cx="1463040" cy="274320"/>
-          </a:xfrm>
-          <a:prstGeom prst="rect">
-            <a:avLst/>
-          </a:prstGeom>
-          <a:noFill/>
-          <a:ln/>
-        </p:spPr>
-        <p:txBody>
-          <a:bodyPr wrap="square" lIns="0" tIns="0" rIns="0" bIns="0" rtlCol="0" anchor="ctr"/>
-          <a:lstStyle/>
-          <a:p>
-            <a:pPr algn="ctr" indent="0" marL="0">
-              <a:buNone/>
-            </a:pPr>
-            <a:r>
-              <a:rPr lang="en-US" sz="1260" dirty="0">
-                <a:solidFill>
-                  <a:srgbClr val="5FE0C5"/>
-                </a:solidFill>
-                <a:latin typeface="Courier New" pitchFamily="34" charset="0"/>
-                <a:ea typeface="Courier New" pitchFamily="34" charset="-122"/>
-                <a:cs typeface="Courier New" pitchFamily="34" charset="-120"/>
-              </a:rPr>
-              <a:t>completion</a:t>
-            </a:r>
-            <a:endParaRPr lang="en-US" sz="1260" dirty="0"/>
-          </a:p>
-        </p:txBody>
-      </p:sp>
-      <p:sp>
-        <p:nvSpPr>
-          <p:cNvPr id="37" name="Text 35"/>
-          <p:cNvSpPr/>
-          <p:nvPr/>
-        </p:nvSpPr>
-        <p:spPr>
-          <a:xfrm>
-            <a:off x="3977640" y="3977640"/>
-            <a:ext cx="2743200" cy="274320"/>
-          </a:xfrm>
-          <a:prstGeom prst="rect">
-            <a:avLst/>
-          </a:prstGeom>
-          <a:noFill/>
-          <a:ln/>
-        </p:spPr>
-        <p:txBody>
-          <a:bodyPr wrap="square" lIns="0" tIns="0" rIns="0" bIns="0" rtlCol="0" anchor="ctr"/>
-          <a:lstStyle/>
-          <a:p>
-            <a:pPr algn="ctr" indent="0" marL="0">
-              <a:buNone/>
-            </a:pPr>
-            <a:r>
-              <a:rPr lang="en-US" sz="1320" dirty="0">
-                <a:solidFill>
-                  <a:srgbClr val="5B6478"/>
-                </a:solidFill>
-                <a:latin typeface="Courier New" pitchFamily="34" charset="0"/>
-                <a:ea typeface="Courier New" pitchFamily="34" charset="-122"/>
-                <a:cs typeface="Courier New" pitchFamily="34" charset="-120"/>
-              </a:rPr>
-              <a:t>localhost:8080</a:t>
-            </a:r>
-            <a:endParaRPr lang="en-US" sz="1320" dirty="0"/>
-          </a:p>
-        </p:txBody>
-      </p:sp>
-      <p:sp>
-        <p:nvSpPr>
-          <p:cNvPr id="38" name="Text 36"/>
-          <p:cNvSpPr/>
-          <p:nvPr/>
-        </p:nvSpPr>
-        <p:spPr>
-          <a:xfrm>
-            <a:off x="7726680" y="3977640"/>
-            <a:ext cx="2743200" cy="274320"/>
-          </a:xfrm>
-          <a:prstGeom prst="rect">
-            <a:avLst/>
-          </a:prstGeom>
-          <a:noFill/>
-          <a:ln/>
-        </p:spPr>
-        <p:txBody>
-          <a:bodyPr wrap="square" lIns="0" tIns="0" rIns="0" bIns="0" rtlCol="0" anchor="ctr"/>
-          <a:lstStyle/>
-          <a:p>
-            <a:pPr algn="ctr" indent="0" marL="0">
-              <a:buNone/>
-            </a:pPr>
-            <a:r>
-              <a:rPr lang="en-US" sz="1320" dirty="0">
-                <a:solidFill>
-                  <a:srgbClr val="5B6478"/>
-                </a:solidFill>
-                <a:latin typeface="Courier New" pitchFamily="34" charset="0"/>
-                <a:ea typeface="Courier New" pitchFamily="34" charset="-122"/>
-                <a:cs typeface="Courier New" pitchFamily="34" charset="-120"/>
-              </a:rPr>
-              <a:t>localhost:11434</a:t>
-            </a:r>
-            <a:endParaRPr lang="en-US" sz="1320" dirty="0"/>
+          <a:p>
+            <a:pPr indent="0" marL="0">
+              <a:buNone/>
+            </a:pPr>
+            <a:r>
+              <a:rPr lang="en-US" sz="1620" dirty="0">
+                <a:solidFill>
+                  <a:srgbClr val="B8C0D0"/>
+                </a:solidFill>
+                <a:latin typeface="Calibri" pitchFamily="34" charset="0"/>
+                <a:ea typeface="Calibri" pitchFamily="34" charset="-122"/>
+                <a:cs typeface="Calibri" pitchFamily="34" charset="-120"/>
+              </a:rPr>
+              <a:t>prompt().user(question).call().content() reads like plain English</a:t>
+            </a:r>
+            <a:endParaRPr lang="en-US" sz="1920" dirty="0"/>
           </a:p>
         </p:txBody>
       </p:sp>
@@ -5852,7 +6890,7 @@
                 <a:ea typeface="Courier New" pitchFamily="34" charset="-122"/>
                 <a:cs typeface="Courier New" pitchFamily="34" charset="-120"/>
               </a:rPr>
-              <a:t>5 / 9</a:t>
+              <a:t>5 / 10</a:t>
             </a:r>
             <a:endParaRPr lang="en-US" sz="1080" dirty="0"/>
           </a:p>
@@ -5891,7 +6929,7 @@
                 <a:ea typeface="Courier New" pitchFamily="34" charset="-122"/>
                 <a:cs typeface="Courier New" pitchFamily="34" charset="-120"/>
               </a:rPr>
-              <a:t>CODE SNIPPET</a:t>
+              <a:t>ARCHITECTURE</a:t>
             </a:r>
             <a:endParaRPr lang="en-US" sz="1440" dirty="0"/>
           </a:p>
@@ -5930,7 +6968,7 @@
                 <a:ea typeface="Courier New" pitchFamily="34" charset="-122"/>
                 <a:cs typeface="Courier New" pitchFamily="34" charset="-120"/>
               </a:rPr>
-              <a:t>The Controller</a:t>
+              <a:t>How a question becomes an answer</a:t>
             </a:r>
             <a:endParaRPr lang="en-US" sz="3360" dirty="0"/>
           </a:p>
@@ -5944,27 +6982,27 @@
         </p:nvSpPr>
         <p:spPr>
           <a:xfrm>
-            <a:off x="640080" y="1234440"/>
-            <a:ext cx="10881360" cy="5029200"/>
+            <a:off x="640080" y="2468880"/>
+            <a:ext cx="2377440" cy="1371600"/>
           </a:xfrm>
           <a:prstGeom prst="roundRect">
             <a:avLst>
-              <a:gd name="adj" fmla="val 1455"/>
+              <a:gd name="adj" fmla="val 8000"/>
             </a:avLst>
           </a:prstGeom>
           <a:solidFill>
             <a:srgbClr val="121A2E"/>
           </a:solidFill>
-          <a:ln w="9525">
+          <a:ln w="19050">
             <a:solidFill>
-              <a:srgbClr val="5B6478"/>
+              <a:srgbClr val="8B98AC"/>
             </a:solidFill>
             <a:prstDash val="solid"/>
           </a:ln>
           <a:effectLst>
-            <a:outerShdw sx="100000" sy="100000" kx="0" ky="0" algn="bl" rotWithShape="0" blurRad="127000" dist="50800" dir="5400000">
+            <a:outerShdw sx="100000" sy="100000" kx="0" ky="0" algn="bl" rotWithShape="0" blurRad="101600" dist="38100" dir="2700000">
               <a:srgbClr val="000000">
-                <a:alpha val="30000"/>
+                <a:alpha val="25000"/>
               </a:srgbClr>
             </a:outerShdw>
           </a:effectLst>
@@ -5972,43 +7010,81 @@
       </p:sp>
       <p:sp>
         <p:nvSpPr>
-          <p:cNvPr id="21" name="Shape 19"/>
-          <p:cNvSpPr/>
-          <p:nvPr/>
-        </p:nvSpPr>
-        <p:spPr>
-          <a:xfrm>
-            <a:off x="841248" y="1399032"/>
-            <a:ext cx="91440" cy="91440"/>
-          </a:xfrm>
-          <a:prstGeom prst="ellipse">
-            <a:avLst/>
-          </a:prstGeom>
-          <a:solidFill>
-            <a:srgbClr val="F2A93B"/>
-          </a:solidFill>
-          <a:ln/>
-        </p:spPr>
-      </p:sp>
-      <p:sp>
-        <p:nvSpPr>
-          <p:cNvPr id="22" name="Shape 20"/>
-          <p:cNvSpPr/>
-          <p:nvPr/>
-        </p:nvSpPr>
-        <p:spPr>
-          <a:xfrm>
-            <a:off x="1042416" y="1399032"/>
-            <a:ext cx="91440" cy="91440"/>
-          </a:xfrm>
-          <a:prstGeom prst="ellipse">
-            <a:avLst/>
-          </a:prstGeom>
-          <a:solidFill>
-            <a:srgbClr val="8B98AC"/>
-          </a:solidFill>
-          <a:ln/>
-        </p:spPr>
+          <p:cNvPr id="21" name="Text 19"/>
+          <p:cNvSpPr/>
+          <p:nvPr/>
+        </p:nvSpPr>
+        <p:spPr>
+          <a:xfrm>
+            <a:off x="822960" y="2743200"/>
+            <a:ext cx="2011680" cy="457200"/>
+          </a:xfrm>
+          <a:prstGeom prst="rect">
+            <a:avLst/>
+          </a:prstGeom>
+          <a:noFill/>
+          <a:ln/>
+        </p:spPr>
+        <p:txBody>
+          <a:bodyPr wrap="square" lIns="0" tIns="0" rIns="0" bIns="0" rtlCol="0" anchor="ctr"/>
+          <a:lstStyle/>
+          <a:p>
+            <a:pPr algn="ctr" indent="0" marL="0">
+              <a:buNone/>
+            </a:pPr>
+            <a:r>
+              <a:rPr lang="en-US" sz="1920" b="1" dirty="0">
+                <a:solidFill>
+                  <a:srgbClr val="E5E9F0"/>
+                </a:solidFill>
+                <a:latin typeface="Courier New" pitchFamily="34" charset="0"/>
+                <a:ea typeface="Courier New" pitchFamily="34" charset="-122"/>
+                <a:cs typeface="Courier New" pitchFamily="34" charset="-120"/>
+              </a:rPr>
+              <a:t>curl / Browser</a:t>
+            </a:r>
+            <a:endParaRPr lang="en-US" sz="1920" dirty="0"/>
+          </a:p>
+        </p:txBody>
+      </p:sp>
+      <p:sp>
+        <p:nvSpPr>
+          <p:cNvPr id="22" name="Text 20"/>
+          <p:cNvSpPr/>
+          <p:nvPr/>
+        </p:nvSpPr>
+        <p:spPr>
+          <a:xfrm>
+            <a:off x="822960" y="3246120"/>
+            <a:ext cx="2011680" cy="365760"/>
+          </a:xfrm>
+          <a:prstGeom prst="rect">
+            <a:avLst/>
+          </a:prstGeom>
+          <a:noFill/>
+          <a:ln/>
+        </p:spPr>
+        <p:txBody>
+          <a:bodyPr wrap="square" lIns="0" tIns="0" rIns="0" bIns="0" rtlCol="0" anchor="ctr"/>
+          <a:lstStyle/>
+          <a:p>
+            <a:pPr algn="ctr" indent="0" marL="0">
+              <a:buNone/>
+            </a:pPr>
+            <a:r>
+              <a:rPr lang="en-US" sz="1560" dirty="0">
+                <a:solidFill>
+                  <a:srgbClr val="8B98AC"/>
+                </a:solidFill>
+                <a:latin typeface="Courier New" pitchFamily="34" charset="0"/>
+                <a:ea typeface="Courier New" pitchFamily="34" charset="-122"/>
+                <a:cs typeface="Courier New" pitchFamily="34" charset="-120"/>
+              </a:rPr>
+              <a:t>POST /hr/ask</a:t>
+            </a:r>
+            <a:endParaRPr lang="en-US" sz="1560" dirty="0"/>
+          </a:p>
+        </p:txBody>
       </p:sp>
       <p:sp>
         <p:nvSpPr>
@@ -6018,16 +7094,30 @@
         </p:nvSpPr>
         <p:spPr>
           <a:xfrm>
-            <a:off x="1243584" y="1399032"/>
-            <a:ext cx="91440" cy="91440"/>
-          </a:xfrm>
-          <a:prstGeom prst="ellipse">
-            <a:avLst/>
-          </a:prstGeom>
-          <a:solidFill>
-            <a:srgbClr val="5FE0C5"/>
-          </a:solidFill>
-          <a:ln/>
+            <a:off x="3977640" y="2468880"/>
+            <a:ext cx="2743200" cy="1371600"/>
+          </a:xfrm>
+          <a:prstGeom prst="roundRect">
+            <a:avLst>
+              <a:gd name="adj" fmla="val 8000"/>
+            </a:avLst>
+          </a:prstGeom>
+          <a:solidFill>
+            <a:srgbClr val="121A2E"/>
+          </a:solidFill>
+          <a:ln w="19050">
+            <a:solidFill>
+              <a:srgbClr val="F2A93B"/>
+            </a:solidFill>
+            <a:prstDash val="solid"/>
+          </a:ln>
+          <a:effectLst>
+            <a:outerShdw sx="100000" sy="100000" kx="0" ky="0" algn="bl" rotWithShape="0" blurRad="101600" dist="38100" dir="2700000">
+              <a:srgbClr val="000000">
+                <a:alpha val="25000"/>
+              </a:srgbClr>
+            </a:outerShdw>
+          </a:effectLst>
         </p:spPr>
       </p:sp>
       <p:sp>
@@ -6038,8 +7128,8 @@
         </p:nvSpPr>
         <p:spPr>
           <a:xfrm>
-            <a:off x="9509760" y="1325880"/>
-            <a:ext cx="1828800" cy="274320"/>
+            <a:off x="4160520" y="2743200"/>
+            <a:ext cx="2377440" cy="457200"/>
           </a:xfrm>
           <a:prstGeom prst="rect">
             <a:avLst/>
@@ -6051,11 +7141,225 @@
           <a:bodyPr wrap="square" lIns="0" tIns="0" rIns="0" bIns="0" rtlCol="0" anchor="ctr"/>
           <a:lstStyle/>
           <a:p>
-            <a:pPr algn="r" indent="0" marL="0">
-              <a:buNone/>
-            </a:pPr>
-            <a:r>
-              <a:rPr lang="en-US" sz="1200" dirty="0">
+            <a:pPr algn="ctr" indent="0" marL="0">
+              <a:buNone/>
+            </a:pPr>
+            <a:r>
+              <a:rPr lang="en-US" sz="1920" b="1" dirty="0">
+                <a:solidFill>
+                  <a:srgbClr val="E5E9F0"/>
+                </a:solidFill>
+                <a:latin typeface="Courier New" pitchFamily="34" charset="0"/>
+                <a:ea typeface="Courier New" pitchFamily="34" charset="-122"/>
+                <a:cs typeface="Courier New" pitchFamily="34" charset="-120"/>
+              </a:rPr>
+              <a:t>Spring Boot App</a:t>
+            </a:r>
+            <a:endParaRPr lang="en-US" sz="1920" dirty="0"/>
+          </a:p>
+        </p:txBody>
+      </p:sp>
+      <p:sp>
+        <p:nvSpPr>
+          <p:cNvPr id="25" name="Text 23"/>
+          <p:cNvSpPr/>
+          <p:nvPr/>
+        </p:nvSpPr>
+        <p:spPr>
+          <a:xfrm>
+            <a:off x="4160520" y="3246120"/>
+            <a:ext cx="2377440" cy="365760"/>
+          </a:xfrm>
+          <a:prstGeom prst="rect">
+            <a:avLst/>
+          </a:prstGeom>
+          <a:noFill/>
+          <a:ln/>
+        </p:spPr>
+        <p:txBody>
+          <a:bodyPr wrap="square" lIns="0" tIns="0" rIns="0" bIns="0" rtlCol="0" anchor="ctr"/>
+          <a:lstStyle/>
+          <a:p>
+            <a:pPr algn="ctr" indent="0" marL="0">
+              <a:buNone/>
+            </a:pPr>
+            <a:r>
+              <a:rPr lang="en-US" sz="1560" dirty="0">
+                <a:solidFill>
+                  <a:srgbClr val="F2A93B"/>
+                </a:solidFill>
+                <a:latin typeface="Courier New" pitchFamily="34" charset="0"/>
+                <a:ea typeface="Courier New" pitchFamily="34" charset="-122"/>
+                <a:cs typeface="Courier New" pitchFamily="34" charset="-120"/>
+              </a:rPr>
+              <a:t>ChatClient</a:t>
+            </a:r>
+            <a:endParaRPr lang="en-US" sz="1560" dirty="0"/>
+          </a:p>
+        </p:txBody>
+      </p:sp>
+      <p:sp>
+        <p:nvSpPr>
+          <p:cNvPr id="26" name="Shape 24"/>
+          <p:cNvSpPr/>
+          <p:nvPr/>
+        </p:nvSpPr>
+        <p:spPr>
+          <a:xfrm>
+            <a:off x="7726680" y="2468880"/>
+            <a:ext cx="2743200" cy="1371600"/>
+          </a:xfrm>
+          <a:prstGeom prst="roundRect">
+            <a:avLst>
+              <a:gd name="adj" fmla="val 8000"/>
+            </a:avLst>
+          </a:prstGeom>
+          <a:solidFill>
+            <a:srgbClr val="121A2E"/>
+          </a:solidFill>
+          <a:ln w="19050">
+            <a:solidFill>
+              <a:srgbClr val="5FE0C5"/>
+            </a:solidFill>
+            <a:prstDash val="solid"/>
+          </a:ln>
+          <a:effectLst>
+            <a:outerShdw sx="100000" sy="100000" kx="0" ky="0" algn="bl" rotWithShape="0" blurRad="101600" dist="38100" dir="2700000">
+              <a:srgbClr val="000000">
+                <a:alpha val="25000"/>
+              </a:srgbClr>
+            </a:outerShdw>
+          </a:effectLst>
+        </p:spPr>
+      </p:sp>
+      <p:sp>
+        <p:nvSpPr>
+          <p:cNvPr id="27" name="Text 25"/>
+          <p:cNvSpPr/>
+          <p:nvPr/>
+        </p:nvSpPr>
+        <p:spPr>
+          <a:xfrm>
+            <a:off x="7909560" y="2743200"/>
+            <a:ext cx="2377440" cy="457200"/>
+          </a:xfrm>
+          <a:prstGeom prst="rect">
+            <a:avLst/>
+          </a:prstGeom>
+          <a:noFill/>
+          <a:ln/>
+        </p:spPr>
+        <p:txBody>
+          <a:bodyPr wrap="square" lIns="0" tIns="0" rIns="0" bIns="0" rtlCol="0" anchor="ctr"/>
+          <a:lstStyle/>
+          <a:p>
+            <a:pPr algn="ctr" indent="0" marL="0">
+              <a:buNone/>
+            </a:pPr>
+            <a:r>
+              <a:rPr lang="en-US" sz="1920" b="1" dirty="0">
+                <a:solidFill>
+                  <a:srgbClr val="E5E9F0"/>
+                </a:solidFill>
+                <a:latin typeface="Courier New" pitchFamily="34" charset="0"/>
+                <a:ea typeface="Courier New" pitchFamily="34" charset="-122"/>
+                <a:cs typeface="Courier New" pitchFamily="34" charset="-120"/>
+              </a:rPr>
+              <a:t>Ollama</a:t>
+            </a:r>
+            <a:endParaRPr lang="en-US" sz="1920" dirty="0"/>
+          </a:p>
+        </p:txBody>
+      </p:sp>
+      <p:sp>
+        <p:nvSpPr>
+          <p:cNvPr id="28" name="Text 26"/>
+          <p:cNvSpPr/>
+          <p:nvPr/>
+        </p:nvSpPr>
+        <p:spPr>
+          <a:xfrm>
+            <a:off x="7909560" y="3246120"/>
+            <a:ext cx="2377440" cy="365760"/>
+          </a:xfrm>
+          <a:prstGeom prst="rect">
+            <a:avLst/>
+          </a:prstGeom>
+          <a:noFill/>
+          <a:ln/>
+        </p:spPr>
+        <p:txBody>
+          <a:bodyPr wrap="square" lIns="0" tIns="0" rIns="0" bIns="0" rtlCol="0" anchor="ctr"/>
+          <a:lstStyle/>
+          <a:p>
+            <a:pPr algn="ctr" indent="0" marL="0">
+              <a:buNone/>
+            </a:pPr>
+            <a:r>
+              <a:rPr lang="en-US" sz="1560" dirty="0">
+                <a:solidFill>
+                  <a:srgbClr val="5FE0C5"/>
+                </a:solidFill>
+                <a:latin typeface="Courier New" pitchFamily="34" charset="0"/>
+                <a:ea typeface="Courier New" pitchFamily="34" charset="-122"/>
+                <a:cs typeface="Courier New" pitchFamily="34" charset="-120"/>
+              </a:rPr>
+              <a:t>llama3.2 model</a:t>
+            </a:r>
+            <a:endParaRPr lang="en-US" sz="1560" dirty="0"/>
+          </a:p>
+        </p:txBody>
+      </p:sp>
+      <p:sp>
+        <p:nvSpPr>
+          <p:cNvPr id="29" name="Shape 27"/>
+          <p:cNvSpPr/>
+          <p:nvPr/>
+        </p:nvSpPr>
+        <p:spPr>
+          <a:xfrm>
+            <a:off x="3017520" y="2880360"/>
+            <a:ext cx="960120" cy="0"/>
+          </a:xfrm>
+          <a:prstGeom prst="line">
+            <a:avLst/>
+          </a:prstGeom>
+          <a:noFill/>
+          <a:ln w="25400">
+            <a:solidFill>
+              <a:srgbClr val="8B98AC"/>
+            </a:solidFill>
+            <a:prstDash val="solid"/>
+            <a:tailEnd type="triangle"/>
+          </a:ln>
+        </p:spPr>
+      </p:sp>
+      <p:sp>
+        <p:nvSpPr>
+          <p:cNvPr id="30" name="Text 28"/>
+          <p:cNvSpPr/>
+          <p:nvPr/>
+        </p:nvSpPr>
+        <p:spPr>
+          <a:xfrm>
+            <a:off x="2788920" y="2423160"/>
+            <a:ext cx="1463040" cy="274320"/>
+          </a:xfrm>
+          <a:prstGeom prst="rect">
+            <a:avLst/>
+          </a:prstGeom>
+          <a:noFill/>
+          <a:ln/>
+        </p:spPr>
+        <p:txBody>
+          <a:bodyPr wrap="square" lIns="0" tIns="0" rIns="0" bIns="0" rtlCol="0" anchor="ctr"/>
+          <a:lstStyle/>
+          <a:p>
+            <a:pPr algn="ctr" indent="0" marL="0">
+              <a:buNone/>
+            </a:pPr>
+            <a:r>
+              <a:rPr lang="en-US" sz="1260" dirty="0">
                 <a:solidFill>
                   <a:srgbClr val="8B98AC"/>
                 </a:solidFill>
@@ -6063,38 +7367,62 @@
                 <a:ea typeface="Courier New" pitchFamily="34" charset="-122"/>
                 <a:cs typeface="Courier New" pitchFamily="34" charset="-120"/>
               </a:rPr>
-              <a:t>HrController.java</a:t>
-            </a:r>
-            <a:endParaRPr lang="en-US" sz="1200" dirty="0"/>
-          </a:p>
-        </p:txBody>
-      </p:sp>
-      <p:sp>
-        <p:nvSpPr>
-          <p:cNvPr id="25" name="Text 23"/>
-          <p:cNvSpPr/>
-          <p:nvPr/>
-        </p:nvSpPr>
-        <p:spPr>
-          <a:xfrm>
-            <a:off x="960120" y="1691640"/>
-            <a:ext cx="10332720" cy="274320"/>
-          </a:xfrm>
-          <a:prstGeom prst="rect">
-            <a:avLst/>
-          </a:prstGeom>
-          <a:noFill/>
-          <a:ln/>
-        </p:spPr>
-        <p:txBody>
-          <a:bodyPr wrap="square" lIns="0" tIns="0" rIns="0" bIns="0" rtlCol="0" anchor="t"/>
-          <a:lstStyle/>
-          <a:p>
-            <a:pPr indent="0" marL="0">
-              <a:buNone/>
-            </a:pPr>
-            <a:r>
-              <a:rPr lang="en-US" sz="1500" dirty="0">
+              <a:t>question</a:t>
+            </a:r>
+            <a:endParaRPr lang="en-US" sz="1260" dirty="0"/>
+          </a:p>
+        </p:txBody>
+      </p:sp>
+      <p:sp>
+        <p:nvSpPr>
+          <p:cNvPr id="31" name="Shape 29"/>
+          <p:cNvSpPr/>
+          <p:nvPr/>
+        </p:nvSpPr>
+        <p:spPr>
+          <a:xfrm>
+            <a:off x="3017520" y="3429000"/>
+            <a:ext cx="960120" cy="0"/>
+          </a:xfrm>
+          <a:prstGeom prst="line">
+            <a:avLst/>
+          </a:prstGeom>
+          <a:noFill/>
+          <a:ln w="25400">
+            <a:solidFill>
+              <a:srgbClr val="F2A93B"/>
+            </a:solidFill>
+            <a:prstDash val="solid"/>
+            <a:headEnd type="triangle"/>
+          </a:ln>
+        </p:spPr>
+      </p:sp>
+      <p:sp>
+        <p:nvSpPr>
+          <p:cNvPr id="32" name="Text 30"/>
+          <p:cNvSpPr/>
+          <p:nvPr/>
+        </p:nvSpPr>
+        <p:spPr>
+          <a:xfrm>
+            <a:off x="2788920" y="3520440"/>
+            <a:ext cx="1463040" cy="274320"/>
+          </a:xfrm>
+          <a:prstGeom prst="rect">
+            <a:avLst/>
+          </a:prstGeom>
+          <a:noFill/>
+          <a:ln/>
+        </p:spPr>
+        <p:txBody>
+          <a:bodyPr wrap="square" lIns="0" tIns="0" rIns="0" bIns="0" rtlCol="0" anchor="ctr"/>
+          <a:lstStyle/>
+          <a:p>
+            <a:pPr algn="ctr" indent="0" marL="0">
+              <a:buNone/>
+            </a:pPr>
+            <a:r>
+              <a:rPr lang="en-US" sz="1260" dirty="0">
                 <a:solidFill>
                   <a:srgbClr val="F2A93B"/>
                 </a:solidFill>
@@ -6102,38 +7430,62 @@
                 <a:ea typeface="Courier New" pitchFamily="34" charset="-122"/>
                 <a:cs typeface="Courier New" pitchFamily="34" charset="-120"/>
               </a:rPr>
-              <a:t>@RestController</a:t>
-            </a:r>
-            <a:endParaRPr lang="en-US" sz="1500" dirty="0"/>
-          </a:p>
-        </p:txBody>
-      </p:sp>
-      <p:sp>
-        <p:nvSpPr>
-          <p:cNvPr id="26" name="Text 24"/>
-          <p:cNvSpPr/>
-          <p:nvPr/>
-        </p:nvSpPr>
-        <p:spPr>
-          <a:xfrm>
-            <a:off x="960120" y="1965960"/>
-            <a:ext cx="10332720" cy="274320"/>
-          </a:xfrm>
-          <a:prstGeom prst="rect">
-            <a:avLst/>
-          </a:prstGeom>
-          <a:noFill/>
-          <a:ln/>
-        </p:spPr>
-        <p:txBody>
-          <a:bodyPr wrap="square" lIns="0" tIns="0" rIns="0" bIns="0" rtlCol="0" anchor="t"/>
-          <a:lstStyle/>
-          <a:p>
-            <a:pPr indent="0" marL="0">
-              <a:buNone/>
-            </a:pPr>
-            <a:r>
-              <a:rPr lang="en-US" sz="1500" dirty="0">
+              <a:t>answer</a:t>
+            </a:r>
+            <a:endParaRPr lang="en-US" sz="1260" dirty="0"/>
+          </a:p>
+        </p:txBody>
+      </p:sp>
+      <p:sp>
+        <p:nvSpPr>
+          <p:cNvPr id="33" name="Shape 31"/>
+          <p:cNvSpPr/>
+          <p:nvPr/>
+        </p:nvSpPr>
+        <p:spPr>
+          <a:xfrm>
+            <a:off x="6720840" y="2880360"/>
+            <a:ext cx="1005840" cy="0"/>
+          </a:xfrm>
+          <a:prstGeom prst="line">
+            <a:avLst/>
+          </a:prstGeom>
+          <a:noFill/>
+          <a:ln w="25400">
+            <a:solidFill>
+              <a:srgbClr val="F2A93B"/>
+            </a:solidFill>
+            <a:prstDash val="solid"/>
+            <a:tailEnd type="triangle"/>
+          </a:ln>
+        </p:spPr>
+      </p:sp>
+      <p:sp>
+        <p:nvSpPr>
+          <p:cNvPr id="34" name="Text 32"/>
+          <p:cNvSpPr/>
+          <p:nvPr/>
+        </p:nvSpPr>
+        <p:spPr>
+          <a:xfrm>
+            <a:off x="6492240" y="2423160"/>
+            <a:ext cx="1463040" cy="274320"/>
+          </a:xfrm>
+          <a:prstGeom prst="rect">
+            <a:avLst/>
+          </a:prstGeom>
+          <a:noFill/>
+          <a:ln/>
+        </p:spPr>
+        <p:txBody>
+          <a:bodyPr wrap="square" lIns="0" tIns="0" rIns="0" bIns="0" rtlCol="0" anchor="ctr"/>
+          <a:lstStyle/>
+          <a:p>
+            <a:pPr algn="ctr" indent="0" marL="0">
+              <a:buNone/>
+            </a:pPr>
+            <a:r>
+              <a:rPr lang="en-US" sz="1260" dirty="0">
                 <a:solidFill>
                   <a:srgbClr val="F2A93B"/>
                 </a:solidFill>
@@ -6141,13 +7493,62 @@
                 <a:ea typeface="Courier New" pitchFamily="34" charset="-122"/>
                 <a:cs typeface="Courier New" pitchFamily="34" charset="-120"/>
               </a:rPr>
-              <a:t>@RequestMapping</a:t>
-            </a:r>
-            <a:pPr indent="0" marL="0">
-              <a:buNone/>
-            </a:pPr>
-            <a:r>
-              <a:rPr lang="en-US" sz="1500" dirty="0">
+              <a:t>prompt</a:t>
+            </a:r>
+            <a:endParaRPr lang="en-US" sz="1260" dirty="0"/>
+          </a:p>
+        </p:txBody>
+      </p:sp>
+      <p:sp>
+        <p:nvSpPr>
+          <p:cNvPr id="35" name="Shape 33"/>
+          <p:cNvSpPr/>
+          <p:nvPr/>
+        </p:nvSpPr>
+        <p:spPr>
+          <a:xfrm>
+            <a:off x="6720840" y="3429000"/>
+            <a:ext cx="1005840" cy="0"/>
+          </a:xfrm>
+          <a:prstGeom prst="line">
+            <a:avLst/>
+          </a:prstGeom>
+          <a:noFill/>
+          <a:ln w="25400">
+            <a:solidFill>
+              <a:srgbClr val="5FE0C5"/>
+            </a:solidFill>
+            <a:prstDash val="solid"/>
+            <a:headEnd type="triangle"/>
+          </a:ln>
+        </p:spPr>
+      </p:sp>
+      <p:sp>
+        <p:nvSpPr>
+          <p:cNvPr id="36" name="Text 34"/>
+          <p:cNvSpPr/>
+          <p:nvPr/>
+        </p:nvSpPr>
+        <p:spPr>
+          <a:xfrm>
+            <a:off x="6492240" y="3520440"/>
+            <a:ext cx="1463040" cy="274320"/>
+          </a:xfrm>
+          <a:prstGeom prst="rect">
+            <a:avLst/>
+          </a:prstGeom>
+          <a:noFill/>
+          <a:ln/>
+        </p:spPr>
+        <p:txBody>
+          <a:bodyPr wrap="square" lIns="0" tIns="0" rIns="0" bIns="0" rtlCol="0" anchor="ctr"/>
+          <a:lstStyle/>
+          <a:p>
+            <a:pPr algn="ctr" indent="0" marL="0">
+              <a:buNone/>
+            </a:pPr>
+            <a:r>
+              <a:rPr lang="en-US" sz="1260" dirty="0">
                 <a:solidFill>
                   <a:srgbClr val="5FE0C5"/>
                 </a:solidFill>
@@ -6155,525 +7556,9 @@
                 <a:ea typeface="Courier New" pitchFamily="34" charset="-122"/>
                 <a:cs typeface="Courier New" pitchFamily="34" charset="-120"/>
               </a:rPr>
-              <a:t>("/hr")</a:t>
-            </a:r>
-            <a:endParaRPr lang="en-US" sz="1500" dirty="0"/>
-          </a:p>
-        </p:txBody>
-      </p:sp>
-      <p:sp>
-        <p:nvSpPr>
-          <p:cNvPr id="27" name="Text 25"/>
-          <p:cNvSpPr/>
-          <p:nvPr/>
-        </p:nvSpPr>
-        <p:spPr>
-          <a:xfrm>
-            <a:off x="960120" y="2240280"/>
-            <a:ext cx="10332720" cy="274320"/>
-          </a:xfrm>
-          <a:prstGeom prst="rect">
-            <a:avLst/>
-          </a:prstGeom>
-          <a:noFill/>
-          <a:ln/>
-        </p:spPr>
-        <p:txBody>
-          <a:bodyPr wrap="square" lIns="0" tIns="0" rIns="0" bIns="0" rtlCol="0" anchor="t"/>
-          <a:lstStyle/>
-          <a:p>
-            <a:pPr indent="0" marL="0">
-              <a:buNone/>
-            </a:pPr>
-            <a:r>
-              <a:rPr lang="en-US" sz="1500" dirty="0">
-                <a:solidFill>
-                  <a:srgbClr val="F2A93B"/>
-                </a:solidFill>
-                <a:latin typeface="Courier New" pitchFamily="34" charset="0"/>
-                <a:ea typeface="Courier New" pitchFamily="34" charset="-122"/>
-                <a:cs typeface="Courier New" pitchFamily="34" charset="-120"/>
-              </a:rPr>
-              <a:t>public class </a:t>
-            </a:r>
-            <a:pPr indent="0" marL="0">
-              <a:buNone/>
-            </a:pPr>
-            <a:r>
-              <a:rPr lang="en-US" sz="1500" dirty="0">
-                <a:solidFill>
-                  <a:srgbClr val="E5E9F0"/>
-                </a:solidFill>
-                <a:latin typeface="Courier New" pitchFamily="34" charset="0"/>
-                <a:ea typeface="Courier New" pitchFamily="34" charset="-122"/>
-                <a:cs typeface="Courier New" pitchFamily="34" charset="-120"/>
-              </a:rPr>
-              <a:t>HrController</a:t>
-            </a:r>
-            <a:pPr indent="0" marL="0">
-              <a:buNone/>
-            </a:pPr>
-            <a:r>
-              <a:rPr lang="en-US" sz="1500" dirty="0">
-                <a:solidFill>
-                  <a:srgbClr val="E5E9F0"/>
-                </a:solidFill>
-                <a:latin typeface="Courier New" pitchFamily="34" charset="0"/>
-                <a:ea typeface="Courier New" pitchFamily="34" charset="-122"/>
-                <a:cs typeface="Courier New" pitchFamily="34" charset="-120"/>
-              </a:rPr>
-              <a:t> {</a:t>
-            </a:r>
-            <a:endParaRPr lang="en-US" sz="1500" dirty="0"/>
-          </a:p>
-        </p:txBody>
-      </p:sp>
-      <p:sp>
-        <p:nvSpPr>
-          <p:cNvPr id="28" name="Text 26"/>
-          <p:cNvSpPr/>
-          <p:nvPr/>
-        </p:nvSpPr>
-        <p:spPr>
-          <a:xfrm>
-            <a:off x="960120" y="2514600"/>
-            <a:ext cx="10332720" cy="274320"/>
-          </a:xfrm>
-          <a:prstGeom prst="rect">
-            <a:avLst/>
-          </a:prstGeom>
-          <a:noFill/>
-          <a:ln/>
-        </p:spPr>
-        <p:txBody>
-          <a:bodyPr wrap="square" lIns="0" tIns="0" rIns="0" bIns="0" rtlCol="0" anchor="t"/>
-          <a:lstStyle/>
-          <a:p>
-            <a:pPr indent="0" marL="0">
-              <a:buNone/>
-            </a:pPr>
-            <a:r>
-              <a:rPr lang="en-US" sz="1500" dirty="0">
-                <a:solidFill>
-                  <a:srgbClr val="F2A93B"/>
-                </a:solidFill>
-                <a:latin typeface="Courier New" pitchFamily="34" charset="0"/>
-                <a:ea typeface="Courier New" pitchFamily="34" charset="-122"/>
-                <a:cs typeface="Courier New" pitchFamily="34" charset="-120"/>
-              </a:rPr>
-              <a:t>    private final </a:t>
-            </a:r>
-            <a:pPr indent="0" marL="0">
-              <a:buNone/>
-            </a:pPr>
-            <a:r>
-              <a:rPr lang="en-US" sz="1500" dirty="0">
-                <a:solidFill>
-                  <a:srgbClr val="5FE0C5"/>
-                </a:solidFill>
-                <a:latin typeface="Courier New" pitchFamily="34" charset="0"/>
-                <a:ea typeface="Courier New" pitchFamily="34" charset="-122"/>
-                <a:cs typeface="Courier New" pitchFamily="34" charset="-120"/>
-              </a:rPr>
-              <a:t>ChatClient</a:t>
-            </a:r>
-            <a:pPr indent="0" marL="0">
-              <a:buNone/>
-            </a:pPr>
-            <a:r>
-              <a:rPr lang="en-US" sz="1500" dirty="0">
-                <a:solidFill>
-                  <a:srgbClr val="E5E9F0"/>
-                </a:solidFill>
-                <a:latin typeface="Courier New" pitchFamily="34" charset="0"/>
-                <a:ea typeface="Courier New" pitchFamily="34" charset="-122"/>
-                <a:cs typeface="Courier New" pitchFamily="34" charset="-120"/>
-              </a:rPr>
-              <a:t> chatClient;</a:t>
-            </a:r>
-            <a:endParaRPr lang="en-US" sz="1500" dirty="0"/>
-          </a:p>
-        </p:txBody>
-      </p:sp>
-      <p:sp>
-        <p:nvSpPr>
-          <p:cNvPr id="29" name="Text 27"/>
-          <p:cNvSpPr/>
-          <p:nvPr/>
-        </p:nvSpPr>
-        <p:spPr>
-          <a:xfrm>
-            <a:off x="960120" y="2788920"/>
-            <a:ext cx="10332720" cy="274320"/>
-          </a:xfrm>
-          <a:prstGeom prst="rect">
-            <a:avLst/>
-          </a:prstGeom>
-          <a:noFill/>
-          <a:ln/>
-        </p:spPr>
-        <p:txBody>
-          <a:bodyPr wrap="square" lIns="0" tIns="0" rIns="0" bIns="0" rtlCol="0" anchor="t"/>
-          <a:lstStyle/>
-          <a:p>
-            <a:pPr indent="0" marL="0">
-              <a:buNone/>
-            </a:pPr>
-            <a:r>
-              <a:rPr lang="en-US" sz="1500" dirty="0">
-                <a:solidFill>
-                  <a:srgbClr val="F2A93B"/>
-                </a:solidFill>
-                <a:latin typeface="Courier New" pitchFamily="34" charset="0"/>
-                <a:ea typeface="Courier New" pitchFamily="34" charset="-122"/>
-                <a:cs typeface="Courier New" pitchFamily="34" charset="-120"/>
-              </a:rPr>
-              <a:t>    public </a:t>
-            </a:r>
-            <a:pPr indent="0" marL="0">
-              <a:buNone/>
-            </a:pPr>
-            <a:r>
-              <a:rPr lang="en-US" sz="1500" dirty="0">
-                <a:solidFill>
-                  <a:srgbClr val="E5E9F0"/>
-                </a:solidFill>
-                <a:latin typeface="Courier New" pitchFamily="34" charset="0"/>
-                <a:ea typeface="Courier New" pitchFamily="34" charset="-122"/>
-                <a:cs typeface="Courier New" pitchFamily="34" charset="-120"/>
-              </a:rPr>
-              <a:t>HrController</a:t>
-            </a:r>
-            <a:pPr indent="0" marL="0">
-              <a:buNone/>
-            </a:pPr>
-            <a:r>
-              <a:rPr lang="en-US" sz="1500" dirty="0">
-                <a:solidFill>
-                  <a:srgbClr val="E5E9F0"/>
-                </a:solidFill>
-                <a:latin typeface="Courier New" pitchFamily="34" charset="0"/>
-                <a:ea typeface="Courier New" pitchFamily="34" charset="-122"/>
-                <a:cs typeface="Courier New" pitchFamily="34" charset="-120"/>
-              </a:rPr>
-              <a:t>(ChatClient.Builder builder) {</a:t>
-            </a:r>
-            <a:endParaRPr lang="en-US" sz="1500" dirty="0"/>
-          </a:p>
-        </p:txBody>
-      </p:sp>
-      <p:sp>
-        <p:nvSpPr>
-          <p:cNvPr id="30" name="Text 28"/>
-          <p:cNvSpPr/>
-          <p:nvPr/>
-        </p:nvSpPr>
-        <p:spPr>
-          <a:xfrm>
-            <a:off x="960120" y="3063240"/>
-            <a:ext cx="10332720" cy="274320"/>
-          </a:xfrm>
-          <a:prstGeom prst="rect">
-            <a:avLst/>
-          </a:prstGeom>
-          <a:noFill/>
-          <a:ln/>
-        </p:spPr>
-        <p:txBody>
-          <a:bodyPr wrap="square" lIns="0" tIns="0" rIns="0" bIns="0" rtlCol="0" anchor="t"/>
-          <a:lstStyle/>
-          <a:p>
-            <a:pPr indent="0" marL="0">
-              <a:buNone/>
-            </a:pPr>
-            <a:r>
-              <a:rPr lang="en-US" sz="1500" dirty="0">
-                <a:solidFill>
-                  <a:srgbClr val="E5E9F0"/>
-                </a:solidFill>
-                <a:latin typeface="Courier New" pitchFamily="34" charset="0"/>
-                <a:ea typeface="Courier New" pitchFamily="34" charset="-122"/>
-                <a:cs typeface="Courier New" pitchFamily="34" charset="-120"/>
-              </a:rPr>
-              <a:t>        this.chatClient = builder.build();</a:t>
-            </a:r>
-            <a:endParaRPr lang="en-US" sz="1500" dirty="0"/>
-          </a:p>
-        </p:txBody>
-      </p:sp>
-      <p:sp>
-        <p:nvSpPr>
-          <p:cNvPr id="31" name="Text 29"/>
-          <p:cNvSpPr/>
-          <p:nvPr/>
-        </p:nvSpPr>
-        <p:spPr>
-          <a:xfrm>
-            <a:off x="960120" y="3337560"/>
-            <a:ext cx="10332720" cy="274320"/>
-          </a:xfrm>
-          <a:prstGeom prst="rect">
-            <a:avLst/>
-          </a:prstGeom>
-          <a:noFill/>
-          <a:ln/>
-        </p:spPr>
-        <p:txBody>
-          <a:bodyPr wrap="square" lIns="0" tIns="0" rIns="0" bIns="0" rtlCol="0" anchor="t"/>
-          <a:lstStyle/>
-          <a:p>
-            <a:pPr indent="0" marL="0">
-              <a:buNone/>
-            </a:pPr>
-            <a:r>
-              <a:rPr lang="en-US" sz="1500" dirty="0">
-                <a:solidFill>
-                  <a:srgbClr val="E5E9F0"/>
-                </a:solidFill>
-                <a:latin typeface="Courier New" pitchFamily="34" charset="0"/>
-                <a:ea typeface="Courier New" pitchFamily="34" charset="-122"/>
-                <a:cs typeface="Courier New" pitchFamily="34" charset="-120"/>
-              </a:rPr>
-              <a:t>    }</a:t>
-            </a:r>
-            <a:endParaRPr lang="en-US" sz="1500" dirty="0"/>
-          </a:p>
-        </p:txBody>
-      </p:sp>
-      <p:sp>
-        <p:nvSpPr>
-          <p:cNvPr id="32" name="Text 30"/>
-          <p:cNvSpPr/>
-          <p:nvPr/>
-        </p:nvSpPr>
-        <p:spPr>
-          <a:xfrm>
-            <a:off x="960120" y="3611880"/>
-            <a:ext cx="10332720" cy="274320"/>
-          </a:xfrm>
-          <a:prstGeom prst="rect">
-            <a:avLst/>
-          </a:prstGeom>
-          <a:noFill/>
-          <a:ln/>
-        </p:spPr>
-        <p:txBody>
-          <a:bodyPr wrap="square" lIns="0" tIns="0" rIns="0" bIns="0" rtlCol="0" anchor="t"/>
-          <a:lstStyle/>
-          <a:p>
-            <a:pPr indent="0" marL="0">
-              <a:buNone/>
-            </a:pPr>
-            <a:r>
-              <a:rPr lang="en-US" sz="1500" dirty="0">
-                <a:solidFill>
-                  <a:srgbClr val="F2A93B"/>
-                </a:solidFill>
-                <a:latin typeface="Courier New" pitchFamily="34" charset="0"/>
-                <a:ea typeface="Courier New" pitchFamily="34" charset="-122"/>
-                <a:cs typeface="Courier New" pitchFamily="34" charset="-120"/>
-              </a:rPr>
-              <a:t>    @PostMapping</a:t>
-            </a:r>
-            <a:pPr indent="0" marL="0">
-              <a:buNone/>
-            </a:pPr>
-            <a:r>
-              <a:rPr lang="en-US" sz="1500" dirty="0">
-                <a:solidFill>
-                  <a:srgbClr val="5FE0C5"/>
-                </a:solidFill>
-                <a:latin typeface="Courier New" pitchFamily="34" charset="0"/>
-                <a:ea typeface="Courier New" pitchFamily="34" charset="-122"/>
-                <a:cs typeface="Courier New" pitchFamily="34" charset="-120"/>
-              </a:rPr>
-              <a:t>("/ask")</a:t>
-            </a:r>
-            <a:endParaRPr lang="en-US" sz="1500" dirty="0"/>
-          </a:p>
-        </p:txBody>
-      </p:sp>
-      <p:sp>
-        <p:nvSpPr>
-          <p:cNvPr id="33" name="Text 31"/>
-          <p:cNvSpPr/>
-          <p:nvPr/>
-        </p:nvSpPr>
-        <p:spPr>
-          <a:xfrm>
-            <a:off x="960120" y="3886200"/>
-            <a:ext cx="10332720" cy="274320"/>
-          </a:xfrm>
-          <a:prstGeom prst="rect">
-            <a:avLst/>
-          </a:prstGeom>
-          <a:noFill/>
-          <a:ln/>
-        </p:spPr>
-        <p:txBody>
-          <a:bodyPr wrap="square" lIns="0" tIns="0" rIns="0" bIns="0" rtlCol="0" anchor="t"/>
-          <a:lstStyle/>
-          <a:p>
-            <a:pPr indent="0" marL="0">
-              <a:buNone/>
-            </a:pPr>
-            <a:r>
-              <a:rPr lang="en-US" sz="1500" dirty="0">
-                <a:solidFill>
-                  <a:srgbClr val="F2A93B"/>
-                </a:solidFill>
-                <a:latin typeface="Courier New" pitchFamily="34" charset="0"/>
-                <a:ea typeface="Courier New" pitchFamily="34" charset="-122"/>
-                <a:cs typeface="Courier New" pitchFamily="34" charset="-120"/>
-              </a:rPr>
-              <a:t>    public </a:t>
-            </a:r>
-            <a:pPr indent="0" marL="0">
-              <a:buNone/>
-            </a:pPr>
-            <a:r>
-              <a:rPr lang="en-US" sz="1500" dirty="0">
-                <a:solidFill>
-                  <a:srgbClr val="5FE0C5"/>
-                </a:solidFill>
-                <a:latin typeface="Courier New" pitchFamily="34" charset="0"/>
-                <a:ea typeface="Courier New" pitchFamily="34" charset="-122"/>
-                <a:cs typeface="Courier New" pitchFamily="34" charset="-120"/>
-              </a:rPr>
-              <a:t>HrResponse</a:t>
-            </a:r>
-            <a:pPr indent="0" marL="0">
-              <a:buNone/>
-            </a:pPr>
-            <a:r>
-              <a:rPr lang="en-US" sz="1500" dirty="0">
-                <a:solidFill>
-                  <a:srgbClr val="E5E9F0"/>
-                </a:solidFill>
-                <a:latin typeface="Courier New" pitchFamily="34" charset="0"/>
-                <a:ea typeface="Courier New" pitchFamily="34" charset="-122"/>
-                <a:cs typeface="Courier New" pitchFamily="34" charset="-120"/>
-              </a:rPr>
-              <a:t> ask(@RequestBody HrRequest request) {</a:t>
-            </a:r>
-            <a:endParaRPr lang="en-US" sz="1500" dirty="0"/>
-          </a:p>
-        </p:txBody>
-      </p:sp>
-      <p:sp>
-        <p:nvSpPr>
-          <p:cNvPr id="34" name="Text 32"/>
-          <p:cNvSpPr/>
-          <p:nvPr/>
-        </p:nvSpPr>
-        <p:spPr>
-          <a:xfrm>
-            <a:off x="960120" y="4160520"/>
-            <a:ext cx="10332720" cy="274320"/>
-          </a:xfrm>
-          <a:prstGeom prst="rect">
-            <a:avLst/>
-          </a:prstGeom>
-          <a:noFill/>
-          <a:ln/>
-        </p:spPr>
-        <p:txBody>
-          <a:bodyPr wrap="square" lIns="0" tIns="0" rIns="0" bIns="0" rtlCol="0" anchor="t"/>
-          <a:lstStyle/>
-          <a:p>
-            <a:pPr indent="0" marL="0">
-              <a:buNone/>
-            </a:pPr>
-            <a:r>
-              <a:rPr lang="en-US" sz="1500" dirty="0">
-                <a:solidFill>
-                  <a:srgbClr val="E5E9F0"/>
-                </a:solidFill>
-                <a:latin typeface="Courier New" pitchFamily="34" charset="0"/>
-                <a:ea typeface="Courier New" pitchFamily="34" charset="-122"/>
-                <a:cs typeface="Courier New" pitchFamily="34" charset="-120"/>
-              </a:rPr>
-              <a:t>        String answer = chatClient.prompt()</a:t>
-            </a:r>
-            <a:endParaRPr lang="en-US" sz="1500" dirty="0"/>
-          </a:p>
-        </p:txBody>
-      </p:sp>
-      <p:sp>
-        <p:nvSpPr>
-          <p:cNvPr id="35" name="Text 33"/>
-          <p:cNvSpPr/>
-          <p:nvPr/>
-        </p:nvSpPr>
-        <p:spPr>
-          <a:xfrm>
-            <a:off x="960120" y="4434840"/>
-            <a:ext cx="10332720" cy="274320"/>
-          </a:xfrm>
-          <a:prstGeom prst="rect">
-            <a:avLst/>
-          </a:prstGeom>
-          <a:noFill/>
-          <a:ln/>
-        </p:spPr>
-        <p:txBody>
-          <a:bodyPr wrap="square" lIns="0" tIns="0" rIns="0" bIns="0" rtlCol="0" anchor="t"/>
-          <a:lstStyle/>
-          <a:p>
-            <a:pPr indent="0" marL="0">
-              <a:buNone/>
-            </a:pPr>
-            <a:r>
-              <a:rPr lang="en-US" sz="1500" dirty="0">
-                <a:solidFill>
-                  <a:srgbClr val="E5E9F0"/>
-                </a:solidFill>
-                <a:latin typeface="Courier New" pitchFamily="34" charset="0"/>
-                <a:ea typeface="Courier New" pitchFamily="34" charset="-122"/>
-                <a:cs typeface="Courier New" pitchFamily="34" charset="-120"/>
-              </a:rPr>
-              <a:t>                .user(request.question())</a:t>
-            </a:r>
-            <a:endParaRPr lang="en-US" sz="1500" dirty="0"/>
-          </a:p>
-        </p:txBody>
-      </p:sp>
-      <p:sp>
-        <p:nvSpPr>
-          <p:cNvPr id="36" name="Text 34"/>
-          <p:cNvSpPr/>
-          <p:nvPr/>
-        </p:nvSpPr>
-        <p:spPr>
-          <a:xfrm>
-            <a:off x="960120" y="4709160"/>
-            <a:ext cx="10332720" cy="274320"/>
-          </a:xfrm>
-          <a:prstGeom prst="rect">
-            <a:avLst/>
-          </a:prstGeom>
-          <a:noFill/>
-          <a:ln/>
-        </p:spPr>
-        <p:txBody>
-          <a:bodyPr wrap="square" lIns="0" tIns="0" rIns="0" bIns="0" rtlCol="0" anchor="t"/>
-          <a:lstStyle/>
-          <a:p>
-            <a:pPr indent="0" marL="0">
-              <a:buNone/>
-            </a:pPr>
-            <a:r>
-              <a:rPr lang="en-US" sz="1500" dirty="0">
-                <a:solidFill>
-                  <a:srgbClr val="E5E9F0"/>
-                </a:solidFill>
-                <a:latin typeface="Courier New" pitchFamily="34" charset="0"/>
-                <a:ea typeface="Courier New" pitchFamily="34" charset="-122"/>
-                <a:cs typeface="Courier New" pitchFamily="34" charset="-120"/>
-              </a:rPr>
-              <a:t>                .call()</a:t>
-            </a:r>
-            <a:endParaRPr lang="en-US" sz="1500" dirty="0"/>
+              <a:t>completion</a:t>
+            </a:r>
+            <a:endParaRPr lang="en-US" sz="1260" dirty="0"/>
           </a:p>
         </p:txBody>
       </p:sp>
@@ -6685,34 +7570,34 @@
         </p:nvSpPr>
         <p:spPr>
           <a:xfrm>
-            <a:off x="960120" y="4983480"/>
-            <a:ext cx="10332720" cy="274320"/>
-          </a:xfrm>
-          <a:prstGeom prst="rect">
-            <a:avLst/>
-          </a:prstGeom>
-          <a:noFill/>
-          <a:ln/>
-        </p:spPr>
-        <p:txBody>
-          <a:bodyPr wrap="square" lIns="0" tIns="0" rIns="0" bIns="0" rtlCol="0" anchor="t"/>
-          <a:lstStyle/>
-          <a:p>
-            <a:pPr indent="0" marL="0">
-              <a:buNone/>
-            </a:pPr>
-            <a:r>
-              <a:rPr lang="en-US" sz="1500" dirty="0">
-                <a:solidFill>
-                  <a:srgbClr val="E5E9F0"/>
-                </a:solidFill>
-                <a:latin typeface="Courier New" pitchFamily="34" charset="0"/>
-                <a:ea typeface="Courier New" pitchFamily="34" charset="-122"/>
-                <a:cs typeface="Courier New" pitchFamily="34" charset="-120"/>
-              </a:rPr>
-              <a:t>                .content();</a:t>
-            </a:r>
-            <a:endParaRPr lang="en-US" sz="1500" dirty="0"/>
+            <a:off x="3977640" y="3977640"/>
+            <a:ext cx="2743200" cy="274320"/>
+          </a:xfrm>
+          <a:prstGeom prst="rect">
+            <a:avLst/>
+          </a:prstGeom>
+          <a:noFill/>
+          <a:ln/>
+        </p:spPr>
+        <p:txBody>
+          <a:bodyPr wrap="square" lIns="0" tIns="0" rIns="0" bIns="0" rtlCol="0" anchor="ctr"/>
+          <a:lstStyle/>
+          <a:p>
+            <a:pPr algn="ctr" indent="0" marL="0">
+              <a:buNone/>
+            </a:pPr>
+            <a:r>
+              <a:rPr lang="en-US" sz="1320" dirty="0">
+                <a:solidFill>
+                  <a:srgbClr val="5B6478"/>
+                </a:solidFill>
+                <a:latin typeface="Courier New" pitchFamily="34" charset="0"/>
+                <a:ea typeface="Courier New" pitchFamily="34" charset="-122"/>
+                <a:cs typeface="Courier New" pitchFamily="34" charset="-120"/>
+              </a:rPr>
+              <a:t>localhost:8080</a:t>
+            </a:r>
+            <a:endParaRPr lang="en-US" sz="1320" dirty="0"/>
           </a:p>
         </p:txBody>
       </p:sp>
@@ -6724,140 +7609,34 @@
         </p:nvSpPr>
         <p:spPr>
           <a:xfrm>
-            <a:off x="960120" y="5257800"/>
-            <a:ext cx="10332720" cy="274320"/>
-          </a:xfrm>
-          <a:prstGeom prst="rect">
-            <a:avLst/>
-          </a:prstGeom>
-          <a:noFill/>
-          <a:ln/>
-        </p:spPr>
-        <p:txBody>
-          <a:bodyPr wrap="square" lIns="0" tIns="0" rIns="0" bIns="0" rtlCol="0" anchor="t"/>
-          <a:lstStyle/>
-          <a:p>
-            <a:pPr indent="0" marL="0">
-              <a:buNone/>
-            </a:pPr>
-            <a:r>
-              <a:rPr lang="en-US" sz="1500" dirty="0">
-                <a:solidFill>
-                  <a:srgbClr val="F2A93B"/>
-                </a:solidFill>
-                <a:latin typeface="Courier New" pitchFamily="34" charset="0"/>
-                <a:ea typeface="Courier New" pitchFamily="34" charset="-122"/>
-                <a:cs typeface="Courier New" pitchFamily="34" charset="-120"/>
-              </a:rPr>
-              <a:t>        return new </a:t>
-            </a:r>
-            <a:pPr indent="0" marL="0">
-              <a:buNone/>
-            </a:pPr>
-            <a:r>
-              <a:rPr lang="en-US" sz="1500" dirty="0">
-                <a:solidFill>
-                  <a:srgbClr val="5FE0C5"/>
-                </a:solidFill>
-                <a:latin typeface="Courier New" pitchFamily="34" charset="0"/>
-                <a:ea typeface="Courier New" pitchFamily="34" charset="-122"/>
-                <a:cs typeface="Courier New" pitchFamily="34" charset="-120"/>
-              </a:rPr>
-              <a:t>HrResponse</a:t>
-            </a:r>
-            <a:pPr indent="0" marL="0">
-              <a:buNone/>
-            </a:pPr>
-            <a:r>
-              <a:rPr lang="en-US" sz="1500" dirty="0">
-                <a:solidFill>
-                  <a:srgbClr val="E5E9F0"/>
-                </a:solidFill>
-                <a:latin typeface="Courier New" pitchFamily="34" charset="0"/>
-                <a:ea typeface="Courier New" pitchFamily="34" charset="-122"/>
-                <a:cs typeface="Courier New" pitchFamily="34" charset="-120"/>
-              </a:rPr>
-              <a:t>(request.question(), answer);</a:t>
-            </a:r>
-            <a:endParaRPr lang="en-US" sz="1500" dirty="0"/>
-          </a:p>
-        </p:txBody>
-      </p:sp>
-      <p:sp>
-        <p:nvSpPr>
-          <p:cNvPr id="39" name="Text 37"/>
-          <p:cNvSpPr/>
-          <p:nvPr/>
-        </p:nvSpPr>
-        <p:spPr>
-          <a:xfrm>
-            <a:off x="960120" y="5532120"/>
-            <a:ext cx="10332720" cy="274320"/>
-          </a:xfrm>
-          <a:prstGeom prst="rect">
-            <a:avLst/>
-          </a:prstGeom>
-          <a:noFill/>
-          <a:ln/>
-        </p:spPr>
-        <p:txBody>
-          <a:bodyPr wrap="square" lIns="0" tIns="0" rIns="0" bIns="0" rtlCol="0" anchor="t"/>
-          <a:lstStyle/>
-          <a:p>
-            <a:pPr indent="0" marL="0">
-              <a:buNone/>
-            </a:pPr>
-            <a:r>
-              <a:rPr lang="en-US" sz="1500" dirty="0">
-                <a:solidFill>
-                  <a:srgbClr val="E5E9F0"/>
-                </a:solidFill>
-                <a:latin typeface="Courier New" pitchFamily="34" charset="0"/>
-                <a:ea typeface="Courier New" pitchFamily="34" charset="-122"/>
-                <a:cs typeface="Courier New" pitchFamily="34" charset="-120"/>
-              </a:rPr>
-              <a:t>    }</a:t>
-            </a:r>
-            <a:endParaRPr lang="en-US" sz="1500" dirty="0"/>
-          </a:p>
-        </p:txBody>
-      </p:sp>
-      <p:sp>
-        <p:nvSpPr>
-          <p:cNvPr id="40" name="Text 38"/>
-          <p:cNvSpPr/>
-          <p:nvPr/>
-        </p:nvSpPr>
-        <p:spPr>
-          <a:xfrm>
-            <a:off x="960120" y="5806440"/>
-            <a:ext cx="10332720" cy="274320"/>
-          </a:xfrm>
-          <a:prstGeom prst="rect">
-            <a:avLst/>
-          </a:prstGeom>
-          <a:noFill/>
-          <a:ln/>
-        </p:spPr>
-        <p:txBody>
-          <a:bodyPr wrap="square" lIns="0" tIns="0" rIns="0" bIns="0" rtlCol="0" anchor="t"/>
-          <a:lstStyle/>
-          <a:p>
-            <a:pPr indent="0" marL="0">
-              <a:buNone/>
-            </a:pPr>
-            <a:r>
-              <a:rPr lang="en-US" sz="1500" dirty="0">
-                <a:solidFill>
-                  <a:srgbClr val="E5E9F0"/>
-                </a:solidFill>
-                <a:latin typeface="Courier New" pitchFamily="34" charset="0"/>
-                <a:ea typeface="Courier New" pitchFamily="34" charset="-122"/>
-                <a:cs typeface="Courier New" pitchFamily="34" charset="-120"/>
-              </a:rPr>
-              <a:t>}</a:t>
-            </a:r>
-            <a:endParaRPr lang="en-US" sz="1500" dirty="0"/>
+            <a:off x="7726680" y="3977640"/>
+            <a:ext cx="2743200" cy="274320"/>
+          </a:xfrm>
+          <a:prstGeom prst="rect">
+            <a:avLst/>
+          </a:prstGeom>
+          <a:noFill/>
+          <a:ln/>
+        </p:spPr>
+        <p:txBody>
+          <a:bodyPr wrap="square" lIns="0" tIns="0" rIns="0" bIns="0" rtlCol="0" anchor="ctr"/>
+          <a:lstStyle/>
+          <a:p>
+            <a:pPr algn="ctr" indent="0" marL="0">
+              <a:buNone/>
+            </a:pPr>
+            <a:r>
+              <a:rPr lang="en-US" sz="1320" dirty="0">
+                <a:solidFill>
+                  <a:srgbClr val="5B6478"/>
+                </a:solidFill>
+                <a:latin typeface="Courier New" pitchFamily="34" charset="0"/>
+                <a:ea typeface="Courier New" pitchFamily="34" charset="-122"/>
+                <a:cs typeface="Courier New" pitchFamily="34" charset="-120"/>
+              </a:rPr>
+              <a:t>localhost:11434</a:t>
+            </a:r>
+            <a:endParaRPr lang="en-US" sz="1320" dirty="0"/>
           </a:p>
         </p:txBody>
       </p:sp>
@@ -7291,7 +8070,7 @@
                 <a:ea typeface="Courier New" pitchFamily="34" charset="-122"/>
                 <a:cs typeface="Courier New" pitchFamily="34" charset="-120"/>
               </a:rPr>
-              <a:t>6 / 9</a:t>
+              <a:t>6 / 10</a:t>
             </a:r>
             <a:endParaRPr lang="en-US" sz="1080" dirty="0"/>
           </a:p>
@@ -7369,7 +8148,7 @@
                 <a:ea typeface="Courier New" pitchFamily="34" charset="-122"/>
                 <a:cs typeface="Courier New" pitchFamily="34" charset="-120"/>
               </a:rPr>
-              <a:t>Pointing Spring AI at Ollama</a:t>
+              <a:t>The Controller</a:t>
             </a:r>
             <a:endParaRPr lang="en-US" sz="3360" dirty="0"/>
           </a:p>
@@ -7383,12 +8162,12 @@
         </p:nvSpPr>
         <p:spPr>
           <a:xfrm>
-            <a:off x="1737360" y="1645920"/>
-            <a:ext cx="8686800" cy="4023360"/>
+            <a:off x="640080" y="1234440"/>
+            <a:ext cx="10881360" cy="5029200"/>
           </a:xfrm>
           <a:prstGeom prst="roundRect">
             <a:avLst>
-              <a:gd name="adj" fmla="val 1818"/>
+              <a:gd name="adj" fmla="val 1455"/>
             </a:avLst>
           </a:prstGeom>
           <a:solidFill>
@@ -7417,7 +8196,7 @@
         </p:nvSpPr>
         <p:spPr>
           <a:xfrm>
-            <a:off x="1938528" y="1810512"/>
+            <a:off x="841248" y="1399032"/>
             <a:ext cx="91440" cy="91440"/>
           </a:xfrm>
           <a:prstGeom prst="ellipse">
@@ -7437,7 +8216,7 @@
         </p:nvSpPr>
         <p:spPr>
           <a:xfrm>
-            <a:off x="2139696" y="1810512"/>
+            <a:off x="1042416" y="1399032"/>
             <a:ext cx="91440" cy="91440"/>
           </a:xfrm>
           <a:prstGeom prst="ellipse">
@@ -7457,7 +8236,7 @@
         </p:nvSpPr>
         <p:spPr>
           <a:xfrm>
-            <a:off x="2340864" y="1810512"/>
+            <a:off x="1243584" y="1399032"/>
             <a:ext cx="91440" cy="91440"/>
           </a:xfrm>
           <a:prstGeom prst="ellipse">
@@ -7477,7 +8256,7 @@
         </p:nvSpPr>
         <p:spPr>
           <a:xfrm>
-            <a:off x="8412480" y="1737360"/>
+            <a:off x="9509760" y="1325880"/>
             <a:ext cx="1828800" cy="274320"/>
           </a:xfrm>
           <a:prstGeom prst="rect">
@@ -7502,7 +8281,7 @@
                 <a:ea typeface="Courier New" pitchFamily="34" charset="-122"/>
                 <a:cs typeface="Courier New" pitchFamily="34" charset="-120"/>
               </a:rPr>
-              <a:t>application.yml</a:t>
+              <a:t>HrController.java</a:t>
             </a:r>
             <a:endParaRPr lang="en-US" sz="1200" dirty="0"/>
           </a:p>
@@ -7516,8 +8295,8 @@
         </p:nvSpPr>
         <p:spPr>
           <a:xfrm>
-            <a:off x="2057400" y="2148840"/>
-            <a:ext cx="8138160" cy="374904"/>
+            <a:off x="960120" y="1691640"/>
+            <a:ext cx="10332720" cy="274320"/>
           </a:xfrm>
           <a:prstGeom prst="rect">
             <a:avLst/>
@@ -7533,7 +8312,7 @@
               <a:buNone/>
             </a:pPr>
             <a:r>
-              <a:rPr lang="en-US" sz="1800" dirty="0">
+              <a:rPr lang="en-US" sz="1500" dirty="0">
                 <a:solidFill>
                   <a:srgbClr val="F2A93B"/>
                 </a:solidFill>
@@ -7541,9 +8320,9 @@
                 <a:ea typeface="Courier New" pitchFamily="34" charset="-122"/>
                 <a:cs typeface="Courier New" pitchFamily="34" charset="-120"/>
               </a:rPr>
-              <a:t>spring:</a:t>
-            </a:r>
-            <a:endParaRPr lang="en-US" sz="1800" dirty="0"/>
+              <a:t>@RestController</a:t>
+            </a:r>
+            <a:endParaRPr lang="en-US" sz="1500" dirty="0"/>
           </a:p>
         </p:txBody>
       </p:sp>
@@ -7555,8 +8334,8 @@
         </p:nvSpPr>
         <p:spPr>
           <a:xfrm>
-            <a:off x="2057400" y="2523744"/>
-            <a:ext cx="8138160" cy="374904"/>
+            <a:off x="960120" y="1965960"/>
+            <a:ext cx="10332720" cy="274320"/>
           </a:xfrm>
           <a:prstGeom prst="rect">
             <a:avLst/>
@@ -7572,7 +8351,7 @@
               <a:buNone/>
             </a:pPr>
             <a:r>
-              <a:rPr lang="en-US" sz="1800" dirty="0">
+              <a:rPr lang="en-US" sz="1500" dirty="0">
                 <a:solidFill>
                   <a:srgbClr val="F2A93B"/>
                 </a:solidFill>
@@ -7580,9 +8359,23 @@
                 <a:ea typeface="Courier New" pitchFamily="34" charset="-122"/>
                 <a:cs typeface="Courier New" pitchFamily="34" charset="-120"/>
               </a:rPr>
-              <a:t>  ai:</a:t>
-            </a:r>
-            <a:endParaRPr lang="en-US" sz="1800" dirty="0"/>
+              <a:t>@RequestMapping</a:t>
+            </a:r>
+            <a:pPr indent="0" marL="0">
+              <a:buNone/>
+            </a:pPr>
+            <a:r>
+              <a:rPr lang="en-US" sz="1500" dirty="0">
+                <a:solidFill>
+                  <a:srgbClr val="5FE0C5"/>
+                </a:solidFill>
+                <a:latin typeface="Courier New" pitchFamily="34" charset="0"/>
+                <a:ea typeface="Courier New" pitchFamily="34" charset="-122"/>
+                <a:cs typeface="Courier New" pitchFamily="34" charset="-120"/>
+              </a:rPr>
+              <a:t>("/hr")</a:t>
+            </a:r>
+            <a:endParaRPr lang="en-US" sz="1500" dirty="0"/>
           </a:p>
         </p:txBody>
       </p:sp>
@@ -7594,8 +8387,8 @@
         </p:nvSpPr>
         <p:spPr>
           <a:xfrm>
-            <a:off x="2057400" y="2898648"/>
-            <a:ext cx="8138160" cy="374904"/>
+            <a:off x="960120" y="2240280"/>
+            <a:ext cx="10332720" cy="274320"/>
           </a:xfrm>
           <a:prstGeom prst="rect">
             <a:avLst/>
@@ -7611,7 +8404,7 @@
               <a:buNone/>
             </a:pPr>
             <a:r>
-              <a:rPr lang="en-US" sz="1800" dirty="0">
+              <a:rPr lang="en-US" sz="1500" dirty="0">
                 <a:solidFill>
                   <a:srgbClr val="F2A93B"/>
                 </a:solidFill>
@@ -7619,9 +8412,37 @@
                 <a:ea typeface="Courier New" pitchFamily="34" charset="-122"/>
                 <a:cs typeface="Courier New" pitchFamily="34" charset="-120"/>
               </a:rPr>
-              <a:t>    ollama:</a:t>
-            </a:r>
-            <a:endParaRPr lang="en-US" sz="1800" dirty="0"/>
+              <a:t>public class </a:t>
+            </a:r>
+            <a:pPr indent="0" marL="0">
+              <a:buNone/>
+            </a:pPr>
+            <a:r>
+              <a:rPr lang="en-US" sz="1500" dirty="0">
+                <a:solidFill>
+                  <a:srgbClr val="E5E9F0"/>
+                </a:solidFill>
+                <a:latin typeface="Courier New" pitchFamily="34" charset="0"/>
+                <a:ea typeface="Courier New" pitchFamily="34" charset="-122"/>
+                <a:cs typeface="Courier New" pitchFamily="34" charset="-120"/>
+              </a:rPr>
+              <a:t>HrController</a:t>
+            </a:r>
+            <a:pPr indent="0" marL="0">
+              <a:buNone/>
+            </a:pPr>
+            <a:r>
+              <a:rPr lang="en-US" sz="1500" dirty="0">
+                <a:solidFill>
+                  <a:srgbClr val="E5E9F0"/>
+                </a:solidFill>
+                <a:latin typeface="Courier New" pitchFamily="34" charset="0"/>
+                <a:ea typeface="Courier New" pitchFamily="34" charset="-122"/>
+                <a:cs typeface="Courier New" pitchFamily="34" charset="-120"/>
+              </a:rPr>
+              <a:t> {</a:t>
+            </a:r>
+            <a:endParaRPr lang="en-US" sz="1500" dirty="0"/>
           </a:p>
         </p:txBody>
       </p:sp>
@@ -7633,8 +8454,8 @@
         </p:nvSpPr>
         <p:spPr>
           <a:xfrm>
-            <a:off x="2057400" y="3273552"/>
-            <a:ext cx="8138160" cy="374904"/>
+            <a:off x="960120" y="2514600"/>
+            <a:ext cx="10332720" cy="274320"/>
           </a:xfrm>
           <a:prstGeom prst="rect">
             <a:avLst/>
@@ -7650,7 +8471,35 @@
               <a:buNone/>
             </a:pPr>
             <a:r>
-              <a:rPr lang="en-US" sz="1800" dirty="0">
+              <a:rPr lang="en-US" sz="1500" dirty="0">
+                <a:solidFill>
+                  <a:srgbClr val="F2A93B"/>
+                </a:solidFill>
+                <a:latin typeface="Courier New" pitchFamily="34" charset="0"/>
+                <a:ea typeface="Courier New" pitchFamily="34" charset="-122"/>
+                <a:cs typeface="Courier New" pitchFamily="34" charset="-120"/>
+              </a:rPr>
+              <a:t>    private final </a:t>
+            </a:r>
+            <a:pPr indent="0" marL="0">
+              <a:buNone/>
+            </a:pPr>
+            <a:r>
+              <a:rPr lang="en-US" sz="1500" dirty="0">
+                <a:solidFill>
+                  <a:srgbClr val="5FE0C5"/>
+                </a:solidFill>
+                <a:latin typeface="Courier New" pitchFamily="34" charset="0"/>
+                <a:ea typeface="Courier New" pitchFamily="34" charset="-122"/>
+                <a:cs typeface="Courier New" pitchFamily="34" charset="-120"/>
+              </a:rPr>
+              <a:t>ChatClient</a:t>
+            </a:r>
+            <a:pPr indent="0" marL="0">
+              <a:buNone/>
+            </a:pPr>
+            <a:r>
+              <a:rPr lang="en-US" sz="1500" dirty="0">
                 <a:solidFill>
                   <a:srgbClr val="E5E9F0"/>
                 </a:solidFill>
@@ -7658,13 +8507,197 @@
                 <a:ea typeface="Courier New" pitchFamily="34" charset="-122"/>
                 <a:cs typeface="Courier New" pitchFamily="34" charset="-120"/>
               </a:rPr>
-              <a:t>      base-url: </a:t>
-            </a:r>
+              <a:t> chatClient;</a:t>
+            </a:r>
+            <a:endParaRPr lang="en-US" sz="1500" dirty="0"/>
+          </a:p>
+        </p:txBody>
+      </p:sp>
+      <p:sp>
+        <p:nvSpPr>
+          <p:cNvPr id="29" name="Text 27"/>
+          <p:cNvSpPr/>
+          <p:nvPr/>
+        </p:nvSpPr>
+        <p:spPr>
+          <a:xfrm>
+            <a:off x="960120" y="2788920"/>
+            <a:ext cx="10332720" cy="274320"/>
+          </a:xfrm>
+          <a:prstGeom prst="rect">
+            <a:avLst/>
+          </a:prstGeom>
+          <a:noFill/>
+          <a:ln/>
+        </p:spPr>
+        <p:txBody>
+          <a:bodyPr wrap="square" lIns="0" tIns="0" rIns="0" bIns="0" rtlCol="0" anchor="t"/>
+          <a:lstStyle/>
+          <a:p>
             <a:pPr indent="0" marL="0">
               <a:buNone/>
             </a:pPr>
             <a:r>
-              <a:rPr lang="en-US" sz="1800" dirty="0">
+              <a:rPr lang="en-US" sz="1500" dirty="0">
+                <a:solidFill>
+                  <a:srgbClr val="F2A93B"/>
+                </a:solidFill>
+                <a:latin typeface="Courier New" pitchFamily="34" charset="0"/>
+                <a:ea typeface="Courier New" pitchFamily="34" charset="-122"/>
+                <a:cs typeface="Courier New" pitchFamily="34" charset="-120"/>
+              </a:rPr>
+              <a:t>    public </a:t>
+            </a:r>
+            <a:pPr indent="0" marL="0">
+              <a:buNone/>
+            </a:pPr>
+            <a:r>
+              <a:rPr lang="en-US" sz="1500" dirty="0">
+                <a:solidFill>
+                  <a:srgbClr val="E5E9F0"/>
+                </a:solidFill>
+                <a:latin typeface="Courier New" pitchFamily="34" charset="0"/>
+                <a:ea typeface="Courier New" pitchFamily="34" charset="-122"/>
+                <a:cs typeface="Courier New" pitchFamily="34" charset="-120"/>
+              </a:rPr>
+              <a:t>HrController</a:t>
+            </a:r>
+            <a:pPr indent="0" marL="0">
+              <a:buNone/>
+            </a:pPr>
+            <a:r>
+              <a:rPr lang="en-US" sz="1500" dirty="0">
+                <a:solidFill>
+                  <a:srgbClr val="E5E9F0"/>
+                </a:solidFill>
+                <a:latin typeface="Courier New" pitchFamily="34" charset="0"/>
+                <a:ea typeface="Courier New" pitchFamily="34" charset="-122"/>
+                <a:cs typeface="Courier New" pitchFamily="34" charset="-120"/>
+              </a:rPr>
+              <a:t>(ChatClient.Builder builder) {</a:t>
+            </a:r>
+            <a:endParaRPr lang="en-US" sz="1500" dirty="0"/>
+          </a:p>
+        </p:txBody>
+      </p:sp>
+      <p:sp>
+        <p:nvSpPr>
+          <p:cNvPr id="30" name="Text 28"/>
+          <p:cNvSpPr/>
+          <p:nvPr/>
+        </p:nvSpPr>
+        <p:spPr>
+          <a:xfrm>
+            <a:off x="960120" y="3063240"/>
+            <a:ext cx="10332720" cy="274320"/>
+          </a:xfrm>
+          <a:prstGeom prst="rect">
+            <a:avLst/>
+          </a:prstGeom>
+          <a:noFill/>
+          <a:ln/>
+        </p:spPr>
+        <p:txBody>
+          <a:bodyPr wrap="square" lIns="0" tIns="0" rIns="0" bIns="0" rtlCol="0" anchor="t"/>
+          <a:lstStyle/>
+          <a:p>
+            <a:pPr indent="0" marL="0">
+              <a:buNone/>
+            </a:pPr>
+            <a:r>
+              <a:rPr lang="en-US" sz="1500" dirty="0">
+                <a:solidFill>
+                  <a:srgbClr val="E5E9F0"/>
+                </a:solidFill>
+                <a:latin typeface="Courier New" pitchFamily="34" charset="0"/>
+                <a:ea typeface="Courier New" pitchFamily="34" charset="-122"/>
+                <a:cs typeface="Courier New" pitchFamily="34" charset="-120"/>
+              </a:rPr>
+              <a:t>        this.chatClient = builder.build();</a:t>
+            </a:r>
+            <a:endParaRPr lang="en-US" sz="1500" dirty="0"/>
+          </a:p>
+        </p:txBody>
+      </p:sp>
+      <p:sp>
+        <p:nvSpPr>
+          <p:cNvPr id="31" name="Text 29"/>
+          <p:cNvSpPr/>
+          <p:nvPr/>
+        </p:nvSpPr>
+        <p:spPr>
+          <a:xfrm>
+            <a:off x="960120" y="3337560"/>
+            <a:ext cx="10332720" cy="274320"/>
+          </a:xfrm>
+          <a:prstGeom prst="rect">
+            <a:avLst/>
+          </a:prstGeom>
+          <a:noFill/>
+          <a:ln/>
+        </p:spPr>
+        <p:txBody>
+          <a:bodyPr wrap="square" lIns="0" tIns="0" rIns="0" bIns="0" rtlCol="0" anchor="t"/>
+          <a:lstStyle/>
+          <a:p>
+            <a:pPr indent="0" marL="0">
+              <a:buNone/>
+            </a:pPr>
+            <a:r>
+              <a:rPr lang="en-US" sz="1500" dirty="0">
+                <a:solidFill>
+                  <a:srgbClr val="E5E9F0"/>
+                </a:solidFill>
+                <a:latin typeface="Courier New" pitchFamily="34" charset="0"/>
+                <a:ea typeface="Courier New" pitchFamily="34" charset="-122"/>
+                <a:cs typeface="Courier New" pitchFamily="34" charset="-120"/>
+              </a:rPr>
+              <a:t>    }</a:t>
+            </a:r>
+            <a:endParaRPr lang="en-US" sz="1500" dirty="0"/>
+          </a:p>
+        </p:txBody>
+      </p:sp>
+      <p:sp>
+        <p:nvSpPr>
+          <p:cNvPr id="32" name="Text 30"/>
+          <p:cNvSpPr/>
+          <p:nvPr/>
+        </p:nvSpPr>
+        <p:spPr>
+          <a:xfrm>
+            <a:off x="960120" y="3611880"/>
+            <a:ext cx="10332720" cy="274320"/>
+          </a:xfrm>
+          <a:prstGeom prst="rect">
+            <a:avLst/>
+          </a:prstGeom>
+          <a:noFill/>
+          <a:ln/>
+        </p:spPr>
+        <p:txBody>
+          <a:bodyPr wrap="square" lIns="0" tIns="0" rIns="0" bIns="0" rtlCol="0" anchor="t"/>
+          <a:lstStyle/>
+          <a:p>
+            <a:pPr indent="0" marL="0">
+              <a:buNone/>
+            </a:pPr>
+            <a:r>
+              <a:rPr lang="en-US" sz="1500" dirty="0">
+                <a:solidFill>
+                  <a:srgbClr val="F2A93B"/>
+                </a:solidFill>
+                <a:latin typeface="Courier New" pitchFamily="34" charset="0"/>
+                <a:ea typeface="Courier New" pitchFamily="34" charset="-122"/>
+                <a:cs typeface="Courier New" pitchFamily="34" charset="-120"/>
+              </a:rPr>
+              <a:t>    @PostMapping</a:t>
+            </a:r>
+            <a:pPr indent="0" marL="0">
+              <a:buNone/>
+            </a:pPr>
+            <a:r>
+              <a:rPr lang="en-US" sz="1500" dirty="0">
                 <a:solidFill>
                   <a:srgbClr val="5FE0C5"/>
                 </a:solidFill>
@@ -7672,22 +8705,22 @@
                 <a:ea typeface="Courier New" pitchFamily="34" charset="-122"/>
                 <a:cs typeface="Courier New" pitchFamily="34" charset="-120"/>
               </a:rPr>
-              <a:t>http://localhost:11434</a:t>
-            </a:r>
-            <a:endParaRPr lang="en-US" sz="1800" dirty="0"/>
-          </a:p>
-        </p:txBody>
-      </p:sp>
-      <p:sp>
-        <p:nvSpPr>
-          <p:cNvPr id="29" name="Text 27"/>
-          <p:cNvSpPr/>
-          <p:nvPr/>
-        </p:nvSpPr>
-        <p:spPr>
-          <a:xfrm>
-            <a:off x="2057400" y="3648456"/>
-            <a:ext cx="8138160" cy="374904"/>
+              <a:t>("/ask")</a:t>
+            </a:r>
+            <a:endParaRPr lang="en-US" sz="1500" dirty="0"/>
+          </a:p>
+        </p:txBody>
+      </p:sp>
+      <p:sp>
+        <p:nvSpPr>
+          <p:cNvPr id="33" name="Text 31"/>
+          <p:cNvSpPr/>
+          <p:nvPr/>
+        </p:nvSpPr>
+        <p:spPr>
+          <a:xfrm>
+            <a:off x="960120" y="3886200"/>
+            <a:ext cx="10332720" cy="274320"/>
           </a:xfrm>
           <a:prstGeom prst="rect">
             <a:avLst/>
@@ -7703,7 +8736,7 @@
               <a:buNone/>
             </a:pPr>
             <a:r>
-              <a:rPr lang="en-US" sz="1800" dirty="0">
+              <a:rPr lang="en-US" sz="1500" dirty="0">
                 <a:solidFill>
                   <a:srgbClr val="F2A93B"/>
                 </a:solidFill>
@@ -7711,22 +8744,50 @@
                 <a:ea typeface="Courier New" pitchFamily="34" charset="-122"/>
                 <a:cs typeface="Courier New" pitchFamily="34" charset="-120"/>
               </a:rPr>
-              <a:t>      chat:</a:t>
-            </a:r>
-            <a:endParaRPr lang="en-US" sz="1800" dirty="0"/>
-          </a:p>
-        </p:txBody>
-      </p:sp>
-      <p:sp>
-        <p:nvSpPr>
-          <p:cNvPr id="30" name="Text 28"/>
-          <p:cNvSpPr/>
-          <p:nvPr/>
-        </p:nvSpPr>
-        <p:spPr>
-          <a:xfrm>
-            <a:off x="2057400" y="4023360"/>
-            <a:ext cx="8138160" cy="374904"/>
+              <a:t>    public </a:t>
+            </a:r>
+            <a:pPr indent="0" marL="0">
+              <a:buNone/>
+            </a:pPr>
+            <a:r>
+              <a:rPr lang="en-US" sz="1500" dirty="0">
+                <a:solidFill>
+                  <a:srgbClr val="5FE0C5"/>
+                </a:solidFill>
+                <a:latin typeface="Courier New" pitchFamily="34" charset="0"/>
+                <a:ea typeface="Courier New" pitchFamily="34" charset="-122"/>
+                <a:cs typeface="Courier New" pitchFamily="34" charset="-120"/>
+              </a:rPr>
+              <a:t>HrResponse</a:t>
+            </a:r>
+            <a:pPr indent="0" marL="0">
+              <a:buNone/>
+            </a:pPr>
+            <a:r>
+              <a:rPr lang="en-US" sz="1500" dirty="0">
+                <a:solidFill>
+                  <a:srgbClr val="E5E9F0"/>
+                </a:solidFill>
+                <a:latin typeface="Courier New" pitchFamily="34" charset="0"/>
+                <a:ea typeface="Courier New" pitchFamily="34" charset="-122"/>
+                <a:cs typeface="Courier New" pitchFamily="34" charset="-120"/>
+              </a:rPr>
+              <a:t> ask(@RequestBody HrRequest request) {</a:t>
+            </a:r>
+            <a:endParaRPr lang="en-US" sz="1500" dirty="0"/>
+          </a:p>
+        </p:txBody>
+      </p:sp>
+      <p:sp>
+        <p:nvSpPr>
+          <p:cNvPr id="34" name="Text 32"/>
+          <p:cNvSpPr/>
+          <p:nvPr/>
+        </p:nvSpPr>
+        <p:spPr>
+          <a:xfrm>
+            <a:off x="960120" y="4160520"/>
+            <a:ext cx="10332720" cy="274320"/>
           </a:xfrm>
           <a:prstGeom prst="rect">
             <a:avLst/>
@@ -7742,7 +8803,163 @@
               <a:buNone/>
             </a:pPr>
             <a:r>
-              <a:rPr lang="en-US" sz="1800" dirty="0">
+              <a:rPr lang="en-US" sz="1500" dirty="0">
+                <a:solidFill>
+                  <a:srgbClr val="E5E9F0"/>
+                </a:solidFill>
+                <a:latin typeface="Courier New" pitchFamily="34" charset="0"/>
+                <a:ea typeface="Courier New" pitchFamily="34" charset="-122"/>
+                <a:cs typeface="Courier New" pitchFamily="34" charset="-120"/>
+              </a:rPr>
+              <a:t>        String answer = chatClient.prompt()</a:t>
+            </a:r>
+            <a:endParaRPr lang="en-US" sz="1500" dirty="0"/>
+          </a:p>
+        </p:txBody>
+      </p:sp>
+      <p:sp>
+        <p:nvSpPr>
+          <p:cNvPr id="35" name="Text 33"/>
+          <p:cNvSpPr/>
+          <p:nvPr/>
+        </p:nvSpPr>
+        <p:spPr>
+          <a:xfrm>
+            <a:off x="960120" y="4434840"/>
+            <a:ext cx="10332720" cy="274320"/>
+          </a:xfrm>
+          <a:prstGeom prst="rect">
+            <a:avLst/>
+          </a:prstGeom>
+          <a:noFill/>
+          <a:ln/>
+        </p:spPr>
+        <p:txBody>
+          <a:bodyPr wrap="square" lIns="0" tIns="0" rIns="0" bIns="0" rtlCol="0" anchor="t"/>
+          <a:lstStyle/>
+          <a:p>
+            <a:pPr indent="0" marL="0">
+              <a:buNone/>
+            </a:pPr>
+            <a:r>
+              <a:rPr lang="en-US" sz="1500" dirty="0">
+                <a:solidFill>
+                  <a:srgbClr val="E5E9F0"/>
+                </a:solidFill>
+                <a:latin typeface="Courier New" pitchFamily="34" charset="0"/>
+                <a:ea typeface="Courier New" pitchFamily="34" charset="-122"/>
+                <a:cs typeface="Courier New" pitchFamily="34" charset="-120"/>
+              </a:rPr>
+              <a:t>                .user(request.question())</a:t>
+            </a:r>
+            <a:endParaRPr lang="en-US" sz="1500" dirty="0"/>
+          </a:p>
+        </p:txBody>
+      </p:sp>
+      <p:sp>
+        <p:nvSpPr>
+          <p:cNvPr id="36" name="Text 34"/>
+          <p:cNvSpPr/>
+          <p:nvPr/>
+        </p:nvSpPr>
+        <p:spPr>
+          <a:xfrm>
+            <a:off x="960120" y="4709160"/>
+            <a:ext cx="10332720" cy="274320"/>
+          </a:xfrm>
+          <a:prstGeom prst="rect">
+            <a:avLst/>
+          </a:prstGeom>
+          <a:noFill/>
+          <a:ln/>
+        </p:spPr>
+        <p:txBody>
+          <a:bodyPr wrap="square" lIns="0" tIns="0" rIns="0" bIns="0" rtlCol="0" anchor="t"/>
+          <a:lstStyle/>
+          <a:p>
+            <a:pPr indent="0" marL="0">
+              <a:buNone/>
+            </a:pPr>
+            <a:r>
+              <a:rPr lang="en-US" sz="1500" dirty="0">
+                <a:solidFill>
+                  <a:srgbClr val="E5E9F0"/>
+                </a:solidFill>
+                <a:latin typeface="Courier New" pitchFamily="34" charset="0"/>
+                <a:ea typeface="Courier New" pitchFamily="34" charset="-122"/>
+                <a:cs typeface="Courier New" pitchFamily="34" charset="-120"/>
+              </a:rPr>
+              <a:t>                .call()</a:t>
+            </a:r>
+            <a:endParaRPr lang="en-US" sz="1500" dirty="0"/>
+          </a:p>
+        </p:txBody>
+      </p:sp>
+      <p:sp>
+        <p:nvSpPr>
+          <p:cNvPr id="37" name="Text 35"/>
+          <p:cNvSpPr/>
+          <p:nvPr/>
+        </p:nvSpPr>
+        <p:spPr>
+          <a:xfrm>
+            <a:off x="960120" y="4983480"/>
+            <a:ext cx="10332720" cy="274320"/>
+          </a:xfrm>
+          <a:prstGeom prst="rect">
+            <a:avLst/>
+          </a:prstGeom>
+          <a:noFill/>
+          <a:ln/>
+        </p:spPr>
+        <p:txBody>
+          <a:bodyPr wrap="square" lIns="0" tIns="0" rIns="0" bIns="0" rtlCol="0" anchor="t"/>
+          <a:lstStyle/>
+          <a:p>
+            <a:pPr indent="0" marL="0">
+              <a:buNone/>
+            </a:pPr>
+            <a:r>
+              <a:rPr lang="en-US" sz="1500" dirty="0">
+                <a:solidFill>
+                  <a:srgbClr val="E5E9F0"/>
+                </a:solidFill>
+                <a:latin typeface="Courier New" pitchFamily="34" charset="0"/>
+                <a:ea typeface="Courier New" pitchFamily="34" charset="-122"/>
+                <a:cs typeface="Courier New" pitchFamily="34" charset="-120"/>
+              </a:rPr>
+              <a:t>                .content();</a:t>
+            </a:r>
+            <a:endParaRPr lang="en-US" sz="1500" dirty="0"/>
+          </a:p>
+        </p:txBody>
+      </p:sp>
+      <p:sp>
+        <p:nvSpPr>
+          <p:cNvPr id="38" name="Text 36"/>
+          <p:cNvSpPr/>
+          <p:nvPr/>
+        </p:nvSpPr>
+        <p:spPr>
+          <a:xfrm>
+            <a:off x="960120" y="5257800"/>
+            <a:ext cx="10332720" cy="274320"/>
+          </a:xfrm>
+          <a:prstGeom prst="rect">
+            <a:avLst/>
+          </a:prstGeom>
+          <a:noFill/>
+          <a:ln/>
+        </p:spPr>
+        <p:txBody>
+          <a:bodyPr wrap="square" lIns="0" tIns="0" rIns="0" bIns="0" rtlCol="0" anchor="t"/>
+          <a:lstStyle/>
+          <a:p>
+            <a:pPr indent="0" marL="0">
+              <a:buNone/>
+            </a:pPr>
+            <a:r>
+              <a:rPr lang="en-US" sz="1500" dirty="0">
                 <a:solidFill>
                   <a:srgbClr val="F2A93B"/>
                 </a:solidFill>
@@ -7750,22 +8967,50 @@
                 <a:ea typeface="Courier New" pitchFamily="34" charset="-122"/>
                 <a:cs typeface="Courier New" pitchFamily="34" charset="-120"/>
               </a:rPr>
-              <a:t>        options:</a:t>
-            </a:r>
-            <a:endParaRPr lang="en-US" sz="1800" dirty="0"/>
-          </a:p>
-        </p:txBody>
-      </p:sp>
-      <p:sp>
-        <p:nvSpPr>
-          <p:cNvPr id="31" name="Text 29"/>
-          <p:cNvSpPr/>
-          <p:nvPr/>
-        </p:nvSpPr>
-        <p:spPr>
-          <a:xfrm>
-            <a:off x="2057400" y="4398264"/>
-            <a:ext cx="8138160" cy="374904"/>
+              <a:t>        return new </a:t>
+            </a:r>
+            <a:pPr indent="0" marL="0">
+              <a:buNone/>
+            </a:pPr>
+            <a:r>
+              <a:rPr lang="en-US" sz="1500" dirty="0">
+                <a:solidFill>
+                  <a:srgbClr val="5FE0C5"/>
+                </a:solidFill>
+                <a:latin typeface="Courier New" pitchFamily="34" charset="0"/>
+                <a:ea typeface="Courier New" pitchFamily="34" charset="-122"/>
+                <a:cs typeface="Courier New" pitchFamily="34" charset="-120"/>
+              </a:rPr>
+              <a:t>HrResponse</a:t>
+            </a:r>
+            <a:pPr indent="0" marL="0">
+              <a:buNone/>
+            </a:pPr>
+            <a:r>
+              <a:rPr lang="en-US" sz="1500" dirty="0">
+                <a:solidFill>
+                  <a:srgbClr val="E5E9F0"/>
+                </a:solidFill>
+                <a:latin typeface="Courier New" pitchFamily="34" charset="0"/>
+                <a:ea typeface="Courier New" pitchFamily="34" charset="-122"/>
+                <a:cs typeface="Courier New" pitchFamily="34" charset="-120"/>
+              </a:rPr>
+              <a:t>(request.question(), answer);</a:t>
+            </a:r>
+            <a:endParaRPr lang="en-US" sz="1500" dirty="0"/>
+          </a:p>
+        </p:txBody>
+      </p:sp>
+      <p:sp>
+        <p:nvSpPr>
+          <p:cNvPr id="39" name="Text 37"/>
+          <p:cNvSpPr/>
+          <p:nvPr/>
+        </p:nvSpPr>
+        <p:spPr>
+          <a:xfrm>
+            <a:off x="960120" y="5532120"/>
+            <a:ext cx="10332720" cy="274320"/>
           </a:xfrm>
           <a:prstGeom prst="rect">
             <a:avLst/>
@@ -7781,7 +9026,7 @@
               <a:buNone/>
             </a:pPr>
             <a:r>
-              <a:rPr lang="en-US" sz="1800" dirty="0">
+              <a:rPr lang="en-US" sz="1500" dirty="0">
                 <a:solidFill>
                   <a:srgbClr val="E5E9F0"/>
                 </a:solidFill>
@@ -7789,119 +9034,38 @@
                 <a:ea typeface="Courier New" pitchFamily="34" charset="-122"/>
                 <a:cs typeface="Courier New" pitchFamily="34" charset="-120"/>
               </a:rPr>
-              <a:t>          model: </a:t>
-            </a:r>
+              <a:t>    }</a:t>
+            </a:r>
+            <a:endParaRPr lang="en-US" sz="1500" dirty="0"/>
+          </a:p>
+        </p:txBody>
+      </p:sp>
+      <p:sp>
+        <p:nvSpPr>
+          <p:cNvPr id="40" name="Text 38"/>
+          <p:cNvSpPr/>
+          <p:nvPr/>
+        </p:nvSpPr>
+        <p:spPr>
+          <a:xfrm>
+            <a:off x="960120" y="5806440"/>
+            <a:ext cx="10332720" cy="274320"/>
+          </a:xfrm>
+          <a:prstGeom prst="rect">
+            <a:avLst/>
+          </a:prstGeom>
+          <a:noFill/>
+          <a:ln/>
+        </p:spPr>
+        <p:txBody>
+          <a:bodyPr wrap="square" lIns="0" tIns="0" rIns="0" bIns="0" rtlCol="0" anchor="t"/>
+          <a:lstStyle/>
+          <a:p>
             <a:pPr indent="0" marL="0">
               <a:buNone/>
             </a:pPr>
             <a:r>
-              <a:rPr lang="en-US" sz="1800" dirty="0">
-                <a:solidFill>
-                  <a:srgbClr val="5FE0C5"/>
-                </a:solidFill>
-                <a:latin typeface="Courier New" pitchFamily="34" charset="0"/>
-                <a:ea typeface="Courier New" pitchFamily="34" charset="-122"/>
-                <a:cs typeface="Courier New" pitchFamily="34" charset="-120"/>
-              </a:rPr>
-              <a:t>llama3.2</a:t>
-            </a:r>
-            <a:endParaRPr lang="en-US" sz="1800" dirty="0"/>
-          </a:p>
-        </p:txBody>
-      </p:sp>
-      <p:sp>
-        <p:nvSpPr>
-          <p:cNvPr id="32" name="Text 30"/>
-          <p:cNvSpPr/>
-          <p:nvPr/>
-        </p:nvSpPr>
-        <p:spPr>
-          <a:xfrm>
-            <a:off x="2057400" y="4773168"/>
-            <a:ext cx="8138160" cy="374904"/>
-          </a:xfrm>
-          <a:prstGeom prst="rect">
-            <a:avLst/>
-          </a:prstGeom>
-          <a:noFill/>
-          <a:ln/>
-        </p:spPr>
-        <p:txBody>
-          <a:bodyPr wrap="square" lIns="0" tIns="0" rIns="0" bIns="0" rtlCol="0" anchor="t"/>
-          <a:lstStyle/>
-          <a:p>
-            <a:pPr indent="0" marL="0">
-              <a:buNone/>
-            </a:pPr>
-            <a:endParaRPr lang="en-US" sz="1800" dirty="0"/>
-          </a:p>
-        </p:txBody>
-      </p:sp>
-      <p:sp>
-        <p:nvSpPr>
-          <p:cNvPr id="33" name="Text 31"/>
-          <p:cNvSpPr/>
-          <p:nvPr/>
-        </p:nvSpPr>
-        <p:spPr>
-          <a:xfrm>
-            <a:off x="2057400" y="5148072"/>
-            <a:ext cx="8138160" cy="374904"/>
-          </a:xfrm>
-          <a:prstGeom prst="rect">
-            <a:avLst/>
-          </a:prstGeom>
-          <a:noFill/>
-          <a:ln/>
-        </p:spPr>
-        <p:txBody>
-          <a:bodyPr wrap="square" lIns="0" tIns="0" rIns="0" bIns="0" rtlCol="0" anchor="t"/>
-          <a:lstStyle/>
-          <a:p>
-            <a:pPr indent="0" marL="0">
-              <a:buNone/>
-            </a:pPr>
-            <a:r>
-              <a:rPr lang="en-US" sz="1800" dirty="0">
-                <a:solidFill>
-                  <a:srgbClr val="F2A93B"/>
-                </a:solidFill>
-                <a:latin typeface="Courier New" pitchFamily="34" charset="0"/>
-                <a:ea typeface="Courier New" pitchFamily="34" charset="-122"/>
-                <a:cs typeface="Courier New" pitchFamily="34" charset="-120"/>
-              </a:rPr>
-              <a:t>server:</a:t>
-            </a:r>
-            <a:endParaRPr lang="en-US" sz="1800" dirty="0"/>
-          </a:p>
-        </p:txBody>
-      </p:sp>
-      <p:sp>
-        <p:nvSpPr>
-          <p:cNvPr id="34" name="Text 32"/>
-          <p:cNvSpPr/>
-          <p:nvPr/>
-        </p:nvSpPr>
-        <p:spPr>
-          <a:xfrm>
-            <a:off x="2057400" y="5522976"/>
-            <a:ext cx="8138160" cy="374904"/>
-          </a:xfrm>
-          <a:prstGeom prst="rect">
-            <a:avLst/>
-          </a:prstGeom>
-          <a:noFill/>
-          <a:ln/>
-        </p:spPr>
-        <p:txBody>
-          <a:bodyPr wrap="square" lIns="0" tIns="0" rIns="0" bIns="0" rtlCol="0" anchor="t"/>
-          <a:lstStyle/>
-          <a:p>
-            <a:pPr indent="0" marL="0">
-              <a:buNone/>
-            </a:pPr>
-            <a:r>
-              <a:rPr lang="en-US" sz="1800" dirty="0">
+              <a:rPr lang="en-US" sz="1500" dirty="0">
                 <a:solidFill>
                   <a:srgbClr val="E5E9F0"/>
                 </a:solidFill>
@@ -7909,104 +9073,9 @@
                 <a:ea typeface="Courier New" pitchFamily="34" charset="-122"/>
                 <a:cs typeface="Courier New" pitchFamily="34" charset="-120"/>
               </a:rPr>
-              <a:t>  port: </a:t>
-            </a:r>
-            <a:pPr indent="0" marL="0">
-              <a:buNone/>
-            </a:pPr>
-            <a:r>
-              <a:rPr lang="en-US" sz="1800" dirty="0">
-                <a:solidFill>
-                  <a:srgbClr val="5FE0C5"/>
-                </a:solidFill>
-                <a:latin typeface="Courier New" pitchFamily="34" charset="0"/>
-                <a:ea typeface="Courier New" pitchFamily="34" charset="-122"/>
-                <a:cs typeface="Courier New" pitchFamily="34" charset="-120"/>
-              </a:rPr>
-              <a:t>8080</a:t>
-            </a:r>
-            <a:endParaRPr lang="en-US" sz="1800" dirty="0"/>
-          </a:p>
-        </p:txBody>
-      </p:sp>
-      <p:sp>
-        <p:nvSpPr>
-          <p:cNvPr id="35" name="Text 33"/>
-          <p:cNvSpPr/>
-          <p:nvPr/>
-        </p:nvSpPr>
-        <p:spPr>
-          <a:xfrm>
-            <a:off x="640080" y="5897880"/>
-            <a:ext cx="10881360" cy="365760"/>
-          </a:xfrm>
-          <a:prstGeom prst="rect">
-            <a:avLst/>
-          </a:prstGeom>
-          <a:noFill/>
-          <a:ln/>
-        </p:spPr>
-        <p:txBody>
-          <a:bodyPr wrap="square" lIns="0" tIns="0" rIns="0" bIns="0" rtlCol="0" anchor="ctr"/>
-          <a:lstStyle/>
-          <a:p>
-            <a:pPr algn="ctr" indent="0" marL="0">
-              <a:buNone/>
-            </a:pPr>
-            <a:r>
-              <a:rPr lang="en-US" sz="1620" dirty="0">
-                <a:solidFill>
-                  <a:srgbClr val="5FE0C5"/>
-                </a:solidFill>
-                <a:latin typeface="Courier New" pitchFamily="34" charset="0"/>
-                <a:ea typeface="Courier New" pitchFamily="34" charset="-122"/>
-                <a:cs typeface="Courier New" pitchFamily="34" charset="-120"/>
-              </a:rPr>
-              <a:t>base-url</a:t>
-            </a:r>
-            <a:pPr algn="ctr" indent="0" marL="0">
-              <a:buNone/>
-            </a:pPr>
-            <a:r>
-              <a:rPr lang="en-US" sz="1620" dirty="0">
-                <a:solidFill>
-                  <a:srgbClr val="B8C0D0"/>
-                </a:solidFill>
-                <a:latin typeface="Calibri" pitchFamily="34" charset="0"/>
-                <a:ea typeface="Calibri" pitchFamily="34" charset="-122"/>
-                <a:cs typeface="Calibri" pitchFamily="34" charset="-120"/>
-              </a:rPr>
-              <a:t> and </a:t>
-            </a:r>
-            <a:pPr algn="ctr" indent="0" marL="0">
-              <a:buNone/>
-            </a:pPr>
-            <a:r>
-              <a:rPr lang="en-US" sz="1620" dirty="0">
-                <a:solidFill>
-                  <a:srgbClr val="5FE0C5"/>
-                </a:solidFill>
-                <a:latin typeface="Courier New" pitchFamily="34" charset="0"/>
-                <a:ea typeface="Courier New" pitchFamily="34" charset="-122"/>
-                <a:cs typeface="Courier New" pitchFamily="34" charset="-120"/>
-              </a:rPr>
-              <a:t>model</a:t>
-            </a:r>
-            <a:pPr algn="ctr" indent="0" marL="0">
-              <a:buNone/>
-            </a:pPr>
-            <a:r>
-              <a:rPr lang="en-US" sz="1620" dirty="0">
-                <a:solidFill>
-                  <a:srgbClr val="B8C0D0"/>
-                </a:solidFill>
-                <a:latin typeface="Calibri" pitchFamily="34" charset="0"/>
-                <a:ea typeface="Calibri" pitchFamily="34" charset="-122"/>
-                <a:cs typeface="Calibri" pitchFamily="34" charset="-120"/>
-              </a:rPr>
-              <a:t> are the only two settings you need to get talking to Llama.</a:t>
-            </a:r>
-            <a:endParaRPr lang="en-US" sz="1620" dirty="0"/>
+              <a:t>}</a:t>
+            </a:r>
+            <a:endParaRPr lang="en-US" sz="1500" dirty="0"/>
           </a:p>
         </p:txBody>
       </p:sp>
@@ -8440,7 +9509,7 @@
                 <a:ea typeface="Courier New" pitchFamily="34" charset="-122"/>
                 <a:cs typeface="Courier New" pitchFamily="34" charset="-120"/>
               </a:rPr>
-              <a:t>7 / 9</a:t>
+              <a:t>7 / 10</a:t>
             </a:r>
             <a:endParaRPr lang="en-US" sz="1080" dirty="0"/>
           </a:p>
@@ -8479,7 +9548,7 @@
                 <a:ea typeface="Courier New" pitchFamily="34" charset="-122"/>
                 <a:cs typeface="Courier New" pitchFamily="34" charset="-120"/>
               </a:rPr>
-              <a:t>TRY IT</a:t>
+              <a:t>CODE SNIPPET</a:t>
             </a:r>
             <a:endParaRPr lang="en-US" sz="1440" dirty="0"/>
           </a:p>
@@ -8518,7 +9587,7 @@
                 <a:ea typeface="Courier New" pitchFamily="34" charset="-122"/>
                 <a:cs typeface="Courier New" pitchFamily="34" charset="-120"/>
               </a:rPr>
-              <a:t>Ask the bot a real question</a:t>
+              <a:t>Pointing Spring AI at Ollama</a:t>
             </a:r>
             <a:endParaRPr lang="en-US" sz="3360" dirty="0"/>
           </a:p>
@@ -8532,12 +9601,12 @@
         </p:nvSpPr>
         <p:spPr>
           <a:xfrm>
-            <a:off x="640080" y="1554480"/>
-            <a:ext cx="10881360" cy="3840480"/>
+            <a:off x="1737360" y="1645920"/>
+            <a:ext cx="8686800" cy="4023360"/>
           </a:xfrm>
           <a:prstGeom prst="roundRect">
             <a:avLst>
-              <a:gd name="adj" fmla="val 1905"/>
+              <a:gd name="adj" fmla="val 1818"/>
             </a:avLst>
           </a:prstGeom>
           <a:solidFill>
@@ -8566,7 +9635,7 @@
         </p:nvSpPr>
         <p:spPr>
           <a:xfrm>
-            <a:off x="841248" y="1719072"/>
+            <a:off x="1938528" y="1810512"/>
             <a:ext cx="91440" cy="91440"/>
           </a:xfrm>
           <a:prstGeom prst="ellipse">
@@ -8586,7 +9655,7 @@
         </p:nvSpPr>
         <p:spPr>
           <a:xfrm>
-            <a:off x="1042416" y="1719072"/>
+            <a:off x="2139696" y="1810512"/>
             <a:ext cx="91440" cy="91440"/>
           </a:xfrm>
           <a:prstGeom prst="ellipse">
@@ -8606,7 +9675,7 @@
         </p:nvSpPr>
         <p:spPr>
           <a:xfrm>
-            <a:off x="1243584" y="1719072"/>
+            <a:off x="2340864" y="1810512"/>
             <a:ext cx="91440" cy="91440"/>
           </a:xfrm>
           <a:prstGeom prst="ellipse">
@@ -8626,7 +9695,7 @@
         </p:nvSpPr>
         <p:spPr>
           <a:xfrm>
-            <a:off x="9509760" y="1645920"/>
+            <a:off x="8412480" y="1737360"/>
             <a:ext cx="1828800" cy="274320"/>
           </a:xfrm>
           <a:prstGeom prst="rect">
@@ -8651,7 +9720,7 @@
                 <a:ea typeface="Courier New" pitchFamily="34" charset="-122"/>
                 <a:cs typeface="Courier New" pitchFamily="34" charset="-120"/>
               </a:rPr>
-              <a:t>terminal</a:t>
+              <a:t>application.yml</a:t>
             </a:r>
             <a:endParaRPr lang="en-US" sz="1200" dirty="0"/>
           </a:p>
@@ -8665,8 +9734,8 @@
         </p:nvSpPr>
         <p:spPr>
           <a:xfrm>
-            <a:off x="960120" y="2057400"/>
-            <a:ext cx="10332720" cy="457200"/>
+            <a:off x="2057400" y="2148840"/>
+            <a:ext cx="8138160" cy="374904"/>
           </a:xfrm>
           <a:prstGeom prst="rect">
             <a:avLst/>
@@ -8682,7 +9751,138 @@
               <a:buNone/>
             </a:pPr>
             <a:r>
-              <a:rPr lang="en-US" sz="1680" dirty="0">
+              <a:rPr lang="en-US" sz="1800" dirty="0">
+                <a:solidFill>
+                  <a:srgbClr val="F2A93B"/>
+                </a:solidFill>
+                <a:latin typeface="Courier New" pitchFamily="34" charset="0"/>
+                <a:ea typeface="Courier New" pitchFamily="34" charset="-122"/>
+                <a:cs typeface="Courier New" pitchFamily="34" charset="-120"/>
+              </a:rPr>
+              <a:t>spring:</a:t>
+            </a:r>
+            <a:endParaRPr lang="en-US" sz="1800" dirty="0"/>
+          </a:p>
+        </p:txBody>
+      </p:sp>
+      <p:sp>
+        <p:nvSpPr>
+          <p:cNvPr id="26" name="Text 24"/>
+          <p:cNvSpPr/>
+          <p:nvPr/>
+        </p:nvSpPr>
+        <p:spPr>
+          <a:xfrm>
+            <a:off x="2057400" y="2523744"/>
+            <a:ext cx="8138160" cy="374904"/>
+          </a:xfrm>
+          <a:prstGeom prst="rect">
+            <a:avLst/>
+          </a:prstGeom>
+          <a:noFill/>
+          <a:ln/>
+        </p:spPr>
+        <p:txBody>
+          <a:bodyPr wrap="square" lIns="0" tIns="0" rIns="0" bIns="0" rtlCol="0" anchor="t"/>
+          <a:lstStyle/>
+          <a:p>
+            <a:pPr indent="0" marL="0">
+              <a:buNone/>
+            </a:pPr>
+            <a:r>
+              <a:rPr lang="en-US" sz="1800" dirty="0">
+                <a:solidFill>
+                  <a:srgbClr val="F2A93B"/>
+                </a:solidFill>
+                <a:latin typeface="Courier New" pitchFamily="34" charset="0"/>
+                <a:ea typeface="Courier New" pitchFamily="34" charset="-122"/>
+                <a:cs typeface="Courier New" pitchFamily="34" charset="-120"/>
+              </a:rPr>
+              <a:t>  ai:</a:t>
+            </a:r>
+            <a:endParaRPr lang="en-US" sz="1800" dirty="0"/>
+          </a:p>
+        </p:txBody>
+      </p:sp>
+      <p:sp>
+        <p:nvSpPr>
+          <p:cNvPr id="27" name="Text 25"/>
+          <p:cNvSpPr/>
+          <p:nvPr/>
+        </p:nvSpPr>
+        <p:spPr>
+          <a:xfrm>
+            <a:off x="2057400" y="2898648"/>
+            <a:ext cx="8138160" cy="374904"/>
+          </a:xfrm>
+          <a:prstGeom prst="rect">
+            <a:avLst/>
+          </a:prstGeom>
+          <a:noFill/>
+          <a:ln/>
+        </p:spPr>
+        <p:txBody>
+          <a:bodyPr wrap="square" lIns="0" tIns="0" rIns="0" bIns="0" rtlCol="0" anchor="t"/>
+          <a:lstStyle/>
+          <a:p>
+            <a:pPr indent="0" marL="0">
+              <a:buNone/>
+            </a:pPr>
+            <a:r>
+              <a:rPr lang="en-US" sz="1800" dirty="0">
+                <a:solidFill>
+                  <a:srgbClr val="F2A93B"/>
+                </a:solidFill>
+                <a:latin typeface="Courier New" pitchFamily="34" charset="0"/>
+                <a:ea typeface="Courier New" pitchFamily="34" charset="-122"/>
+                <a:cs typeface="Courier New" pitchFamily="34" charset="-120"/>
+              </a:rPr>
+              <a:t>    ollama:</a:t>
+            </a:r>
+            <a:endParaRPr lang="en-US" sz="1800" dirty="0"/>
+          </a:p>
+        </p:txBody>
+      </p:sp>
+      <p:sp>
+        <p:nvSpPr>
+          <p:cNvPr id="28" name="Text 26"/>
+          <p:cNvSpPr/>
+          <p:nvPr/>
+        </p:nvSpPr>
+        <p:spPr>
+          <a:xfrm>
+            <a:off x="2057400" y="3273552"/>
+            <a:ext cx="8138160" cy="374904"/>
+          </a:xfrm>
+          <a:prstGeom prst="rect">
+            <a:avLst/>
+          </a:prstGeom>
+          <a:noFill/>
+          <a:ln/>
+        </p:spPr>
+        <p:txBody>
+          <a:bodyPr wrap="square" lIns="0" tIns="0" rIns="0" bIns="0" rtlCol="0" anchor="t"/>
+          <a:lstStyle/>
+          <a:p>
+            <a:pPr indent="0" marL="0">
+              <a:buNone/>
+            </a:pPr>
+            <a:r>
+              <a:rPr lang="en-US" sz="1800" dirty="0">
+                <a:solidFill>
+                  <a:srgbClr val="E5E9F0"/>
+                </a:solidFill>
+                <a:latin typeface="Courier New" pitchFamily="34" charset="0"/>
+                <a:ea typeface="Courier New" pitchFamily="34" charset="-122"/>
+                <a:cs typeface="Courier New" pitchFamily="34" charset="-120"/>
+              </a:rPr>
+              <a:t>      base-url: </a:t>
+            </a:r>
+            <a:pPr indent="0" marL="0">
+              <a:buNone/>
+            </a:pPr>
+            <a:r>
+              <a:rPr lang="en-US" sz="1800" dirty="0">
                 <a:solidFill>
                   <a:srgbClr val="5FE0C5"/>
                 </a:solidFill>
@@ -8690,13 +9890,116 @@
                 <a:ea typeface="Courier New" pitchFamily="34" charset="-122"/>
                 <a:cs typeface="Courier New" pitchFamily="34" charset="-120"/>
               </a:rPr>
-              <a:t>$ </a:t>
-            </a:r>
+              <a:t>http://localhost:11434</a:t>
+            </a:r>
+            <a:endParaRPr lang="en-US" sz="1800" dirty="0"/>
+          </a:p>
+        </p:txBody>
+      </p:sp>
+      <p:sp>
+        <p:nvSpPr>
+          <p:cNvPr id="29" name="Text 27"/>
+          <p:cNvSpPr/>
+          <p:nvPr/>
+        </p:nvSpPr>
+        <p:spPr>
+          <a:xfrm>
+            <a:off x="2057400" y="3648456"/>
+            <a:ext cx="8138160" cy="374904"/>
+          </a:xfrm>
+          <a:prstGeom prst="rect">
+            <a:avLst/>
+          </a:prstGeom>
+          <a:noFill/>
+          <a:ln/>
+        </p:spPr>
+        <p:txBody>
+          <a:bodyPr wrap="square" lIns="0" tIns="0" rIns="0" bIns="0" rtlCol="0" anchor="t"/>
+          <a:lstStyle/>
+          <a:p>
             <a:pPr indent="0" marL="0">
               <a:buNone/>
             </a:pPr>
             <a:r>
-              <a:rPr lang="en-US" sz="1680" dirty="0">
+              <a:rPr lang="en-US" sz="1800" dirty="0">
+                <a:solidFill>
+                  <a:srgbClr val="F2A93B"/>
+                </a:solidFill>
+                <a:latin typeface="Courier New" pitchFamily="34" charset="0"/>
+                <a:ea typeface="Courier New" pitchFamily="34" charset="-122"/>
+                <a:cs typeface="Courier New" pitchFamily="34" charset="-120"/>
+              </a:rPr>
+              <a:t>      chat:</a:t>
+            </a:r>
+            <a:endParaRPr lang="en-US" sz="1800" dirty="0"/>
+          </a:p>
+        </p:txBody>
+      </p:sp>
+      <p:sp>
+        <p:nvSpPr>
+          <p:cNvPr id="30" name="Text 28"/>
+          <p:cNvSpPr/>
+          <p:nvPr/>
+        </p:nvSpPr>
+        <p:spPr>
+          <a:xfrm>
+            <a:off x="2057400" y="4023360"/>
+            <a:ext cx="8138160" cy="374904"/>
+          </a:xfrm>
+          <a:prstGeom prst="rect">
+            <a:avLst/>
+          </a:prstGeom>
+          <a:noFill/>
+          <a:ln/>
+        </p:spPr>
+        <p:txBody>
+          <a:bodyPr wrap="square" lIns="0" tIns="0" rIns="0" bIns="0" rtlCol="0" anchor="t"/>
+          <a:lstStyle/>
+          <a:p>
+            <a:pPr indent="0" marL="0">
+              <a:buNone/>
+            </a:pPr>
+            <a:r>
+              <a:rPr lang="en-US" sz="1800" dirty="0">
+                <a:solidFill>
+                  <a:srgbClr val="F2A93B"/>
+                </a:solidFill>
+                <a:latin typeface="Courier New" pitchFamily="34" charset="0"/>
+                <a:ea typeface="Courier New" pitchFamily="34" charset="-122"/>
+                <a:cs typeface="Courier New" pitchFamily="34" charset="-120"/>
+              </a:rPr>
+              <a:t>        options:</a:t>
+            </a:r>
+            <a:endParaRPr lang="en-US" sz="1800" dirty="0"/>
+          </a:p>
+        </p:txBody>
+      </p:sp>
+      <p:sp>
+        <p:nvSpPr>
+          <p:cNvPr id="31" name="Text 29"/>
+          <p:cNvSpPr/>
+          <p:nvPr/>
+        </p:nvSpPr>
+        <p:spPr>
+          <a:xfrm>
+            <a:off x="2057400" y="4398264"/>
+            <a:ext cx="8138160" cy="374904"/>
+          </a:xfrm>
+          <a:prstGeom prst="rect">
+            <a:avLst/>
+          </a:prstGeom>
+          <a:noFill/>
+          <a:ln/>
+        </p:spPr>
+        <p:txBody>
+          <a:bodyPr wrap="square" lIns="0" tIns="0" rIns="0" bIns="0" rtlCol="0" anchor="t"/>
+          <a:lstStyle/>
+          <a:p>
+            <a:pPr indent="0" marL="0">
+              <a:buNone/>
+            </a:pPr>
+            <a:r>
+              <a:rPr lang="en-US" sz="1800" dirty="0">
                 <a:solidFill>
                   <a:srgbClr val="E5E9F0"/>
                 </a:solidFill>
@@ -8704,22 +10007,36 @@
                 <a:ea typeface="Courier New" pitchFamily="34" charset="-122"/>
                 <a:cs typeface="Courier New" pitchFamily="34" charset="-120"/>
               </a:rPr>
-              <a:t>curl -s -X POST http://localhost:8080/hr/ask \</a:t>
-            </a:r>
-            <a:endParaRPr lang="en-US" sz="1680" dirty="0"/>
-          </a:p>
-        </p:txBody>
-      </p:sp>
-      <p:sp>
-        <p:nvSpPr>
-          <p:cNvPr id="26" name="Text 24"/>
-          <p:cNvSpPr/>
-          <p:nvPr/>
-        </p:nvSpPr>
-        <p:spPr>
-          <a:xfrm>
-            <a:off x="960120" y="2514600"/>
-            <a:ext cx="10332720" cy="457200"/>
+              <a:t>          model: </a:t>
+            </a:r>
+            <a:pPr indent="0" marL="0">
+              <a:buNone/>
+            </a:pPr>
+            <a:r>
+              <a:rPr lang="en-US" sz="1800" dirty="0">
+                <a:solidFill>
+                  <a:srgbClr val="5FE0C5"/>
+                </a:solidFill>
+                <a:latin typeface="Courier New" pitchFamily="34" charset="0"/>
+                <a:ea typeface="Courier New" pitchFamily="34" charset="-122"/>
+                <a:cs typeface="Courier New" pitchFamily="34" charset="-120"/>
+              </a:rPr>
+              <a:t>llama3.2</a:t>
+            </a:r>
+            <a:endParaRPr lang="en-US" sz="1800" dirty="0"/>
+          </a:p>
+        </p:txBody>
+      </p:sp>
+      <p:sp>
+        <p:nvSpPr>
+          <p:cNvPr id="32" name="Text 30"/>
+          <p:cNvSpPr/>
+          <p:nvPr/>
+        </p:nvSpPr>
+        <p:spPr>
+          <a:xfrm>
+            <a:off x="2057400" y="4773168"/>
+            <a:ext cx="8138160" cy="374904"/>
           </a:xfrm>
           <a:prstGeom prst="rect">
             <a:avLst/>
@@ -8734,8 +10051,75 @@
             <a:pPr indent="0" marL="0">
               <a:buNone/>
             </a:pPr>
-            <a:r>
-              <a:rPr lang="en-US" sz="1680" dirty="0">
+            <a:endParaRPr lang="en-US" sz="1800" dirty="0"/>
+          </a:p>
+        </p:txBody>
+      </p:sp>
+      <p:sp>
+        <p:nvSpPr>
+          <p:cNvPr id="33" name="Text 31"/>
+          <p:cNvSpPr/>
+          <p:nvPr/>
+        </p:nvSpPr>
+        <p:spPr>
+          <a:xfrm>
+            <a:off x="2057400" y="5148072"/>
+            <a:ext cx="8138160" cy="374904"/>
+          </a:xfrm>
+          <a:prstGeom prst="rect">
+            <a:avLst/>
+          </a:prstGeom>
+          <a:noFill/>
+          <a:ln/>
+        </p:spPr>
+        <p:txBody>
+          <a:bodyPr wrap="square" lIns="0" tIns="0" rIns="0" bIns="0" rtlCol="0" anchor="t"/>
+          <a:lstStyle/>
+          <a:p>
+            <a:pPr indent="0" marL="0">
+              <a:buNone/>
+            </a:pPr>
+            <a:r>
+              <a:rPr lang="en-US" sz="1800" dirty="0">
+                <a:solidFill>
+                  <a:srgbClr val="F2A93B"/>
+                </a:solidFill>
+                <a:latin typeface="Courier New" pitchFamily="34" charset="0"/>
+                <a:ea typeface="Courier New" pitchFamily="34" charset="-122"/>
+                <a:cs typeface="Courier New" pitchFamily="34" charset="-120"/>
+              </a:rPr>
+              <a:t>server:</a:t>
+            </a:r>
+            <a:endParaRPr lang="en-US" sz="1800" dirty="0"/>
+          </a:p>
+        </p:txBody>
+      </p:sp>
+      <p:sp>
+        <p:nvSpPr>
+          <p:cNvPr id="34" name="Text 32"/>
+          <p:cNvSpPr/>
+          <p:nvPr/>
+        </p:nvSpPr>
+        <p:spPr>
+          <a:xfrm>
+            <a:off x="2057400" y="5522976"/>
+            <a:ext cx="8138160" cy="374904"/>
+          </a:xfrm>
+          <a:prstGeom prst="rect">
+            <a:avLst/>
+          </a:prstGeom>
+          <a:noFill/>
+          <a:ln/>
+        </p:spPr>
+        <p:txBody>
+          <a:bodyPr wrap="square" lIns="0" tIns="0" rIns="0" bIns="0" rtlCol="0" anchor="t"/>
+          <a:lstStyle/>
+          <a:p>
+            <a:pPr indent="0" marL="0">
+              <a:buNone/>
+            </a:pPr>
+            <a:r>
+              <a:rPr lang="en-US" sz="1800" dirty="0">
                 <a:solidFill>
                   <a:srgbClr val="E5E9F0"/>
                 </a:solidFill>
@@ -8743,13 +10127,13 @@
                 <a:ea typeface="Courier New" pitchFamily="34" charset="-122"/>
                 <a:cs typeface="Courier New" pitchFamily="34" charset="-120"/>
               </a:rPr>
-              <a:t>    -H </a:t>
+              <a:t>  port: </a:t>
             </a:r>
             <a:pPr indent="0" marL="0">
               <a:buNone/>
             </a:pPr>
             <a:r>
-              <a:rPr lang="en-US" sz="1680" dirty="0">
+              <a:rPr lang="en-US" sz="1800" dirty="0">
                 <a:solidFill>
                   <a:srgbClr val="5FE0C5"/>
                 </a:solidFill>
@@ -8757,66 +10141,38 @@
                 <a:ea typeface="Courier New" pitchFamily="34" charset="-122"/>
                 <a:cs typeface="Courier New" pitchFamily="34" charset="-120"/>
               </a:rPr>
-              <a:t>"Content-Type: application/json"</a:t>
-            </a:r>
-            <a:pPr indent="0" marL="0">
-              <a:buNone/>
-            </a:pPr>
-            <a:r>
-              <a:rPr lang="en-US" sz="1680" dirty="0">
-                <a:solidFill>
-                  <a:srgbClr val="E5E9F0"/>
-                </a:solidFill>
-                <a:latin typeface="Courier New" pitchFamily="34" charset="0"/>
-                <a:ea typeface="Courier New" pitchFamily="34" charset="-122"/>
-                <a:cs typeface="Courier New" pitchFamily="34" charset="-120"/>
-              </a:rPr>
-              <a:t> \</a:t>
-            </a:r>
-            <a:endParaRPr lang="en-US" sz="1680" dirty="0"/>
-          </a:p>
-        </p:txBody>
-      </p:sp>
-      <p:sp>
-        <p:nvSpPr>
-          <p:cNvPr id="27" name="Text 25"/>
-          <p:cNvSpPr/>
-          <p:nvPr/>
-        </p:nvSpPr>
-        <p:spPr>
-          <a:xfrm>
-            <a:off x="960120" y="2971800"/>
-            <a:ext cx="10332720" cy="457200"/>
-          </a:xfrm>
-          <a:prstGeom prst="rect">
-            <a:avLst/>
-          </a:prstGeom>
-          <a:noFill/>
-          <a:ln/>
-        </p:spPr>
-        <p:txBody>
-          <a:bodyPr wrap="square" lIns="0" tIns="0" rIns="0" bIns="0" rtlCol="0" anchor="t"/>
-          <a:lstStyle/>
-          <a:p>
-            <a:pPr indent="0" marL="0">
-              <a:buNone/>
-            </a:pPr>
-            <a:r>
-              <a:rPr lang="en-US" sz="1680" dirty="0">
-                <a:solidFill>
-                  <a:srgbClr val="E5E9F0"/>
-                </a:solidFill>
-                <a:latin typeface="Courier New" pitchFamily="34" charset="0"/>
-                <a:ea typeface="Courier New" pitchFamily="34" charset="-122"/>
-                <a:cs typeface="Courier New" pitchFamily="34" charset="-120"/>
-              </a:rPr>
-              <a:t>    -d </a:t>
-            </a:r>
-            <a:pPr indent="0" marL="0">
-              <a:buNone/>
-            </a:pPr>
-            <a:r>
-              <a:rPr lang="en-US" sz="1680" dirty="0">
+              <a:t>8080</a:t>
+            </a:r>
+            <a:endParaRPr lang="en-US" sz="1800" dirty="0"/>
+          </a:p>
+        </p:txBody>
+      </p:sp>
+      <p:sp>
+        <p:nvSpPr>
+          <p:cNvPr id="35" name="Text 33"/>
+          <p:cNvSpPr/>
+          <p:nvPr/>
+        </p:nvSpPr>
+        <p:spPr>
+          <a:xfrm>
+            <a:off x="640080" y="5897880"/>
+            <a:ext cx="10881360" cy="365760"/>
+          </a:xfrm>
+          <a:prstGeom prst="rect">
+            <a:avLst/>
+          </a:prstGeom>
+          <a:noFill/>
+          <a:ln/>
+        </p:spPr>
+        <p:txBody>
+          <a:bodyPr wrap="square" lIns="0" tIns="0" rIns="0" bIns="0" rtlCol="0" anchor="ctr"/>
+          <a:lstStyle/>
+          <a:p>
+            <a:pPr algn="ctr" indent="0" marL="0">
+              <a:buNone/>
+            </a:pPr>
+            <a:r>
+              <a:rPr lang="en-US" sz="1620" dirty="0">
                 <a:solidFill>
                   <a:srgbClr val="5FE0C5"/>
                 </a:solidFill>
@@ -8824,302 +10180,51 @@
                 <a:ea typeface="Courier New" pitchFamily="34" charset="-122"/>
                 <a:cs typeface="Courier New" pitchFamily="34" charset="-120"/>
               </a:rPr>
-              <a:t>'{"question": "What is the parental leave policy?"}'</a:t>
-            </a:r>
-            <a:endParaRPr lang="en-US" sz="1680" dirty="0"/>
-          </a:p>
-        </p:txBody>
-      </p:sp>
-      <p:sp>
-        <p:nvSpPr>
-          <p:cNvPr id="28" name="Text 26"/>
-          <p:cNvSpPr/>
-          <p:nvPr/>
-        </p:nvSpPr>
-        <p:spPr>
-          <a:xfrm>
-            <a:off x="960120" y="3429000"/>
-            <a:ext cx="10332720" cy="457200"/>
-          </a:xfrm>
-          <a:prstGeom prst="rect">
-            <a:avLst/>
-          </a:prstGeom>
-          <a:noFill/>
-          <a:ln/>
-        </p:spPr>
-        <p:txBody>
-          <a:bodyPr wrap="square" lIns="0" tIns="0" rIns="0" bIns="0" rtlCol="0" anchor="t"/>
-          <a:lstStyle/>
-          <a:p>
-            <a:pPr indent="0" marL="0">
-              <a:buNone/>
-            </a:pPr>
-            <a:endParaRPr lang="en-US" sz="1680" dirty="0"/>
-          </a:p>
-        </p:txBody>
-      </p:sp>
-      <p:sp>
-        <p:nvSpPr>
-          <p:cNvPr id="29" name="Text 27"/>
-          <p:cNvSpPr/>
-          <p:nvPr/>
-        </p:nvSpPr>
-        <p:spPr>
-          <a:xfrm>
-            <a:off x="960120" y="3886200"/>
-            <a:ext cx="10332720" cy="457200"/>
-          </a:xfrm>
-          <a:prstGeom prst="rect">
-            <a:avLst/>
-          </a:prstGeom>
-          <a:noFill/>
-          <a:ln/>
-        </p:spPr>
-        <p:txBody>
-          <a:bodyPr wrap="square" lIns="0" tIns="0" rIns="0" bIns="0" rtlCol="0" anchor="t"/>
-          <a:lstStyle/>
-          <a:p>
-            <a:pPr indent="0" marL="0">
-              <a:buNone/>
-            </a:pPr>
-            <a:r>
-              <a:rPr lang="en-US" sz="1680" dirty="0">
-                <a:solidFill>
-                  <a:srgbClr val="E5E9F0"/>
-                </a:solidFill>
-                <a:latin typeface="Courier New" pitchFamily="34" charset="0"/>
-                <a:ea typeface="Courier New" pitchFamily="34" charset="-122"/>
-                <a:cs typeface="Courier New" pitchFamily="34" charset="-120"/>
-              </a:rPr>
-              <a:t>{</a:t>
-            </a:r>
-            <a:endParaRPr lang="en-US" sz="1680" dirty="0"/>
-          </a:p>
-        </p:txBody>
-      </p:sp>
-      <p:sp>
-        <p:nvSpPr>
-          <p:cNvPr id="30" name="Text 28"/>
-          <p:cNvSpPr/>
-          <p:nvPr/>
-        </p:nvSpPr>
-        <p:spPr>
-          <a:xfrm>
-            <a:off x="960120" y="4343400"/>
-            <a:ext cx="10332720" cy="457200"/>
-          </a:xfrm>
-          <a:prstGeom prst="rect">
-            <a:avLst/>
-          </a:prstGeom>
-          <a:noFill/>
-          <a:ln/>
-        </p:spPr>
-        <p:txBody>
-          <a:bodyPr wrap="square" lIns="0" tIns="0" rIns="0" bIns="0" rtlCol="0" anchor="t"/>
-          <a:lstStyle/>
-          <a:p>
-            <a:pPr indent="0" marL="0">
-              <a:buNone/>
-            </a:pPr>
-            <a:r>
-              <a:rPr lang="en-US" sz="1680" dirty="0">
-                <a:solidFill>
-                  <a:srgbClr val="F2A93B"/>
-                </a:solidFill>
-                <a:latin typeface="Courier New" pitchFamily="34" charset="0"/>
-                <a:ea typeface="Courier New" pitchFamily="34" charset="-122"/>
-                <a:cs typeface="Courier New" pitchFamily="34" charset="-120"/>
-              </a:rPr>
-              <a:t>  "question"</a:t>
-            </a:r>
-            <a:pPr indent="0" marL="0">
-              <a:buNone/>
-            </a:pPr>
-            <a:r>
-              <a:rPr lang="en-US" sz="1680" dirty="0">
-                <a:solidFill>
-                  <a:srgbClr val="E5E9F0"/>
-                </a:solidFill>
-                <a:latin typeface="Courier New" pitchFamily="34" charset="0"/>
-                <a:ea typeface="Courier New" pitchFamily="34" charset="-122"/>
-                <a:cs typeface="Courier New" pitchFamily="34" charset="-120"/>
-              </a:rPr>
-              <a:t>: </a:t>
-            </a:r>
-            <a:pPr indent="0" marL="0">
-              <a:buNone/>
-            </a:pPr>
-            <a:r>
-              <a:rPr lang="en-US" sz="1680" dirty="0">
-                <a:solidFill>
-                  <a:srgbClr val="5FE0C5"/>
-                </a:solidFill>
-                <a:latin typeface="Courier New" pitchFamily="34" charset="0"/>
-                <a:ea typeface="Courier New" pitchFamily="34" charset="-122"/>
-                <a:cs typeface="Courier New" pitchFamily="34" charset="-120"/>
-              </a:rPr>
-              <a:t>"What is the parental leave policy?"</a:t>
-            </a:r>
-            <a:pPr indent="0" marL="0">
-              <a:buNone/>
-            </a:pPr>
-            <a:r>
-              <a:rPr lang="en-US" sz="1680" dirty="0">
-                <a:solidFill>
-                  <a:srgbClr val="E5E9F0"/>
-                </a:solidFill>
-                <a:latin typeface="Courier New" pitchFamily="34" charset="0"/>
-                <a:ea typeface="Courier New" pitchFamily="34" charset="-122"/>
-                <a:cs typeface="Courier New" pitchFamily="34" charset="-120"/>
-              </a:rPr>
-              <a:t>,</a:t>
-            </a:r>
-            <a:endParaRPr lang="en-US" sz="1680" dirty="0"/>
-          </a:p>
-        </p:txBody>
-      </p:sp>
-      <p:sp>
-        <p:nvSpPr>
-          <p:cNvPr id="31" name="Text 29"/>
-          <p:cNvSpPr/>
-          <p:nvPr/>
-        </p:nvSpPr>
-        <p:spPr>
-          <a:xfrm>
-            <a:off x="960120" y="4800600"/>
-            <a:ext cx="10332720" cy="457200"/>
-          </a:xfrm>
-          <a:prstGeom prst="rect">
-            <a:avLst/>
-          </a:prstGeom>
-          <a:noFill/>
-          <a:ln/>
-        </p:spPr>
-        <p:txBody>
-          <a:bodyPr wrap="square" lIns="0" tIns="0" rIns="0" bIns="0" rtlCol="0" anchor="t"/>
-          <a:lstStyle/>
-          <a:p>
-            <a:pPr indent="0" marL="0">
-              <a:buNone/>
-            </a:pPr>
-            <a:r>
-              <a:rPr lang="en-US" sz="1680" dirty="0">
-                <a:solidFill>
-                  <a:srgbClr val="F2A93B"/>
-                </a:solidFill>
-                <a:latin typeface="Courier New" pitchFamily="34" charset="0"/>
-                <a:ea typeface="Courier New" pitchFamily="34" charset="-122"/>
-                <a:cs typeface="Courier New" pitchFamily="34" charset="-120"/>
-              </a:rPr>
-              <a:t>  "answer"</a:t>
-            </a:r>
-            <a:pPr indent="0" marL="0">
-              <a:buNone/>
-            </a:pPr>
-            <a:r>
-              <a:rPr lang="en-US" sz="1680" dirty="0">
-                <a:solidFill>
-                  <a:srgbClr val="E5E9F0"/>
-                </a:solidFill>
-                <a:latin typeface="Courier New" pitchFamily="34" charset="0"/>
-                <a:ea typeface="Courier New" pitchFamily="34" charset="-122"/>
-                <a:cs typeface="Courier New" pitchFamily="34" charset="-120"/>
-              </a:rPr>
-              <a:t>: </a:t>
-            </a:r>
-            <a:pPr indent="0" marL="0">
-              <a:buNone/>
-            </a:pPr>
-            <a:r>
-              <a:rPr lang="en-US" sz="1680" dirty="0">
-                <a:solidFill>
-                  <a:srgbClr val="5FE0C5"/>
-                </a:solidFill>
-                <a:latin typeface="Courier New" pitchFamily="34" charset="0"/>
-                <a:ea typeface="Courier New" pitchFamily="34" charset="-122"/>
-                <a:cs typeface="Courier New" pitchFamily="34" charset="-120"/>
-              </a:rPr>
-              <a:t>"Primary caregivers receive 16 weeks fully paid..."</a:t>
-            </a:r>
-            <a:endParaRPr lang="en-US" sz="1680" dirty="0"/>
-          </a:p>
-        </p:txBody>
-      </p:sp>
-      <p:sp>
-        <p:nvSpPr>
-          <p:cNvPr id="32" name="Text 30"/>
-          <p:cNvSpPr/>
-          <p:nvPr/>
-        </p:nvSpPr>
-        <p:spPr>
-          <a:xfrm>
-            <a:off x="960120" y="5257800"/>
-            <a:ext cx="10332720" cy="457200"/>
-          </a:xfrm>
-          <a:prstGeom prst="rect">
-            <a:avLst/>
-          </a:prstGeom>
-          <a:noFill/>
-          <a:ln/>
-        </p:spPr>
-        <p:txBody>
-          <a:bodyPr wrap="square" lIns="0" tIns="0" rIns="0" bIns="0" rtlCol="0" anchor="t"/>
-          <a:lstStyle/>
-          <a:p>
-            <a:pPr indent="0" marL="0">
-              <a:buNone/>
-            </a:pPr>
-            <a:r>
-              <a:rPr lang="en-US" sz="1680" dirty="0">
-                <a:solidFill>
-                  <a:srgbClr val="E5E9F0"/>
-                </a:solidFill>
-                <a:latin typeface="Courier New" pitchFamily="34" charset="0"/>
-                <a:ea typeface="Courier New" pitchFamily="34" charset="-122"/>
-                <a:cs typeface="Courier New" pitchFamily="34" charset="-120"/>
-              </a:rPr>
-              <a:t>}</a:t>
-            </a:r>
-            <a:endParaRPr lang="en-US" sz="1680" dirty="0"/>
-          </a:p>
-        </p:txBody>
-      </p:sp>
-      <p:sp>
-        <p:nvSpPr>
-          <p:cNvPr id="33" name="Text 31"/>
-          <p:cNvSpPr/>
-          <p:nvPr/>
-        </p:nvSpPr>
-        <p:spPr>
-          <a:xfrm>
-            <a:off x="0" y="5715000"/>
-            <a:ext cx="12161520" cy="365760"/>
-          </a:xfrm>
-          <a:prstGeom prst="rect">
-            <a:avLst/>
-          </a:prstGeom>
-          <a:noFill/>
-          <a:ln/>
-        </p:spPr>
-        <p:txBody>
-          <a:bodyPr wrap="square" lIns="0" tIns="0" rIns="0" bIns="0" rtlCol="0" anchor="ctr"/>
-          <a:lstStyle/>
-          <a:p>
+              <a:t>base-url</a:t>
+            </a:r>
             <a:pPr algn="ctr" indent="0" marL="0">
               <a:buNone/>
             </a:pPr>
             <a:r>
-              <a:rPr lang="en-US" sz="1680" i="1" dirty="0">
-                <a:solidFill>
-                  <a:srgbClr val="8B98AC"/>
+              <a:rPr lang="en-US" sz="1620" dirty="0">
+                <a:solidFill>
+                  <a:srgbClr val="B8C0D0"/>
                 </a:solidFill>
                 <a:latin typeface="Calibri" pitchFamily="34" charset="0"/>
                 <a:ea typeface="Calibri" pitchFamily="34" charset="-122"/>
                 <a:cs typeface="Calibri" pitchFamily="34" charset="-120"/>
               </a:rPr>
-              <a:t>One request. A real answer. No OpenAI account required.</a:t>
-            </a:r>
-            <a:endParaRPr lang="en-US" sz="1680" dirty="0"/>
+              <a:t> and </a:t>
+            </a:r>
+            <a:pPr algn="ctr" indent="0" marL="0">
+              <a:buNone/>
+            </a:pPr>
+            <a:r>
+              <a:rPr lang="en-US" sz="1620" dirty="0">
+                <a:solidFill>
+                  <a:srgbClr val="5FE0C5"/>
+                </a:solidFill>
+                <a:latin typeface="Courier New" pitchFamily="34" charset="0"/>
+                <a:ea typeface="Courier New" pitchFamily="34" charset="-122"/>
+                <a:cs typeface="Courier New" pitchFamily="34" charset="-120"/>
+              </a:rPr>
+              <a:t>model</a:t>
+            </a:r>
+            <a:pPr algn="ctr" indent="0" marL="0">
+              <a:buNone/>
+            </a:pPr>
+            <a:r>
+              <a:rPr lang="en-US" sz="1620" dirty="0">
+                <a:solidFill>
+                  <a:srgbClr val="B8C0D0"/>
+                </a:solidFill>
+                <a:latin typeface="Calibri" pitchFamily="34" charset="0"/>
+                <a:ea typeface="Calibri" pitchFamily="34" charset="-122"/>
+                <a:cs typeface="Calibri" pitchFamily="34" charset="-120"/>
+              </a:rPr>
+              <a:t> are the only two settings you need to get talking to Llama.</a:t>
+            </a:r>
+            <a:endParaRPr lang="en-US" sz="1620" dirty="0"/>
           </a:p>
         </p:txBody>
       </p:sp>
@@ -9553,7 +10658,7 @@
                 <a:ea typeface="Courier New" pitchFamily="34" charset="-122"/>
                 <a:cs typeface="Courier New" pitchFamily="34" charset="-120"/>
               </a:rPr>
-              <a:t>8 / 9</a:t>
+              <a:t>8 / 10</a:t>
             </a:r>
             <a:endParaRPr lang="en-US" sz="1080" dirty="0"/>
           </a:p>
@@ -9592,7 +10697,7 @@
                 <a:ea typeface="Courier New" pitchFamily="34" charset="-122"/>
                 <a:cs typeface="Courier New" pitchFamily="34" charset="-120"/>
               </a:rPr>
-              <a:t>RECAP</a:t>
+              <a:t>TRY IT</a:t>
             </a:r>
             <a:endParaRPr lang="en-US" sz="1440" dirty="0"/>
           </a:p>
@@ -9631,7 +10736,7 @@
                 <a:ea typeface="Courier New" pitchFamily="34" charset="-122"/>
                 <a:cs typeface="Courier New" pitchFamily="34" charset="-120"/>
               </a:rPr>
-              <a:t>What we built</a:t>
+              <a:t>Ask the bot a real question</a:t>
             </a:r>
             <a:endParaRPr lang="en-US" sz="3360" dirty="0"/>
           </a:p>
@@ -9639,118 +10744,33 @@
       </p:sp>
       <p:sp>
         <p:nvSpPr>
-          <p:cNvPr id="20" name="Text 18"/>
-          <p:cNvSpPr/>
-          <p:nvPr/>
-        </p:nvSpPr>
-        <p:spPr>
-          <a:xfrm>
-            <a:off x="640080" y="1463040"/>
-            <a:ext cx="10881360" cy="1737360"/>
-          </a:xfrm>
-          <a:prstGeom prst="rect">
-            <a:avLst/>
-          </a:prstGeom>
-          <a:noFill/>
-          <a:ln/>
-        </p:spPr>
-        <p:txBody>
-          <a:bodyPr wrap="square" lIns="0" tIns="0" rIns="0" bIns="0" rtlCol="0" anchor="t"/>
-          <a:lstStyle/>
-          <a:p>
-            <a:pPr marL="342900" indent="-342900">
-              <a:spcAft>
-                <a:spcPts val="1400"/>
-              </a:spcAft>
-              <a:buSzPct val="100000"/>
-              <a:buChar char="•"/>
-            </a:pPr>
-            <a:r>
-              <a:rPr lang="en-US" sz="2040" dirty="0">
-                <a:solidFill>
-                  <a:srgbClr val="E5E9F0"/>
-                </a:solidFill>
-                <a:latin typeface="Calibri" pitchFamily="34" charset="0"/>
-                <a:ea typeface="Calibri" pitchFamily="34" charset="-122"/>
-                <a:cs typeface="Calibri" pitchFamily="34" charset="-120"/>
-              </a:rPr>
-              <a:t>A working AI Q&amp;A endpoint — /hr/ask</a:t>
-            </a:r>
-            <a:endParaRPr lang="en-US" sz="2040" dirty="0"/>
-          </a:p>
-          <a:p>
-            <a:pPr marL="342900" indent="-342900">
-              <a:spcAft>
-                <a:spcPts val="1400"/>
-              </a:spcAft>
-              <a:buSzPct val="100000"/>
-              <a:buChar char="•"/>
-            </a:pPr>
-            <a:r>
-              <a:rPr lang="en-US" sz="2040" dirty="0">
-                <a:solidFill>
-                  <a:srgbClr val="E5E9F0"/>
-                </a:solidFill>
-                <a:latin typeface="Calibri" pitchFamily="34" charset="0"/>
-                <a:ea typeface="Calibri" pitchFamily="34" charset="-122"/>
-                <a:cs typeface="Calibri" pitchFamily="34" charset="-120"/>
-              </a:rPr>
-              <a:t>Powered by Spring AI's ChatClient + Ollama's llama3.2</a:t>
-            </a:r>
-            <a:endParaRPr lang="en-US" sz="2040" dirty="0"/>
-          </a:p>
-          <a:p>
-            <a:pPr marL="342900" indent="-342900">
-              <a:spcAft>
-                <a:spcPts val="1400"/>
-              </a:spcAft>
-              <a:buSzPct val="100000"/>
-              <a:buChar char="•"/>
-            </a:pPr>
-            <a:r>
-              <a:rPr lang="en-US" sz="2040" dirty="0">
-                <a:solidFill>
-                  <a:srgbClr val="E5E9F0"/>
-                </a:solidFill>
-                <a:latin typeface="Calibri" pitchFamily="34" charset="0"/>
-                <a:ea typeface="Calibri" pitchFamily="34" charset="-122"/>
-                <a:cs typeface="Calibri" pitchFamily="34" charset="-120"/>
-              </a:rPr>
-              <a:t>Runs entirely on your laptop — zero cost, zero API key</a:t>
-            </a:r>
-            <a:endParaRPr lang="en-US" sz="2040" dirty="0"/>
-          </a:p>
-        </p:txBody>
-      </p:sp>
-      <p:sp>
-        <p:nvSpPr>
-          <p:cNvPr id="21" name="Shape 19"/>
-          <p:cNvSpPr/>
-          <p:nvPr/>
-        </p:nvSpPr>
-        <p:spPr>
-          <a:xfrm>
-            <a:off x="640080" y="3474720"/>
-            <a:ext cx="10881360" cy="1737360"/>
+          <p:cNvPr id="20" name="Shape 18"/>
+          <p:cNvSpPr/>
+          <p:nvPr/>
+        </p:nvSpPr>
+        <p:spPr>
+          <a:xfrm>
+            <a:off x="640080" y="1554480"/>
+            <a:ext cx="10881360" cy="3840480"/>
           </a:xfrm>
           <a:prstGeom prst="roundRect">
             <a:avLst>
-              <a:gd name="adj" fmla="val 6316"/>
+              <a:gd name="adj" fmla="val 1905"/>
             </a:avLst>
           </a:prstGeom>
           <a:solidFill>
             <a:srgbClr val="121A2E"/>
           </a:solidFill>
-          <a:ln w="15875">
+          <a:ln w="9525">
             <a:solidFill>
-              <a:srgbClr val="5FE0C5"/>
+              <a:srgbClr val="5B6478"/>
             </a:solidFill>
             <a:prstDash val="solid"/>
           </a:ln>
           <a:effectLst>
-            <a:outerShdw sx="100000" sy="100000" kx="0" ky="0" algn="bl" rotWithShape="0" blurRad="101600" dist="38100" dir="2700000">
+            <a:outerShdw sx="100000" sy="100000" kx="0" ky="0" algn="bl" rotWithShape="0" blurRad="127000" dist="50800" dir="5400000">
               <a:srgbClr val="000000">
-                <a:alpha val="25000"/>
+                <a:alpha val="30000"/>
               </a:srgbClr>
             </a:outerShdw>
           </a:effectLst>
@@ -9758,14 +10778,74 @@
       </p:sp>
       <p:sp>
         <p:nvSpPr>
-          <p:cNvPr id="22" name="Text 20"/>
-          <p:cNvSpPr/>
-          <p:nvPr/>
-        </p:nvSpPr>
-        <p:spPr>
-          <a:xfrm>
-            <a:off x="914400" y="3657600"/>
-            <a:ext cx="3657600" cy="274320"/>
+          <p:cNvPr id="21" name="Shape 19"/>
+          <p:cNvSpPr/>
+          <p:nvPr/>
+        </p:nvSpPr>
+        <p:spPr>
+          <a:xfrm>
+            <a:off x="841248" y="1719072"/>
+            <a:ext cx="91440" cy="91440"/>
+          </a:xfrm>
+          <a:prstGeom prst="ellipse">
+            <a:avLst/>
+          </a:prstGeom>
+          <a:solidFill>
+            <a:srgbClr val="F2A93B"/>
+          </a:solidFill>
+          <a:ln/>
+        </p:spPr>
+      </p:sp>
+      <p:sp>
+        <p:nvSpPr>
+          <p:cNvPr id="22" name="Shape 20"/>
+          <p:cNvSpPr/>
+          <p:nvPr/>
+        </p:nvSpPr>
+        <p:spPr>
+          <a:xfrm>
+            <a:off x="1042416" y="1719072"/>
+            <a:ext cx="91440" cy="91440"/>
+          </a:xfrm>
+          <a:prstGeom prst="ellipse">
+            <a:avLst/>
+          </a:prstGeom>
+          <a:solidFill>
+            <a:srgbClr val="8B98AC"/>
+          </a:solidFill>
+          <a:ln/>
+        </p:spPr>
+      </p:sp>
+      <p:sp>
+        <p:nvSpPr>
+          <p:cNvPr id="23" name="Shape 21"/>
+          <p:cNvSpPr/>
+          <p:nvPr/>
+        </p:nvSpPr>
+        <p:spPr>
+          <a:xfrm>
+            <a:off x="1243584" y="1719072"/>
+            <a:ext cx="91440" cy="91440"/>
+          </a:xfrm>
+          <a:prstGeom prst="ellipse">
+            <a:avLst/>
+          </a:prstGeom>
+          <a:solidFill>
+            <a:srgbClr val="5FE0C5"/>
+          </a:solidFill>
+          <a:ln/>
+        </p:spPr>
+      </p:sp>
+      <p:sp>
+        <p:nvSpPr>
+          <p:cNvPr id="24" name="Text 22"/>
+          <p:cNvSpPr/>
+          <p:nvPr/>
+        </p:nvSpPr>
+        <p:spPr>
+          <a:xfrm>
+            <a:off x="9509760" y="1645920"/>
+            <a:ext cx="1828800" cy="274320"/>
           </a:xfrm>
           <a:prstGeom prst="rect">
             <a:avLst/>
@@ -9777,11 +10857,50 @@
           <a:bodyPr wrap="square" lIns="0" tIns="0" rIns="0" bIns="0" rtlCol="0" anchor="ctr"/>
           <a:lstStyle/>
           <a:p>
+            <a:pPr algn="r" indent="0" marL="0">
+              <a:buNone/>
+            </a:pPr>
+            <a:r>
+              <a:rPr lang="en-US" sz="1200" dirty="0">
+                <a:solidFill>
+                  <a:srgbClr val="8B98AC"/>
+                </a:solidFill>
+                <a:latin typeface="Courier New" pitchFamily="34" charset="0"/>
+                <a:ea typeface="Courier New" pitchFamily="34" charset="-122"/>
+                <a:cs typeface="Courier New" pitchFamily="34" charset="-120"/>
+              </a:rPr>
+              <a:t>terminal</a:t>
+            </a:r>
+            <a:endParaRPr lang="en-US" sz="1200" dirty="0"/>
+          </a:p>
+        </p:txBody>
+      </p:sp>
+      <p:sp>
+        <p:nvSpPr>
+          <p:cNvPr id="25" name="Text 23"/>
+          <p:cNvSpPr/>
+          <p:nvPr/>
+        </p:nvSpPr>
+        <p:spPr>
+          <a:xfrm>
+            <a:off x="960120" y="2057400"/>
+            <a:ext cx="10332720" cy="457200"/>
+          </a:xfrm>
+          <a:prstGeom prst="rect">
+            <a:avLst/>
+          </a:prstGeom>
+          <a:noFill/>
+          <a:ln/>
+        </p:spPr>
+        <p:txBody>
+          <a:bodyPr wrap="square" lIns="0" tIns="0" rIns="0" bIns="0" rtlCol="0" anchor="t"/>
+          <a:lstStyle/>
+          <a:p>
             <a:pPr indent="0" marL="0">
               <a:buNone/>
             </a:pPr>
             <a:r>
-              <a:rPr lang="en-US" sz="1440" spc="200" kern="0" dirty="0">
+              <a:rPr lang="en-US" sz="1680" dirty="0">
                 <a:solidFill>
                   <a:srgbClr val="5FE0C5"/>
                 </a:solidFill>
@@ -9789,22 +10908,36 @@
                 <a:ea typeface="Courier New" pitchFamily="34" charset="-122"/>
                 <a:cs typeface="Courier New" pitchFamily="34" charset="-120"/>
               </a:rPr>
-              <a:t>WHAT'S NEXT</a:t>
-            </a:r>
-            <a:endParaRPr lang="en-US" sz="1440" dirty="0"/>
-          </a:p>
-        </p:txBody>
-      </p:sp>
-      <p:sp>
-        <p:nvSpPr>
-          <p:cNvPr id="23" name="Text 21"/>
-          <p:cNvSpPr/>
-          <p:nvPr/>
-        </p:nvSpPr>
-        <p:spPr>
-          <a:xfrm>
-            <a:off x="914400" y="3977640"/>
-            <a:ext cx="10332720" cy="1143000"/>
+              <a:t>$ </a:t>
+            </a:r>
+            <a:pPr indent="0" marL="0">
+              <a:buNone/>
+            </a:pPr>
+            <a:r>
+              <a:rPr lang="en-US" sz="1680" dirty="0">
+                <a:solidFill>
+                  <a:srgbClr val="E5E9F0"/>
+                </a:solidFill>
+                <a:latin typeface="Courier New" pitchFamily="34" charset="0"/>
+                <a:ea typeface="Courier New" pitchFamily="34" charset="-122"/>
+                <a:cs typeface="Courier New" pitchFamily="34" charset="-120"/>
+              </a:rPr>
+              <a:t>curl -s -X POST http://localhost:8080/hr/ask \</a:t>
+            </a:r>
+            <a:endParaRPr lang="en-US" sz="1680" dirty="0"/>
+          </a:p>
+        </p:txBody>
+      </p:sp>
+      <p:sp>
+        <p:nvSpPr>
+          <p:cNvPr id="26" name="Text 24"/>
+          <p:cNvSpPr/>
+          <p:nvPr/>
+        </p:nvSpPr>
+        <p:spPr>
+          <a:xfrm>
+            <a:off x="960120" y="2514600"/>
+            <a:ext cx="10332720" cy="457200"/>
           </a:xfrm>
           <a:prstGeom prst="rect">
             <a:avLst/>
@@ -9817,63 +10950,394 @@
           <a:lstStyle/>
           <a:p>
             <a:pPr indent="0" marL="0">
-              <a:lnSpc>
-                <a:spcPct val="125000"/>
-              </a:lnSpc>
-              <a:buNone/>
-            </a:pPr>
-            <a:r>
-              <a:rPr lang="en-US" sz="2280" b="1" dirty="0">
+              <a:buNone/>
+            </a:pPr>
+            <a:r>
+              <a:rPr lang="en-US" sz="1680" dirty="0">
                 <a:solidFill>
                   <a:srgbClr val="E5E9F0"/>
+                </a:solidFill>
+                <a:latin typeface="Courier New" pitchFamily="34" charset="0"/>
+                <a:ea typeface="Courier New" pitchFamily="34" charset="-122"/>
+                <a:cs typeface="Courier New" pitchFamily="34" charset="-120"/>
+              </a:rPr>
+              <a:t>    -H </a:t>
+            </a:r>
+            <a:pPr indent="0" marL="0">
+              <a:buNone/>
+            </a:pPr>
+            <a:r>
+              <a:rPr lang="en-US" sz="1680" dirty="0">
+                <a:solidFill>
+                  <a:srgbClr val="5FE0C5"/>
+                </a:solidFill>
+                <a:latin typeface="Courier New" pitchFamily="34" charset="0"/>
+                <a:ea typeface="Courier New" pitchFamily="34" charset="-122"/>
+                <a:cs typeface="Courier New" pitchFamily="34" charset="-120"/>
+              </a:rPr>
+              <a:t>"Content-Type: application/json"</a:t>
+            </a:r>
+            <a:pPr indent="0" marL="0">
+              <a:buNone/>
+            </a:pPr>
+            <a:r>
+              <a:rPr lang="en-US" sz="1680" dirty="0">
+                <a:solidFill>
+                  <a:srgbClr val="E5E9F0"/>
+                </a:solidFill>
+                <a:latin typeface="Courier New" pitchFamily="34" charset="0"/>
+                <a:ea typeface="Courier New" pitchFamily="34" charset="-122"/>
+                <a:cs typeface="Courier New" pitchFamily="34" charset="-120"/>
+              </a:rPr>
+              <a:t> \</a:t>
+            </a:r>
+            <a:endParaRPr lang="en-US" sz="1680" dirty="0"/>
+          </a:p>
+        </p:txBody>
+      </p:sp>
+      <p:sp>
+        <p:nvSpPr>
+          <p:cNvPr id="27" name="Text 25"/>
+          <p:cNvSpPr/>
+          <p:nvPr/>
+        </p:nvSpPr>
+        <p:spPr>
+          <a:xfrm>
+            <a:off x="960120" y="2971800"/>
+            <a:ext cx="10332720" cy="457200"/>
+          </a:xfrm>
+          <a:prstGeom prst="rect">
+            <a:avLst/>
+          </a:prstGeom>
+          <a:noFill/>
+          <a:ln/>
+        </p:spPr>
+        <p:txBody>
+          <a:bodyPr wrap="square" lIns="0" tIns="0" rIns="0" bIns="0" rtlCol="0" anchor="t"/>
+          <a:lstStyle/>
+          <a:p>
+            <a:pPr indent="0" marL="0">
+              <a:buNone/>
+            </a:pPr>
+            <a:r>
+              <a:rPr lang="en-US" sz="1680" dirty="0">
+                <a:solidFill>
+                  <a:srgbClr val="E5E9F0"/>
+                </a:solidFill>
+                <a:latin typeface="Courier New" pitchFamily="34" charset="0"/>
+                <a:ea typeface="Courier New" pitchFamily="34" charset="-122"/>
+                <a:cs typeface="Courier New" pitchFamily="34" charset="-120"/>
+              </a:rPr>
+              <a:t>    -d </a:t>
+            </a:r>
+            <a:pPr indent="0" marL="0">
+              <a:buNone/>
+            </a:pPr>
+            <a:r>
+              <a:rPr lang="en-US" sz="1680" dirty="0">
+                <a:solidFill>
+                  <a:srgbClr val="5FE0C5"/>
+                </a:solidFill>
+                <a:latin typeface="Courier New" pitchFamily="34" charset="0"/>
+                <a:ea typeface="Courier New" pitchFamily="34" charset="-122"/>
+                <a:cs typeface="Courier New" pitchFamily="34" charset="-120"/>
+              </a:rPr>
+              <a:t>'{"question": "What is the parental leave policy?"}'</a:t>
+            </a:r>
+            <a:endParaRPr lang="en-US" sz="1680" dirty="0"/>
+          </a:p>
+        </p:txBody>
+      </p:sp>
+      <p:sp>
+        <p:nvSpPr>
+          <p:cNvPr id="28" name="Text 26"/>
+          <p:cNvSpPr/>
+          <p:nvPr/>
+        </p:nvSpPr>
+        <p:spPr>
+          <a:xfrm>
+            <a:off x="960120" y="3429000"/>
+            <a:ext cx="10332720" cy="457200"/>
+          </a:xfrm>
+          <a:prstGeom prst="rect">
+            <a:avLst/>
+          </a:prstGeom>
+          <a:noFill/>
+          <a:ln/>
+        </p:spPr>
+        <p:txBody>
+          <a:bodyPr wrap="square" lIns="0" tIns="0" rIns="0" bIns="0" rtlCol="0" anchor="t"/>
+          <a:lstStyle/>
+          <a:p>
+            <a:pPr indent="0" marL="0">
+              <a:buNone/>
+            </a:pPr>
+            <a:endParaRPr lang="en-US" sz="1680" dirty="0"/>
+          </a:p>
+        </p:txBody>
+      </p:sp>
+      <p:sp>
+        <p:nvSpPr>
+          <p:cNvPr id="29" name="Text 27"/>
+          <p:cNvSpPr/>
+          <p:nvPr/>
+        </p:nvSpPr>
+        <p:spPr>
+          <a:xfrm>
+            <a:off x="960120" y="3886200"/>
+            <a:ext cx="10332720" cy="457200"/>
+          </a:xfrm>
+          <a:prstGeom prst="rect">
+            <a:avLst/>
+          </a:prstGeom>
+          <a:noFill/>
+          <a:ln/>
+        </p:spPr>
+        <p:txBody>
+          <a:bodyPr wrap="square" lIns="0" tIns="0" rIns="0" bIns="0" rtlCol="0" anchor="t"/>
+          <a:lstStyle/>
+          <a:p>
+            <a:pPr indent="0" marL="0">
+              <a:buNone/>
+            </a:pPr>
+            <a:r>
+              <a:rPr lang="en-US" sz="1680" dirty="0">
+                <a:solidFill>
+                  <a:srgbClr val="E5E9F0"/>
+                </a:solidFill>
+                <a:latin typeface="Courier New" pitchFamily="34" charset="0"/>
+                <a:ea typeface="Courier New" pitchFamily="34" charset="-122"/>
+                <a:cs typeface="Courier New" pitchFamily="34" charset="-120"/>
+              </a:rPr>
+              <a:t>{</a:t>
+            </a:r>
+            <a:endParaRPr lang="en-US" sz="1680" dirty="0"/>
+          </a:p>
+        </p:txBody>
+      </p:sp>
+      <p:sp>
+        <p:nvSpPr>
+          <p:cNvPr id="30" name="Text 28"/>
+          <p:cNvSpPr/>
+          <p:nvPr/>
+        </p:nvSpPr>
+        <p:spPr>
+          <a:xfrm>
+            <a:off x="960120" y="4343400"/>
+            <a:ext cx="10332720" cy="457200"/>
+          </a:xfrm>
+          <a:prstGeom prst="rect">
+            <a:avLst/>
+          </a:prstGeom>
+          <a:noFill/>
+          <a:ln/>
+        </p:spPr>
+        <p:txBody>
+          <a:bodyPr wrap="square" lIns="0" tIns="0" rIns="0" bIns="0" rtlCol="0" anchor="t"/>
+          <a:lstStyle/>
+          <a:p>
+            <a:pPr indent="0" marL="0">
+              <a:buNone/>
+            </a:pPr>
+            <a:r>
+              <a:rPr lang="en-US" sz="1680" dirty="0">
+                <a:solidFill>
+                  <a:srgbClr val="F2A93B"/>
+                </a:solidFill>
+                <a:latin typeface="Courier New" pitchFamily="34" charset="0"/>
+                <a:ea typeface="Courier New" pitchFamily="34" charset="-122"/>
+                <a:cs typeface="Courier New" pitchFamily="34" charset="-120"/>
+              </a:rPr>
+              <a:t>  "question"</a:t>
+            </a:r>
+            <a:pPr indent="0" marL="0">
+              <a:buNone/>
+            </a:pPr>
+            <a:r>
+              <a:rPr lang="en-US" sz="1680" dirty="0">
+                <a:solidFill>
+                  <a:srgbClr val="E5E9F0"/>
+                </a:solidFill>
+                <a:latin typeface="Courier New" pitchFamily="34" charset="0"/>
+                <a:ea typeface="Courier New" pitchFamily="34" charset="-122"/>
+                <a:cs typeface="Courier New" pitchFamily="34" charset="-120"/>
+              </a:rPr>
+              <a:t>: </a:t>
+            </a:r>
+            <a:pPr indent="0" marL="0">
+              <a:buNone/>
+            </a:pPr>
+            <a:r>
+              <a:rPr lang="en-US" sz="1680" dirty="0">
+                <a:solidFill>
+                  <a:srgbClr val="5FE0C5"/>
+                </a:solidFill>
+                <a:latin typeface="Courier New" pitchFamily="34" charset="0"/>
+                <a:ea typeface="Courier New" pitchFamily="34" charset="-122"/>
+                <a:cs typeface="Courier New" pitchFamily="34" charset="-120"/>
+              </a:rPr>
+              <a:t>"What is the parental leave policy?"</a:t>
+            </a:r>
+            <a:pPr indent="0" marL="0">
+              <a:buNone/>
+            </a:pPr>
+            <a:r>
+              <a:rPr lang="en-US" sz="1680" dirty="0">
+                <a:solidFill>
+                  <a:srgbClr val="E5E9F0"/>
+                </a:solidFill>
+                <a:latin typeface="Courier New" pitchFamily="34" charset="0"/>
+                <a:ea typeface="Courier New" pitchFamily="34" charset="-122"/>
+                <a:cs typeface="Courier New" pitchFamily="34" charset="-120"/>
+              </a:rPr>
+              <a:t>,</a:t>
+            </a:r>
+            <a:endParaRPr lang="en-US" sz="1680" dirty="0"/>
+          </a:p>
+        </p:txBody>
+      </p:sp>
+      <p:sp>
+        <p:nvSpPr>
+          <p:cNvPr id="31" name="Text 29"/>
+          <p:cNvSpPr/>
+          <p:nvPr/>
+        </p:nvSpPr>
+        <p:spPr>
+          <a:xfrm>
+            <a:off x="960120" y="4800600"/>
+            <a:ext cx="10332720" cy="457200"/>
+          </a:xfrm>
+          <a:prstGeom prst="rect">
+            <a:avLst/>
+          </a:prstGeom>
+          <a:noFill/>
+          <a:ln/>
+        </p:spPr>
+        <p:txBody>
+          <a:bodyPr wrap="square" lIns="0" tIns="0" rIns="0" bIns="0" rtlCol="0" anchor="t"/>
+          <a:lstStyle/>
+          <a:p>
+            <a:pPr indent="0" marL="0">
+              <a:buNone/>
+            </a:pPr>
+            <a:r>
+              <a:rPr lang="en-US" sz="1680" dirty="0">
+                <a:solidFill>
+                  <a:srgbClr val="F2A93B"/>
+                </a:solidFill>
+                <a:latin typeface="Courier New" pitchFamily="34" charset="0"/>
+                <a:ea typeface="Courier New" pitchFamily="34" charset="-122"/>
+                <a:cs typeface="Courier New" pitchFamily="34" charset="-120"/>
+              </a:rPr>
+              <a:t>  "answer"</a:t>
+            </a:r>
+            <a:pPr indent="0" marL="0">
+              <a:buNone/>
+            </a:pPr>
+            <a:r>
+              <a:rPr lang="en-US" sz="1680" dirty="0">
+                <a:solidFill>
+                  <a:srgbClr val="E5E9F0"/>
+                </a:solidFill>
+                <a:latin typeface="Courier New" pitchFamily="34" charset="0"/>
+                <a:ea typeface="Courier New" pitchFamily="34" charset="-122"/>
+                <a:cs typeface="Courier New" pitchFamily="34" charset="-120"/>
+              </a:rPr>
+              <a:t>: </a:t>
+            </a:r>
+            <a:pPr indent="0" marL="0">
+              <a:buNone/>
+            </a:pPr>
+            <a:r>
+              <a:rPr lang="en-US" sz="1680" dirty="0">
+                <a:solidFill>
+                  <a:srgbClr val="5FE0C5"/>
+                </a:solidFill>
+                <a:latin typeface="Courier New" pitchFamily="34" charset="0"/>
+                <a:ea typeface="Courier New" pitchFamily="34" charset="-122"/>
+                <a:cs typeface="Courier New" pitchFamily="34" charset="-120"/>
+              </a:rPr>
+              <a:t>"Primary caregivers receive 16 weeks fully paid..."</a:t>
+            </a:r>
+            <a:endParaRPr lang="en-US" sz="1680" dirty="0"/>
+          </a:p>
+        </p:txBody>
+      </p:sp>
+      <p:sp>
+        <p:nvSpPr>
+          <p:cNvPr id="32" name="Text 30"/>
+          <p:cNvSpPr/>
+          <p:nvPr/>
+        </p:nvSpPr>
+        <p:spPr>
+          <a:xfrm>
+            <a:off x="960120" y="5257800"/>
+            <a:ext cx="10332720" cy="457200"/>
+          </a:xfrm>
+          <a:prstGeom prst="rect">
+            <a:avLst/>
+          </a:prstGeom>
+          <a:noFill/>
+          <a:ln/>
+        </p:spPr>
+        <p:txBody>
+          <a:bodyPr wrap="square" lIns="0" tIns="0" rIns="0" bIns="0" rtlCol="0" anchor="t"/>
+          <a:lstStyle/>
+          <a:p>
+            <a:pPr indent="0" marL="0">
+              <a:buNone/>
+            </a:pPr>
+            <a:r>
+              <a:rPr lang="en-US" sz="1680" dirty="0">
+                <a:solidFill>
+                  <a:srgbClr val="E5E9F0"/>
+                </a:solidFill>
+                <a:latin typeface="Courier New" pitchFamily="34" charset="0"/>
+                <a:ea typeface="Courier New" pitchFamily="34" charset="-122"/>
+                <a:cs typeface="Courier New" pitchFamily="34" charset="-120"/>
+              </a:rPr>
+              <a:t>}</a:t>
+            </a:r>
+            <a:endParaRPr lang="en-US" sz="1680" dirty="0"/>
+          </a:p>
+        </p:txBody>
+      </p:sp>
+      <p:sp>
+        <p:nvSpPr>
+          <p:cNvPr id="33" name="Text 31"/>
+          <p:cNvSpPr/>
+          <p:nvPr/>
+        </p:nvSpPr>
+        <p:spPr>
+          <a:xfrm>
+            <a:off x="0" y="5715000"/>
+            <a:ext cx="12161520" cy="365760"/>
+          </a:xfrm>
+          <a:prstGeom prst="rect">
+            <a:avLst/>
+          </a:prstGeom>
+          <a:noFill/>
+          <a:ln/>
+        </p:spPr>
+        <p:txBody>
+          <a:bodyPr wrap="square" lIns="0" tIns="0" rIns="0" bIns="0" rtlCol="0" anchor="ctr"/>
+          <a:lstStyle/>
+          <a:p>
+            <a:pPr algn="ctr" indent="0" marL="0">
+              <a:buNone/>
+            </a:pPr>
+            <a:r>
+              <a:rPr lang="en-US" sz="1680" i="1" dirty="0">
+                <a:solidFill>
+                  <a:srgbClr val="8B98AC"/>
                 </a:solidFill>
                 <a:latin typeface="Calibri" pitchFamily="34" charset="0"/>
                 <a:ea typeface="Calibri" pitchFamily="34" charset="-122"/>
                 <a:cs typeface="Calibri" pitchFamily="34" charset="-120"/>
               </a:rPr>
-              <a:t>Chapter 2 — Core Concepts</a:t>
-            </a:r>
-            <a:endParaRPr lang="en-US" sz="2280" dirty="0"/>
-          </a:p>
-          <a:p>
-            <a:pPr indent="0" marL="0">
-              <a:lnSpc>
-                <a:spcPct val="125000"/>
-              </a:lnSpc>
-              <a:buNone/>
-            </a:pPr>
-            <a:r>
-              <a:rPr lang="en-US" sz="1740" dirty="0">
-                <a:solidFill>
-                  <a:srgbClr val="B8C0D0"/>
-                </a:solidFill>
-                <a:latin typeface="Calibri" pitchFamily="34" charset="0"/>
-                <a:ea typeface="Calibri" pitchFamily="34" charset="-122"/>
-                <a:cs typeface="Calibri" pitchFamily="34" charset="-120"/>
-              </a:rPr>
-              <a:t>Tokens, Messages, and ChatOptions — what actually travels</a:t>
-            </a:r>
-            <a:endParaRPr lang="en-US" sz="2280" dirty="0"/>
-          </a:p>
-          <a:p>
-            <a:pPr indent="0" marL="0">
-              <a:lnSpc>
-                <a:spcPct val="125000"/>
-              </a:lnSpc>
-              <a:buNone/>
-            </a:pPr>
-            <a:r>
-              <a:rPr lang="en-US" sz="1740" dirty="0">
-                <a:solidFill>
-                  <a:srgbClr val="B8C0D0"/>
-                </a:solidFill>
-                <a:latin typeface="Calibri" pitchFamily="34" charset="0"/>
-                <a:ea typeface="Calibri" pitchFamily="34" charset="-122"/>
-                <a:cs typeface="Calibri" pitchFamily="34" charset="-120"/>
-              </a:rPr>
-              <a:t>between your app and the model on every call.</a:t>
-            </a:r>
-            <a:endParaRPr lang="en-US" sz="2280" dirty="0"/>
+              <a:t>One request. A real answer. No OpenAI account required.</a:t>
+            </a:r>
+            <a:endParaRPr lang="en-US" sz="1680" dirty="0"/>
           </a:p>
         </p:txBody>
       </p:sp>
@@ -10307,7 +11771,7 @@
                 <a:ea typeface="Courier New" pitchFamily="34" charset="-122"/>
                 <a:cs typeface="Courier New" pitchFamily="34" charset="-120"/>
               </a:rPr>
-              <a:t>9 / 9</a:t>
+              <a:t>9 / 10</a:t>
             </a:r>
             <a:endParaRPr lang="en-US" sz="1080" dirty="0"/>
           </a:p>
@@ -10346,7 +11810,7 @@
                 <a:ea typeface="Courier New" pitchFamily="34" charset="-122"/>
                 <a:cs typeface="Courier New" pitchFamily="34" charset="-120"/>
               </a:rPr>
-              <a:t>CREDITS &amp; THANKS</a:t>
+              <a:t>RECAP</a:t>
             </a:r>
             <a:endParaRPr lang="en-US" sz="1440" dirty="0"/>
           </a:p>
@@ -10385,7 +11849,7 @@
                 <a:ea typeface="Courier New" pitchFamily="34" charset="-122"/>
                 <a:cs typeface="Courier New" pitchFamily="34" charset="-120"/>
               </a:rPr>
-              <a:t>This isn't my merit</a:t>
+              <a:t>What we built</a:t>
             </a:r>
             <a:endParaRPr lang="en-US" sz="3360" dirty="0"/>
           </a:p>
@@ -10399,37 +11863,80 @@
         </p:nvSpPr>
         <p:spPr>
           <a:xfrm>
-            <a:off x="640080" y="1371600"/>
-            <a:ext cx="10881360" cy="731520"/>
-          </a:xfrm>
-          <a:prstGeom prst="rect">
-            <a:avLst/>
-          </a:prstGeom>
-          <a:noFill/>
-          <a:ln/>
-        </p:spPr>
-        <p:txBody>
-          <a:bodyPr wrap="square" lIns="0" tIns="0" rIns="0" bIns="0" rtlCol="0" anchor="ctr"/>
-          <a:lstStyle/>
-          <a:p>
-            <a:pPr algn="ctr" indent="0" marL="0">
-              <a:lnSpc>
-                <a:spcPct val="120000"/>
-              </a:lnSpc>
-              <a:buNone/>
-            </a:pPr>
-            <a:r>
-              <a:rPr lang="en-US" sz="1920" dirty="0">
-                <a:solidFill>
-                  <a:srgbClr val="B8C0D0"/>
+            <a:off x="640080" y="1463040"/>
+            <a:ext cx="10881360" cy="1737360"/>
+          </a:xfrm>
+          <a:prstGeom prst="rect">
+            <a:avLst/>
+          </a:prstGeom>
+          <a:noFill/>
+          <a:ln/>
+        </p:spPr>
+        <p:txBody>
+          <a:bodyPr wrap="square" lIns="0" tIns="0" rIns="0" bIns="0" rtlCol="0" anchor="t"/>
+          <a:lstStyle/>
+          <a:p>
+            <a:pPr marL="342900" indent="-342900">
+              <a:spcAft>
+                <a:spcPts val="1400"/>
+              </a:spcAft>
+              <a:buSzPct val="100000"/>
+              <a:buChar char="•"/>
+            </a:pPr>
+            <a:r>
+              <a:rPr lang="en-US" sz="2040" dirty="0">
+                <a:solidFill>
+                  <a:srgbClr val="E5E9F0"/>
                 </a:solidFill>
                 <a:latin typeface="Calibri" pitchFamily="34" charset="0"/>
                 <a:ea typeface="Calibri" pitchFamily="34" charset="-122"/>
                 <a:cs typeface="Calibri" pitchFamily="34" charset="-120"/>
               </a:rPr>
-              <a:t>Everything in this series is built on the work of open-source projects and their communities. I only learned from them and shared what I built.</a:t>
-            </a:r>
-            <a:endParaRPr lang="en-US" sz="1920" dirty="0"/>
+              <a:t>A working AI Q&amp;A endpoint — /hr/ask</a:t>
+            </a:r>
+            <a:endParaRPr lang="en-US" sz="2040" dirty="0"/>
+          </a:p>
+          <a:p>
+            <a:pPr marL="342900" indent="-342900">
+              <a:spcAft>
+                <a:spcPts val="1400"/>
+              </a:spcAft>
+              <a:buSzPct val="100000"/>
+              <a:buChar char="•"/>
+            </a:pPr>
+            <a:r>
+              <a:rPr lang="en-US" sz="2040" dirty="0">
+                <a:solidFill>
+                  <a:srgbClr val="E5E9F0"/>
+                </a:solidFill>
+                <a:latin typeface="Calibri" pitchFamily="34" charset="0"/>
+                <a:ea typeface="Calibri" pitchFamily="34" charset="-122"/>
+                <a:cs typeface="Calibri" pitchFamily="34" charset="-120"/>
+              </a:rPr>
+              <a:t>Powered by Spring AI's ChatClient + Ollama's llama3.2</a:t>
+            </a:r>
+            <a:endParaRPr lang="en-US" sz="2040" dirty="0"/>
+          </a:p>
+          <a:p>
+            <a:pPr marL="342900" indent="-342900">
+              <a:spcAft>
+                <a:spcPts val="1400"/>
+              </a:spcAft>
+              <a:buSzPct val="100000"/>
+              <a:buChar char="•"/>
+            </a:pPr>
+            <a:r>
+              <a:rPr lang="en-US" sz="2040" dirty="0">
+                <a:solidFill>
+                  <a:srgbClr val="E5E9F0"/>
+                </a:solidFill>
+                <a:latin typeface="Calibri" pitchFamily="34" charset="0"/>
+                <a:ea typeface="Calibri" pitchFamily="34" charset="-122"/>
+                <a:cs typeface="Calibri" pitchFamily="34" charset="-120"/>
+              </a:rPr>
+              <a:t>Runs entirely on your laptop — zero cost, zero API key</a:t>
+            </a:r>
+            <a:endParaRPr lang="en-US" sz="2040" dirty="0"/>
           </a:p>
         </p:txBody>
       </p:sp>
@@ -10441,18 +11948,18 @@
         </p:nvSpPr>
         <p:spPr>
           <a:xfrm>
-            <a:off x="822960" y="2423160"/>
-            <a:ext cx="5029200" cy="2011680"/>
+            <a:off x="640080" y="3474720"/>
+            <a:ext cx="10881360" cy="1737360"/>
           </a:xfrm>
           <a:prstGeom prst="roundRect">
             <a:avLst>
-              <a:gd name="adj" fmla="val 5455"/>
+              <a:gd name="adj" fmla="val 6316"/>
             </a:avLst>
           </a:prstGeom>
           <a:solidFill>
             <a:srgbClr val="121A2E"/>
           </a:solidFill>
-          <a:ln w="19050">
+          <a:ln w="15875">
             <a:solidFill>
               <a:srgbClr val="5FE0C5"/>
             </a:solidFill>
@@ -10475,8 +11982,8 @@
         </p:nvSpPr>
         <p:spPr>
           <a:xfrm>
-            <a:off x="1143000" y="2697480"/>
-            <a:ext cx="4389120" cy="548640"/>
+            <a:off x="914400" y="3657600"/>
+            <a:ext cx="3657600" cy="274320"/>
           </a:xfrm>
           <a:prstGeom prst="rect">
             <a:avLst/>
@@ -10492,7 +11999,7 @@
               <a:buNone/>
             </a:pPr>
             <a:r>
-              <a:rPr lang="en-US" sz="2640" b="1" dirty="0">
+              <a:rPr lang="en-US" sz="1440" spc="200" kern="0" dirty="0">
                 <a:solidFill>
                   <a:srgbClr val="5FE0C5"/>
                 </a:solidFill>
@@ -10500,9 +12007,9 @@
                 <a:ea typeface="Courier New" pitchFamily="34" charset="-122"/>
                 <a:cs typeface="Courier New" pitchFamily="34" charset="-120"/>
               </a:rPr>
-              <a:t>Spring AI</a:t>
-            </a:r>
-            <a:endParaRPr lang="en-US" sz="2640" dirty="0"/>
+              <a:t>WHAT'S NEXT</a:t>
+            </a:r>
+            <a:endParaRPr lang="en-US" sz="1440" dirty="0"/>
           </a:p>
         </p:txBody>
       </p:sp>
@@ -10514,24 +12021,27 @@
         </p:nvSpPr>
         <p:spPr>
           <a:xfrm>
-            <a:off x="1143000" y="3337560"/>
-            <a:ext cx="4389120" cy="457200"/>
-          </a:xfrm>
-          <a:prstGeom prst="rect">
-            <a:avLst/>
-          </a:prstGeom>
-          <a:noFill/>
-          <a:ln/>
-        </p:spPr>
-        <p:txBody>
-          <a:bodyPr wrap="square" lIns="0" tIns="0" rIns="0" bIns="0" rtlCol="0" anchor="ctr"/>
+            <a:off x="914400" y="3977640"/>
+            <a:ext cx="10332720" cy="1143000"/>
+          </a:xfrm>
+          <a:prstGeom prst="rect">
+            <a:avLst/>
+          </a:prstGeom>
+          <a:noFill/>
+          <a:ln/>
+        </p:spPr>
+        <p:txBody>
+          <a:bodyPr wrap="square" lIns="0" tIns="0" rIns="0" bIns="0" rtlCol="0" anchor="t"/>
           <a:lstStyle/>
           <a:p>
             <a:pPr indent="0" marL="0">
-              <a:buNone/>
-            </a:pPr>
-            <a:r>
-              <a:rPr lang="en-US" sz="1560" dirty="0">
+              <a:lnSpc>
+                <a:spcPct val="125000"/>
+              </a:lnSpc>
+              <a:buNone/>
+            </a:pPr>
+            <a:r>
+              <a:rPr lang="en-US" sz="2280" b="1" dirty="0">
                 <a:solidFill>
                   <a:srgbClr val="E5E9F0"/>
                 </a:solidFill>
@@ -10539,377 +12049,49 @@
                 <a:ea typeface="Calibri" pitchFamily="34" charset="-122"/>
                 <a:cs typeface="Calibri" pitchFamily="34" charset="-120"/>
               </a:rPr>
-              <a:t>The AI integration layer for Spring</a:t>
-            </a:r>
-            <a:endParaRPr lang="en-US" sz="1560" dirty="0"/>
-          </a:p>
-        </p:txBody>
-      </p:sp>
-      <p:sp>
-        <p:nvSpPr>
-          <p:cNvPr id="24" name="Text 22"/>
-          <p:cNvSpPr/>
-          <p:nvPr/>
-        </p:nvSpPr>
-        <p:spPr>
-          <a:xfrm>
-            <a:off x="1143000" y="3840480"/>
-            <a:ext cx="4389120" cy="365760"/>
-          </a:xfrm>
-          <a:prstGeom prst="rect">
-            <a:avLst/>
-          </a:prstGeom>
-          <a:noFill/>
-          <a:ln/>
-        </p:spPr>
-        <p:txBody>
-          <a:bodyPr wrap="square" lIns="0" tIns="0" rIns="0" bIns="0" rtlCol="0" anchor="ctr"/>
-          <a:lstStyle/>
+              <a:t>Chapter 2 — Core Concepts</a:t>
+            </a:r>
+            <a:endParaRPr lang="en-US" sz="2280" dirty="0"/>
+          </a:p>
           <a:p>
             <a:pPr indent="0" marL="0">
-              <a:buNone/>
-            </a:pPr>
-            <a:r>
-              <a:rPr lang="en-US" sz="1440" dirty="0">
-                <a:solidFill>
-                  <a:srgbClr val="8B98AC"/>
-                </a:solidFill>
-                <a:latin typeface="Courier New" pitchFamily="34" charset="0"/>
-                <a:ea typeface="Courier New" pitchFamily="34" charset="-122"/>
-                <a:cs typeface="Courier New" pitchFamily="34" charset="-120"/>
-              </a:rPr>
-              <a:t>spring.io/projects/spring-ai</a:t>
-            </a:r>
-            <a:endParaRPr lang="en-US" sz="1440" dirty="0"/>
-          </a:p>
-        </p:txBody>
-      </p:sp>
-      <p:sp>
-        <p:nvSpPr>
-          <p:cNvPr id="25" name="Shape 23"/>
-          <p:cNvSpPr/>
-          <p:nvPr/>
-        </p:nvSpPr>
-        <p:spPr>
-          <a:xfrm>
-            <a:off x="6309360" y="2423160"/>
-            <a:ext cx="5029200" cy="2011680"/>
-          </a:xfrm>
-          <a:prstGeom prst="roundRect">
-            <a:avLst>
-              <a:gd name="adj" fmla="val 5455"/>
-            </a:avLst>
-          </a:prstGeom>
-          <a:solidFill>
-            <a:srgbClr val="121A2E"/>
-          </a:solidFill>
-          <a:ln w="19050">
-            <a:solidFill>
-              <a:srgbClr val="F2A93B"/>
-            </a:solidFill>
-            <a:prstDash val="solid"/>
-          </a:ln>
-          <a:effectLst>
-            <a:outerShdw sx="100000" sy="100000" kx="0" ky="0" algn="bl" rotWithShape="0" blurRad="101600" dist="38100" dir="2700000">
-              <a:srgbClr val="000000">
-                <a:alpha val="25000"/>
-              </a:srgbClr>
-            </a:outerShdw>
-          </a:effectLst>
-        </p:spPr>
-      </p:sp>
-      <p:sp>
-        <p:nvSpPr>
-          <p:cNvPr id="26" name="Text 24"/>
-          <p:cNvSpPr/>
-          <p:nvPr/>
-        </p:nvSpPr>
-        <p:spPr>
-          <a:xfrm>
-            <a:off x="6629400" y="2697480"/>
-            <a:ext cx="4389120" cy="548640"/>
-          </a:xfrm>
-          <a:prstGeom prst="rect">
-            <a:avLst/>
-          </a:prstGeom>
-          <a:noFill/>
-          <a:ln/>
-        </p:spPr>
-        <p:txBody>
-          <a:bodyPr wrap="square" lIns="0" tIns="0" rIns="0" bIns="0" rtlCol="0" anchor="ctr"/>
-          <a:lstStyle/>
-          <a:p>
-            <a:pPr indent="0" marL="0">
-              <a:buNone/>
-            </a:pPr>
-            <a:r>
-              <a:rPr lang="en-US" sz="2640" b="1" dirty="0">
-                <a:solidFill>
-                  <a:srgbClr val="F2A93B"/>
-                </a:solidFill>
-                <a:latin typeface="Courier New" pitchFamily="34" charset="0"/>
-                <a:ea typeface="Courier New" pitchFamily="34" charset="-122"/>
-                <a:cs typeface="Courier New" pitchFamily="34" charset="-120"/>
-              </a:rPr>
-              <a:t>Ollama</a:t>
-            </a:r>
-            <a:endParaRPr lang="en-US" sz="2640" dirty="0"/>
-          </a:p>
-        </p:txBody>
-      </p:sp>
-      <p:sp>
-        <p:nvSpPr>
-          <p:cNvPr id="27" name="Text 25"/>
-          <p:cNvSpPr/>
-          <p:nvPr/>
-        </p:nvSpPr>
-        <p:spPr>
-          <a:xfrm>
-            <a:off x="6629400" y="3337560"/>
-            <a:ext cx="4389120" cy="457200"/>
-          </a:xfrm>
-          <a:prstGeom prst="rect">
-            <a:avLst/>
-          </a:prstGeom>
-          <a:noFill/>
-          <a:ln/>
-        </p:spPr>
-        <p:txBody>
-          <a:bodyPr wrap="square" lIns="0" tIns="0" rIns="0" bIns="0" rtlCol="0" anchor="ctr"/>
-          <a:lstStyle/>
-          <a:p>
-            <a:pPr indent="0" marL="0">
-              <a:buNone/>
-            </a:pPr>
-            <a:r>
-              <a:rPr lang="en-US" sz="1560" dirty="0">
-                <a:solidFill>
-                  <a:srgbClr val="E5E9F0"/>
+              <a:lnSpc>
+                <a:spcPct val="125000"/>
+              </a:lnSpc>
+              <a:buNone/>
+            </a:pPr>
+            <a:r>
+              <a:rPr lang="en-US" sz="1740" dirty="0">
+                <a:solidFill>
+                  <a:srgbClr val="B8C0D0"/>
                 </a:solidFill>
                 <a:latin typeface="Calibri" pitchFamily="34" charset="0"/>
                 <a:ea typeface="Calibri" pitchFamily="34" charset="-122"/>
                 <a:cs typeface="Calibri" pitchFamily="34" charset="-120"/>
               </a:rPr>
-              <a:t>Run open LLMs locally</a:t>
-            </a:r>
-            <a:endParaRPr lang="en-US" sz="1560" dirty="0"/>
-          </a:p>
-        </p:txBody>
-      </p:sp>
-      <p:sp>
-        <p:nvSpPr>
-          <p:cNvPr id="28" name="Text 26"/>
-          <p:cNvSpPr/>
-          <p:nvPr/>
-        </p:nvSpPr>
-        <p:spPr>
-          <a:xfrm>
-            <a:off x="6629400" y="3840480"/>
-            <a:ext cx="4389120" cy="365760"/>
-          </a:xfrm>
-          <a:prstGeom prst="rect">
-            <a:avLst/>
-          </a:prstGeom>
-          <a:noFill/>
-          <a:ln/>
-        </p:spPr>
-        <p:txBody>
-          <a:bodyPr wrap="square" lIns="0" tIns="0" rIns="0" bIns="0" rtlCol="0" anchor="ctr"/>
-          <a:lstStyle/>
+              <a:t>Tokens, Messages, and ChatOptions — what actually travels</a:t>
+            </a:r>
+            <a:endParaRPr lang="en-US" sz="2280" dirty="0"/>
+          </a:p>
           <a:p>
             <a:pPr indent="0" marL="0">
-              <a:buNone/>
-            </a:pPr>
-            <a:r>
-              <a:rPr lang="en-US" sz="1440" dirty="0">
-                <a:solidFill>
-                  <a:srgbClr val="8B98AC"/>
-                </a:solidFill>
-                <a:latin typeface="Courier New" pitchFamily="34" charset="0"/>
-                <a:ea typeface="Courier New" pitchFamily="34" charset="-122"/>
-                <a:cs typeface="Courier New" pitchFamily="34" charset="-120"/>
-              </a:rPr>
-              <a:t>ollama.com</a:t>
-            </a:r>
-            <a:endParaRPr lang="en-US" sz="1440" dirty="0"/>
-          </a:p>
-        </p:txBody>
-      </p:sp>
-      <p:sp>
-        <p:nvSpPr>
-          <p:cNvPr id="29" name="Shape 27"/>
-          <p:cNvSpPr/>
-          <p:nvPr/>
-        </p:nvSpPr>
-        <p:spPr>
-          <a:xfrm>
-            <a:off x="4251960" y="4892040"/>
-            <a:ext cx="3657600" cy="0"/>
-          </a:xfrm>
-          <a:prstGeom prst="line">
-            <a:avLst/>
-          </a:prstGeom>
-          <a:noFill/>
-          <a:ln w="12700">
-            <a:solidFill>
-              <a:srgbClr val="5B6478">
-                <a:alpha val="70000"/>
-              </a:srgbClr>
-            </a:solidFill>
-            <a:prstDash val="solid"/>
-          </a:ln>
-        </p:spPr>
-      </p:sp>
-      <p:sp>
-        <p:nvSpPr>
-          <p:cNvPr id="30" name="Shape 28"/>
-          <p:cNvSpPr/>
-          <p:nvPr/>
-        </p:nvSpPr>
-        <p:spPr>
-          <a:xfrm>
-            <a:off x="4210812" y="4850892"/>
-            <a:ext cx="82296" cy="82296"/>
-          </a:xfrm>
-          <a:prstGeom prst="ellipse">
-            <a:avLst/>
-          </a:prstGeom>
-          <a:solidFill>
-            <a:srgbClr val="0A0F1C"/>
-          </a:solidFill>
-          <a:ln w="19050">
-            <a:solidFill>
-              <a:srgbClr val="F2A93B"/>
-            </a:solidFill>
-            <a:prstDash val="solid"/>
-          </a:ln>
-        </p:spPr>
-      </p:sp>
-      <p:sp>
-        <p:nvSpPr>
-          <p:cNvPr id="31" name="Shape 29"/>
-          <p:cNvSpPr/>
-          <p:nvPr/>
-        </p:nvSpPr>
-        <p:spPr>
-          <a:xfrm>
-            <a:off x="6039612" y="4850892"/>
-            <a:ext cx="82296" cy="82296"/>
-          </a:xfrm>
-          <a:prstGeom prst="ellipse">
-            <a:avLst/>
-          </a:prstGeom>
-          <a:solidFill>
-            <a:srgbClr val="0A0F1C"/>
-          </a:solidFill>
-          <a:ln w="19050">
-            <a:solidFill>
-              <a:srgbClr val="8B98AC"/>
-            </a:solidFill>
-            <a:prstDash val="solid"/>
-          </a:ln>
-        </p:spPr>
-      </p:sp>
-      <p:sp>
-        <p:nvSpPr>
-          <p:cNvPr id="32" name="Shape 30"/>
-          <p:cNvSpPr/>
-          <p:nvPr/>
-        </p:nvSpPr>
-        <p:spPr>
-          <a:xfrm>
-            <a:off x="7868412" y="4850892"/>
-            <a:ext cx="82296" cy="82296"/>
-          </a:xfrm>
-          <a:prstGeom prst="ellipse">
-            <a:avLst/>
-          </a:prstGeom>
-          <a:solidFill>
-            <a:srgbClr val="0A0F1C"/>
-          </a:solidFill>
-          <a:ln w="19050">
-            <a:solidFill>
-              <a:srgbClr val="5FE0C5"/>
-            </a:solidFill>
-            <a:prstDash val="solid"/>
-          </a:ln>
-        </p:spPr>
-      </p:sp>
-      <p:sp>
-        <p:nvSpPr>
-          <p:cNvPr id="33" name="Text 31"/>
-          <p:cNvSpPr/>
-          <p:nvPr/>
-        </p:nvSpPr>
-        <p:spPr>
-          <a:xfrm>
-            <a:off x="0" y="5120640"/>
-            <a:ext cx="12161520" cy="457200"/>
-          </a:xfrm>
-          <a:prstGeom prst="rect">
-            <a:avLst/>
-          </a:prstGeom>
-          <a:noFill/>
-          <a:ln/>
-        </p:spPr>
-        <p:txBody>
-          <a:bodyPr wrap="square" lIns="0" tIns="0" rIns="0" bIns="0" rtlCol="0" anchor="ctr"/>
-          <a:lstStyle/>
-          <a:p>
-            <a:pPr algn="ctr" indent="0" marL="0">
-              <a:buNone/>
-            </a:pPr>
-            <a:r>
-              <a:rPr lang="en-US" sz="1680" dirty="0">
-                <a:solidFill>
-                  <a:srgbClr val="E5E9F0"/>
+              <a:lnSpc>
+                <a:spcPct val="125000"/>
+              </a:lnSpc>
+              <a:buNone/>
+            </a:pPr>
+            <a:r>
+              <a:rPr lang="en-US" sz="1740" dirty="0">
+                <a:solidFill>
+                  <a:srgbClr val="B8C0D0"/>
                 </a:solidFill>
                 <a:latin typeface="Calibri" pitchFamily="34" charset="0"/>
                 <a:ea typeface="Calibri" pitchFamily="34" charset="-122"/>
                 <a:cs typeface="Calibri" pitchFamily="34" charset="-120"/>
               </a:rPr>
-              <a:t>Shared with gratitude — all credit to their maintainers &amp; contributors.</a:t>
-            </a:r>
-            <a:endParaRPr lang="en-US" sz="1680" dirty="0"/>
-          </a:p>
-        </p:txBody>
-      </p:sp>
-      <p:sp>
-        <p:nvSpPr>
-          <p:cNvPr id="34" name="Text 32"/>
-          <p:cNvSpPr/>
-          <p:nvPr/>
-        </p:nvSpPr>
-        <p:spPr>
-          <a:xfrm>
-            <a:off x="0" y="5623560"/>
-            <a:ext cx="12161520" cy="365760"/>
-          </a:xfrm>
-          <a:prstGeom prst="rect">
-            <a:avLst/>
-          </a:prstGeom>
-          <a:noFill/>
-          <a:ln/>
-        </p:spPr>
-        <p:txBody>
-          <a:bodyPr wrap="square" lIns="0" tIns="0" rIns="0" bIns="0" rtlCol="0" anchor="ctr"/>
-          <a:lstStyle/>
-          <a:p>
-            <a:pPr algn="ctr" indent="0" marL="0">
-              <a:buNone/>
-            </a:pPr>
-            <a:r>
-              <a:rPr lang="en-US" sz="1440" dirty="0">
-                <a:solidFill>
-                  <a:srgbClr val="8B98AC"/>
-                </a:solidFill>
-                <a:latin typeface="Courier New" pitchFamily="34" charset="0"/>
-                <a:ea typeface="Courier New" pitchFamily="34" charset="-122"/>
-                <a:cs typeface="Courier New" pitchFamily="34" charset="-120"/>
-              </a:rPr>
-              <a:t>github.com/balajich/spring-ai-with-llama</a:t>
-            </a:r>
-            <a:endParaRPr lang="en-US" sz="1440" dirty="0"/>
+              <a:t>between your app and the model on every call.</a:t>
+            </a:r>
+            <a:endParaRPr lang="en-US" sz="2280" dirty="0"/>
           </a:p>
         </p:txBody>
       </p:sp>
